--- a/projects/certtalk/v2-results/CertTalk_Presentation_v2.pptx
+++ b/projects/certtalk/v2-results/CertTalk_Presentation_v2.pptx
@@ -1328,8 +1328,8 @@
         </p:nvSpPr>
         <p:spPr>
           <a:xfrm>
-            <a:off x="-91440" y="152400"/>
-            <a:ext cx="9326880" cy="352425"/>
+            <a:off x="-91440" y="101501"/>
+            <a:ext cx="9326880" cy="323850"/>
           </a:xfrm>
           <a:prstGeom prst="rect">
             <a:avLst/>
@@ -1343,15 +1343,15 @@
           <a:p>
             <a:pPr algn="ctr" indent="0" marL="0">
               <a:spcBef>
-                <a:spcPts val="1200"/>
+                <a:spcPts val="800"/>
               </a:spcBef>
               <a:spcAft>
-                <a:spcPts val="800"/>
-              </a:spcAft>
-              <a:buNone/>
-            </a:pPr>
-            <a:r>
-              <a:rPr lang="en-US" sz="2400" b="1" dirty="0">
+                <a:spcPts val="400"/>
+              </a:spcAft>
+              <a:buNone/>
+            </a:pPr>
+            <a:r>
+              <a:rPr lang="en-US" sz="2200" b="1" dirty="0">
                 <a:solidFill>
                   <a:srgbClr val="2C3E50"/>
                 </a:solidFill>
@@ -1359,15 +1359,102 @@
                 <a:ea typeface="Arial" pitchFamily="34" charset="-122"/>
                 <a:cs typeface="Arial" pitchFamily="34" charset="-120"/>
               </a:rPr>
-              <a:t>Two Robots Need to Agree. What Do They Send?</a:t>
-            </a:r>
-            <a:endParaRPr lang="en-US" sz="2400" dirty="0"/>
+              <a:t>Send the Proof, Not the Data</a:t>
+            </a:r>
+            <a:endParaRPr lang="en-US" sz="2200" dirty="0"/>
+          </a:p>
+        </p:txBody>
+      </p:sp>
+      <p:sp>
+        <p:nvSpPr>
+          <p:cNvPr id="3" name="Text 1"/>
+          <p:cNvSpPr/>
+          <p:nvPr/>
+        </p:nvSpPr>
+        <p:spPr>
+          <a:xfrm>
+            <a:off x="-91440" y="476101"/>
+            <a:ext cx="9326880" cy="219075"/>
+          </a:xfrm>
+          <a:prstGeom prst="rect">
+            <a:avLst/>
+          </a:prstGeom>
+          <a:noFill/>
+          <a:ln/>
+        </p:spPr>
+        <p:txBody>
+          <a:bodyPr wrap="square" lIns="0" tIns="0" rIns="0" bIns="0" rtlCol="0" anchor="t"/>
+          <a:lstStyle/>
+          <a:p>
+            <a:pPr algn="ctr" indent="0" marL="0">
+              <a:spcAft>
+                <a:spcPts val="400"/>
+              </a:spcAft>
+              <a:buNone/>
+            </a:pPr>
+            <a:r>
+              <a:rPr lang="en-US" sz="1400" b="1" dirty="0">
+                <a:solidFill>
+                  <a:srgbClr val="27AE60"/>
+                </a:solidFill>
+                <a:latin typeface="Arial" pitchFamily="34" charset="0"/>
+                <a:ea typeface="Arial" pitchFamily="34" charset="-122"/>
+                <a:cs typeface="Arial" pitchFamily="34" charset="-120"/>
+              </a:rPr>
+              <a:t>✓ CertTalk: Send the certificate</a:t>
+            </a:r>
+            <a:endParaRPr lang="en-US" sz="1400" dirty="0"/>
+          </a:p>
+        </p:txBody>
+      </p:sp>
+      <p:sp>
+        <p:nvSpPr>
+          <p:cNvPr id="4" name="Text 2"/>
+          <p:cNvSpPr/>
+          <p:nvPr/>
+        </p:nvSpPr>
+        <p:spPr>
+          <a:xfrm>
+            <a:off x="340043" y="910977"/>
+            <a:ext cx="4177665" cy="200025"/>
+          </a:xfrm>
+          <a:prstGeom prst="rect">
+            <a:avLst/>
+          </a:prstGeom>
+          <a:noFill/>
+          <a:ln/>
+        </p:spPr>
+        <p:txBody>
+          <a:bodyPr wrap="square" lIns="0" tIns="0" rIns="0" bIns="0" rtlCol="0" anchor="t"/>
+          <a:lstStyle/>
+          <a:p>
+            <a:pPr algn="ctr" indent="0" marL="0">
+              <a:spcBef>
+                <a:spcPts val="1300"/>
+              </a:spcBef>
+              <a:spcAft>
+                <a:spcPts val="400"/>
+              </a:spcAft>
+              <a:buNone/>
+            </a:pPr>
+            <a:r>
+              <a:rPr lang="en-US" sz="1300" b="1" dirty="0">
+                <a:solidFill>
+                  <a:srgbClr val="3498DB"/>
+                </a:solidFill>
+                <a:latin typeface="Arial" pitchFamily="34" charset="0"/>
+                <a:ea typeface="Arial" pitchFamily="34" charset="-122"/>
+                <a:cs typeface="Arial" pitchFamily="34" charset="-120"/>
+              </a:rPr>
+              <a:t>If reachable → PATH_CERT</a:t>
+            </a:r>
+            <a:endParaRPr lang="en-US" sz="1300" dirty="0"/>
           </a:p>
         </p:txBody>
       </p:sp>
       <p:pic>
         <p:nvPicPr>
-          <p:cNvPr id="3" name="Image 0" descr="/Users/3bn/Documents/My_Repos/slide-maker/projects/certtalk/v2-results/images/grid_robot_a.png">    </p:cNvPr>
+          <p:cNvPr id="5" name="Image 0" descr="/Users/3bn/Documents/My_Repos/slide-maker/projects/certtalk/v2-results/images/grid_path_cert.png">    </p:cNvPr>
           <p:cNvPicPr>
             <a:picLocks noChangeAspect="1"/>
           </p:cNvPicPr>
@@ -1381,17 +1468,146 @@
         </p:blipFill>
         <p:spPr>
           <a:xfrm>
-            <a:off x="740569" y="606326"/>
-            <a:ext cx="1905000" cy="1905000"/>
+            <a:off x="1603325" y="1161752"/>
+            <a:ext cx="1650950" cy="1650950"/>
           </a:xfrm>
           <a:prstGeom prst="rect">
             <a:avLst/>
           </a:prstGeom>
         </p:spPr>
       </p:pic>
+      <p:sp>
+        <p:nvSpPr>
+          <p:cNvPr id="6" name="Text 3"/>
+          <p:cNvSpPr/>
+          <p:nvPr/>
+        </p:nvSpPr>
+        <p:spPr>
+          <a:xfrm>
+            <a:off x="340043" y="2901404"/>
+            <a:ext cx="4177665" cy="171450"/>
+          </a:xfrm>
+          <a:prstGeom prst="rect">
+            <a:avLst/>
+          </a:prstGeom>
+          <a:noFill/>
+          <a:ln/>
+        </p:spPr>
+        <p:txBody>
+          <a:bodyPr wrap="square" lIns="0" tIns="0" rIns="0" bIns="0" rtlCol="0" anchor="t"/>
+          <a:lstStyle/>
+          <a:p>
+            <a:pPr algn="ctr" indent="0" marL="0">
+              <a:spcBef>
+                <a:spcPts val="200"/>
+              </a:spcBef>
+              <a:spcAft>
+                <a:spcPts val="200"/>
+              </a:spcAft>
+              <a:buNone/>
+            </a:pPr>
+            <a:r>
+              <a:rPr lang="en-US" sz="1200" dirty="0">
+                <a:solidFill>
+                  <a:srgbClr val="2C3E50"/>
+                </a:solidFill>
+                <a:latin typeface="Arial" pitchFamily="34" charset="0"/>
+                <a:ea typeface="Arial" pitchFamily="34" charset="-122"/>
+                <a:cs typeface="Arial" pitchFamily="34" charset="-120"/>
+              </a:rPr>
+              <a:t>"Here's the route"</a:t>
+            </a:r>
+            <a:endParaRPr lang="en-US" sz="1200" dirty="0"/>
+          </a:p>
+        </p:txBody>
+      </p:sp>
+      <p:sp>
+        <p:nvSpPr>
+          <p:cNvPr id="7" name="Text 4"/>
+          <p:cNvSpPr/>
+          <p:nvPr/>
+        </p:nvSpPr>
+        <p:spPr>
+          <a:xfrm>
+            <a:off x="340043" y="3098155"/>
+            <a:ext cx="4177665" cy="142875"/>
+          </a:xfrm>
+          <a:prstGeom prst="rect">
+            <a:avLst/>
+          </a:prstGeom>
+          <a:noFill/>
+          <a:ln/>
+        </p:spPr>
+        <p:txBody>
+          <a:bodyPr wrap="square" lIns="0" tIns="0" rIns="0" bIns="0" rtlCol="0" anchor="t"/>
+          <a:lstStyle/>
+          <a:p>
+            <a:pPr algn="ctr" indent="0" marL="0">
+              <a:buNone/>
+            </a:pPr>
+            <a:r>
+              <a:rPr lang="en-US" sz="1000" i="1" dirty="0">
+                <a:solidFill>
+                  <a:srgbClr val="7F8C8D"/>
+                </a:solidFill>
+                <a:latin typeface="Arial" pitchFamily="34" charset="0"/>
+                <a:ea typeface="Arial" pitchFamily="34" charset="-122"/>
+                <a:cs typeface="Arial" pitchFamily="34" charset="-120"/>
+              </a:rPr>
+              <a:t>~12 bytes</a:t>
+            </a:r>
+            <a:endParaRPr lang="en-US" sz="1000" dirty="0"/>
+          </a:p>
+        </p:txBody>
+      </p:sp>
+      <p:sp>
+        <p:nvSpPr>
+          <p:cNvPr id="8" name="Text 5"/>
+          <p:cNvSpPr/>
+          <p:nvPr/>
+        </p:nvSpPr>
+        <p:spPr>
+          <a:xfrm>
+            <a:off x="4626293" y="910977"/>
+            <a:ext cx="4177665" cy="200025"/>
+          </a:xfrm>
+          <a:prstGeom prst="rect">
+            <a:avLst/>
+          </a:prstGeom>
+          <a:noFill/>
+          <a:ln/>
+        </p:spPr>
+        <p:txBody>
+          <a:bodyPr wrap="square" lIns="0" tIns="0" rIns="0" bIns="0" rtlCol="0" anchor="t"/>
+          <a:lstStyle/>
+          <a:p>
+            <a:pPr algn="ctr" indent="0" marL="0">
+              <a:spcBef>
+                <a:spcPts val="1300"/>
+              </a:spcBef>
+              <a:spcAft>
+                <a:spcPts val="400"/>
+              </a:spcAft>
+              <a:buNone/>
+            </a:pPr>
+            <a:r>
+              <a:rPr lang="en-US" sz="1300" b="1" dirty="0">
+                <a:solidFill>
+                  <a:srgbClr val="E74C3C"/>
+                </a:solidFill>
+                <a:latin typeface="Arial" pitchFamily="34" charset="0"/>
+                <a:ea typeface="Arial" pitchFamily="34" charset="-122"/>
+                <a:cs typeface="Arial" pitchFamily="34" charset="-120"/>
+              </a:rPr>
+              <a:t>If blocked → CUT_CERT</a:t>
+            </a:r>
+            <a:endParaRPr lang="en-US" sz="1300" dirty="0"/>
+          </a:p>
+        </p:txBody>
+      </p:sp>
       <p:pic>
         <p:nvPicPr>
-          <p:cNvPr id="4" name="Image 1" descr="/Users/3bn/Documents/My_Repos/slide-maker/projects/certtalk/v2-results/images/grid_robot_b.png">    </p:cNvPr>
+          <p:cNvPr id="9" name="Image 1" descr="/Users/3bn/Documents/My_Repos/slide-maker/projects/certtalk/v2-results/images/grid_cut_cert.png">    </p:cNvPr>
           <p:cNvPicPr>
             <a:picLocks noChangeAspect="1"/>
           </p:cNvPicPr>
@@ -1405,48 +1621,24 @@
         </p:blipFill>
         <p:spPr>
           <a:xfrm>
-            <a:off x="3619202" y="606326"/>
-            <a:ext cx="1905000" cy="1905000"/>
+            <a:off x="5889575" y="1161752"/>
+            <a:ext cx="1650950" cy="1650950"/>
           </a:xfrm>
           <a:prstGeom prst="rect">
             <a:avLst/>
           </a:prstGeom>
         </p:spPr>
       </p:pic>
-      <p:pic>
-        <p:nvPicPr>
-          <p:cNvPr id="5" name="Image 2" descr="/Users/3bn/Documents/My_Repos/slide-maker/projects/certtalk/v2-results/images/grid_union.png">    </p:cNvPr>
-          <p:cNvPicPr>
-            <a:picLocks noChangeAspect="1"/>
-          </p:cNvPicPr>
-          <p:nvPr/>
-        </p:nvPicPr>
-        <p:blipFill>
-          <a:blip r:embed="rId3"/>
-          <a:stretch>
-            <a:fillRect/>
-          </a:stretch>
-        </p:blipFill>
-        <p:spPr>
-          <a:xfrm>
-            <a:off x="6497836" y="606326"/>
-            <a:ext cx="1905000" cy="1905000"/>
-          </a:xfrm>
-          <a:prstGeom prst="rect">
-            <a:avLst/>
-          </a:prstGeom>
-        </p:spPr>
-      </p:pic>
-      <p:sp>
-        <p:nvSpPr>
-          <p:cNvPr id="6" name="Text 1"/>
-          <p:cNvSpPr/>
-          <p:nvPr/>
-        </p:nvSpPr>
-        <p:spPr>
-          <a:xfrm>
-            <a:off x="-91440" y="2714327"/>
-            <a:ext cx="9326880" cy="219075"/>
+      <p:sp>
+        <p:nvSpPr>
+          <p:cNvPr id="10" name="Text 6"/>
+          <p:cNvSpPr/>
+          <p:nvPr/>
+        </p:nvSpPr>
+        <p:spPr>
+          <a:xfrm>
+            <a:off x="4626293" y="2901404"/>
+            <a:ext cx="4177665" cy="171450"/>
           </a:xfrm>
           <a:prstGeom prst="rect">
             <a:avLst/>
@@ -1460,15 +1652,15 @@
           <a:p>
             <a:pPr algn="ctr" indent="0" marL="0">
               <a:spcBef>
-                <a:spcPts val="500"/>
+                <a:spcPts val="200"/>
               </a:spcBef>
               <a:spcAft>
-                <a:spcPts val="500"/>
-              </a:spcAft>
-              <a:buNone/>
-            </a:pPr>
-            <a:r>
-              <a:rPr lang="en-US" sz="1500" b="1" dirty="0">
+                <a:spcPts val="200"/>
+              </a:spcAft>
+              <a:buNone/>
+            </a:pPr>
+            <a:r>
+              <a:rPr lang="en-US" sz="1200" dirty="0">
                 <a:solidFill>
                   <a:srgbClr val="2C3E50"/>
                 </a:solidFill>
@@ -1476,77 +1668,75 @@
                 <a:ea typeface="Arial" pitchFamily="34" charset="-122"/>
                 <a:cs typeface="Arial" pitchFamily="34" charset="-120"/>
               </a:rPr>
-              <a:t>Can we reach G from S? → What to send?</a:t>
-            </a:r>
-            <a:endParaRPr lang="en-US" sz="1500" dirty="0"/>
-          </a:p>
-        </p:txBody>
-      </p:sp>
-      <p:sp>
-        <p:nvSpPr>
-          <p:cNvPr id="7" name="Text 2"/>
-          <p:cNvSpPr/>
-          <p:nvPr/>
-        </p:nvSpPr>
-        <p:spPr>
-          <a:xfrm>
-            <a:off x="507950" y="3250704"/>
-            <a:ext cx="8290661" cy="276225"/>
-          </a:xfrm>
-          <a:prstGeom prst="rect">
-            <a:avLst/>
-          </a:prstGeom>
-          <a:noFill/>
-          <a:ln/>
-        </p:spPr>
-        <p:txBody>
-          <a:bodyPr wrap="square" lIns="0" tIns="0" rIns="0" bIns="0" rtlCol="0" anchor="t"/>
-          <a:lstStyle/>
-          <a:p>
-            <a:pPr algn="l" indent="0" marL="0">
-              <a:spcBef>
-                <a:spcPts val="1500"/>
-              </a:spcBef>
-              <a:spcAft>
-                <a:spcPts val="500"/>
-              </a:spcAft>
-              <a:buNone/>
-            </a:pPr>
-            <a:r>
-              <a:rPr lang="en-US" sz="1500" b="1" dirty="0">
-                <a:solidFill>
-                  <a:srgbClr val="E74C3C"/>
-                </a:solidFill>
-                <a:latin typeface="Arial" pitchFamily="34" charset="0"/>
-                <a:ea typeface="Arial" pitchFamily="34" charset="-122"/>
-                <a:cs typeface="Arial" pitchFamily="34" charset="-120"/>
-              </a:rPr>
-              <a:t>❌ Send-All: Dump everything</a:t>
-            </a:r>
-            <a:endParaRPr lang="en-US" sz="1500" dirty="0"/>
-          </a:p>
-        </p:txBody>
-      </p:sp>
-      <p:sp>
-        <p:nvSpPr>
-          <p:cNvPr id="8" name="Text 3"/>
-          <p:cNvSpPr/>
-          <p:nvPr/>
-        </p:nvSpPr>
-        <p:spPr>
-          <a:xfrm>
-            <a:off x="507950" y="3590330"/>
-            <a:ext cx="8128099" cy="850106"/>
+              <a:t>"This wall blocks us"</a:t>
+            </a:r>
+            <a:endParaRPr lang="en-US" sz="1200" dirty="0"/>
+          </a:p>
+        </p:txBody>
+      </p:sp>
+      <p:sp>
+        <p:nvSpPr>
+          <p:cNvPr id="11" name="Text 7"/>
+          <p:cNvSpPr/>
+          <p:nvPr/>
+        </p:nvSpPr>
+        <p:spPr>
+          <a:xfrm>
+            <a:off x="4626293" y="3098155"/>
+            <a:ext cx="4177665" cy="142875"/>
+          </a:xfrm>
+          <a:prstGeom prst="rect">
+            <a:avLst/>
+          </a:prstGeom>
+          <a:noFill/>
+          <a:ln/>
+        </p:spPr>
+        <p:txBody>
+          <a:bodyPr wrap="square" lIns="0" tIns="0" rIns="0" bIns="0" rtlCol="0" anchor="t"/>
+          <a:lstStyle/>
+          <a:p>
+            <a:pPr algn="ctr" indent="0" marL="0">
+              <a:buNone/>
+            </a:pPr>
+            <a:r>
+              <a:rPr lang="en-US" sz="1000" i="1" dirty="0">
+                <a:solidFill>
+                  <a:srgbClr val="7F8C8D"/>
+                </a:solidFill>
+                <a:latin typeface="Arial" pitchFamily="34" charset="0"/>
+                <a:ea typeface="Arial" pitchFamily="34" charset="-122"/>
+                <a:cs typeface="Arial" pitchFamily="34" charset="-120"/>
+              </a:rPr>
+              <a:t>~20 bytes</a:t>
+            </a:r>
+            <a:endParaRPr lang="en-US" sz="1000" dirty="0"/>
+          </a:p>
+        </p:txBody>
+      </p:sp>
+      <p:sp>
+        <p:nvSpPr>
+          <p:cNvPr id="12" name="Text 8"/>
+          <p:cNvSpPr/>
+          <p:nvPr/>
+        </p:nvSpPr>
+        <p:spPr>
+          <a:xfrm>
+            <a:off x="507950" y="3342531"/>
+            <a:ext cx="8128099" cy="1072604"/>
           </a:xfrm>
           <a:prstGeom prst="roundRect">
             <a:avLst>
-              <a:gd name="adj" fmla="val 5976"/>
+              <a:gd name="adj" fmla="val 4736"/>
             </a:avLst>
           </a:prstGeom>
           <a:solidFill>
-            <a:srgbClr val="F8F9FA"/>
+            <a:srgbClr val="E8F8F5"/>
           </a:solidFill>
-          <a:ln/>
+          <a:ln w="19050">
+            <a:solidFill>
+              <a:srgbClr val="27AE60"/>
+            </a:solidFill>
+          </a:ln>
         </p:spPr>
         <p:txBody>
           <a:bodyPr wrap="square" rtlCol="0" anchor="ctr"/>
@@ -1561,37 +1751,56 @@
       </p:sp>
       <p:sp>
         <p:nvSpPr>
-          <p:cNvPr id="9" name="Shape 4"/>
-          <p:cNvSpPr/>
-          <p:nvPr/>
-        </p:nvSpPr>
-        <p:spPr>
-          <a:xfrm>
-            <a:off x="536525" y="3590330"/>
-            <a:ext cx="0" cy="850106"/>
-          </a:xfrm>
-          <a:prstGeom prst="line">
-            <a:avLst/>
-          </a:prstGeom>
-          <a:noFill/>
-          <a:ln w="57150">
-            <a:solidFill>
-              <a:srgbClr val="E74C3C"/>
-            </a:solidFill>
-            <a:prstDash val="solid"/>
-          </a:ln>
-        </p:spPr>
-      </p:sp>
-      <p:sp>
-        <p:nvSpPr>
-          <p:cNvPr id="10" name="Text 5"/>
-          <p:cNvSpPr/>
-          <p:nvPr/>
-        </p:nvSpPr>
-        <p:spPr>
-          <a:xfrm>
-            <a:off x="666601" y="3729930"/>
-            <a:ext cx="8025307" cy="164902"/>
+          <p:cNvPr id="13" name="Text 9"/>
+          <p:cNvSpPr/>
+          <p:nvPr/>
+        </p:nvSpPr>
+        <p:spPr>
+          <a:xfrm>
+            <a:off x="653951" y="3437781"/>
+            <a:ext cx="7992820" cy="171450"/>
+          </a:xfrm>
+          <a:prstGeom prst="rect">
+            <a:avLst/>
+          </a:prstGeom>
+          <a:noFill/>
+          <a:ln/>
+        </p:spPr>
+        <p:txBody>
+          <a:bodyPr wrap="square" lIns="0" tIns="0" rIns="0" bIns="0" rtlCol="0" anchor="t"/>
+          <a:lstStyle/>
+          <a:p>
+            <a:pPr algn="l" indent="0" marL="0">
+              <a:spcAft>
+                <a:spcPts val="300"/>
+              </a:spcAft>
+              <a:buNone/>
+            </a:pPr>
+            <a:r>
+              <a:rPr lang="en-US" sz="1200" b="1" dirty="0">
+                <a:solidFill>
+                  <a:srgbClr val="27AE60"/>
+                </a:solidFill>
+                <a:latin typeface="Arial" pitchFamily="34" charset="0"/>
+                <a:ea typeface="Arial" pitchFamily="34" charset="-122"/>
+                <a:cs typeface="Arial" pitchFamily="34" charset="-120"/>
+              </a:rPr>
+              <a:t>What is a Certificate?</a:t>
+            </a:r>
+            <a:endParaRPr lang="en-US" sz="1200" dirty="0"/>
+          </a:p>
+        </p:txBody>
+      </p:sp>
+      <p:sp>
+        <p:nvSpPr>
+          <p:cNvPr id="14" name="Text 10"/>
+          <p:cNvSpPr/>
+          <p:nvPr/>
+        </p:nvSpPr>
+        <p:spPr>
+          <a:xfrm>
+            <a:off x="653951" y="3647331"/>
+            <a:ext cx="7992820" cy="164902"/>
           </a:xfrm>
           <a:prstGeom prst="rect">
             <a:avLst/>
@@ -1616,15 +1825,161 @@
               <a:buNone/>
             </a:pPr>
             <a:r>
+              <a:rPr lang="en-US" sz="1000" b="1" dirty="0">
+                <a:solidFill>
+                  <a:srgbClr val="2C3E50"/>
+                </a:solidFill>
+                <a:latin typeface="Arial" pitchFamily="34" charset="0"/>
+                <a:ea typeface="Arial" pitchFamily="34" charset="-122"/>
+                <a:cs typeface="Arial" pitchFamily="34" charset="-120"/>
+              </a:rPr>
+              <a:t>Certificate = Claim + Artifact + Attestation</a:t>
+            </a:r>
+            <a:endParaRPr lang="en-US" sz="1000" dirty="0"/>
+          </a:p>
+        </p:txBody>
+      </p:sp>
+      <p:sp>
+        <p:nvSpPr>
+          <p:cNvPr id="15" name="Text 11"/>
+          <p:cNvSpPr/>
+          <p:nvPr/>
+        </p:nvSpPr>
+        <p:spPr>
+          <a:xfrm>
+            <a:off x="882551" y="3850332"/>
+            <a:ext cx="7607498" cy="152251"/>
+          </a:xfrm>
+          <a:prstGeom prst="rect">
+            <a:avLst/>
+          </a:prstGeom>
+          <a:noFill/>
+          <a:ln/>
+        </p:spPr>
+        <p:txBody>
+          <a:bodyPr wrap="square" lIns="0" tIns="0" rIns="0" bIns="0" rtlCol="0" anchor="t"/>
+          <a:lstStyle/>
+          <a:p>
+            <a:pPr algn="l" marL="342900" indent="-342900">
+              <a:lnSpc>
+                <a:spcPts val="1200"/>
+              </a:lnSpc>
+              <a:spcAft>
+                <a:spcPts val="100"/>
+              </a:spcAft>
+              <a:buSzPct val="100000"/>
+              <a:buChar char="•"/>
+            </a:pPr>
+            <a:r>
+              <a:rPr lang="en-US" sz="1000" b="1" dirty="0">
+                <a:solidFill>
+                  <a:srgbClr val="2C3E50"/>
+                </a:solidFill>
+                <a:latin typeface="Arial" pitchFamily="34" charset="0"/>
+                <a:ea typeface="Arial" pitchFamily="34" charset="-122"/>
+                <a:cs typeface="Arial" pitchFamily="34" charset="-120"/>
+              </a:rPr>
+              <a:t>Claim:</a:t>
+            </a:r>
+            <a:pPr algn="l" indent="0" marL="0">
+              <a:lnSpc>
+                <a:spcPts val="1200"/>
+              </a:lnSpc>
+              <a:spcAft>
+                <a:spcPts val="100"/>
+              </a:spcAft>
+              <a:buNone/>
+            </a:pPr>
+            <a:r>
               <a:rPr lang="en-US" sz="1000" dirty="0">
                 <a:solidFill>
                   <a:srgbClr val="2C3E50"/>
                 </a:solidFill>
-                <a:latin typeface="Courier New" pitchFamily="34" charset="0"/>
-                <a:ea typeface="Courier New" pitchFamily="34" charset="-122"/>
-                <a:cs typeface="Courier New" pitchFamily="34" charset="-120"/>
-              </a:rPr>
-              <a:t>A: "Blocked: (2,1), (2,2), (2,3), (2,4)..."</a:t>
+                <a:latin typeface="Arial" pitchFamily="34" charset="0"/>
+                <a:ea typeface="Arial" pitchFamily="34" charset="-122"/>
+                <a:cs typeface="Arial" pitchFamily="34" charset="-120"/>
+              </a:rPr>
+              <a:t> "Path exists" or "Unreachable" • </a:t>
+            </a:r>
+            <a:pPr algn="l" indent="0" marL="0">
+              <a:lnSpc>
+                <a:spcPts val="1200"/>
+              </a:lnSpc>
+              <a:spcAft>
+                <a:spcPts val="100"/>
+              </a:spcAft>
+              <a:buNone/>
+            </a:pPr>
+            <a:r>
+              <a:rPr lang="en-US" sz="1000" b="1" dirty="0">
+                <a:solidFill>
+                  <a:srgbClr val="2C3E50"/>
+                </a:solidFill>
+                <a:latin typeface="Arial" pitchFamily="34" charset="0"/>
+                <a:ea typeface="Arial" pitchFamily="34" charset="-122"/>
+                <a:cs typeface="Arial" pitchFamily="34" charset="-120"/>
+              </a:rPr>
+              <a:t>Artifact:</a:t>
+            </a:r>
+            <a:pPr algn="l" indent="0" marL="0">
+              <a:lnSpc>
+                <a:spcPts val="1200"/>
+              </a:lnSpc>
+              <a:spcAft>
+                <a:spcPts val="100"/>
+              </a:spcAft>
+              <a:buNone/>
+            </a:pPr>
+            <a:r>
+              <a:rPr lang="en-US" sz="1000" dirty="0">
+                <a:solidFill>
+                  <a:srgbClr val="2C3E50"/>
+                </a:solidFill>
+                <a:latin typeface="Arial" pitchFamily="34" charset="0"/>
+                <a:ea typeface="Arial" pitchFamily="34" charset="-122"/>
+                <a:cs typeface="Arial" pitchFamily="34" charset="-120"/>
+              </a:rPr>
+              <a:t> RLE-encoded path/cut • </a:t>
+            </a:r>
+            <a:pPr algn="l" indent="0" marL="0">
+              <a:lnSpc>
+                <a:spcPts val="1200"/>
+              </a:lnSpc>
+              <a:spcAft>
+                <a:spcPts val="100"/>
+              </a:spcAft>
+              <a:buNone/>
+            </a:pPr>
+            <a:r>
+              <a:rPr lang="en-US" sz="1000" b="1" dirty="0">
+                <a:solidFill>
+                  <a:srgbClr val="2C3E50"/>
+                </a:solidFill>
+                <a:latin typeface="Arial" pitchFamily="34" charset="0"/>
+                <a:ea typeface="Arial" pitchFamily="34" charset="-122"/>
+                <a:cs typeface="Arial" pitchFamily="34" charset="-120"/>
+              </a:rPr>
+              <a:t>Attestation:</a:t>
+            </a:r>
+            <a:pPr algn="l" indent="0" marL="0">
+              <a:lnSpc>
+                <a:spcPts val="1200"/>
+              </a:lnSpc>
+              <a:spcAft>
+                <a:spcPts val="100"/>
+              </a:spcAft>
+              <a:buNone/>
+            </a:pPr>
+            <a:r>
+              <a:rPr lang="en-US" sz="1000" dirty="0">
+                <a:solidFill>
+                  <a:srgbClr val="2C3E50"/>
+                </a:solidFill>
+                <a:latin typeface="Arial" pitchFamily="34" charset="0"/>
+                <a:ea typeface="Arial" pitchFamily="34" charset="-122"/>
+                <a:cs typeface="Arial" pitchFamily="34" charset="-120"/>
+              </a:rPr>
+              <a:t> Witness bits</a:t>
             </a:r>
             <a:endParaRPr lang="en-US" sz="1000" dirty="0"/>
           </a:p>
@@ -1632,14 +1987,14 @@
       </p:sp>
       <p:sp>
         <p:nvSpPr>
-          <p:cNvPr id="11" name="Text 6"/>
-          <p:cNvSpPr/>
-          <p:nvPr/>
-        </p:nvSpPr>
-        <p:spPr>
-          <a:xfrm>
-            <a:off x="666601" y="3932932"/>
-            <a:ext cx="8025307" cy="164902"/>
+          <p:cNvPr id="16" name="Text 12"/>
+          <p:cNvSpPr/>
+          <p:nvPr/>
+        </p:nvSpPr>
+        <p:spPr>
+          <a:xfrm>
+            <a:off x="653951" y="4078784"/>
+            <a:ext cx="7992820" cy="164902"/>
           </a:xfrm>
           <a:prstGeom prst="rect">
             <a:avLst/>
@@ -1659,46 +2014,21 @@
                 <a:spcPts val="300"/>
               </a:spcBef>
               <a:spcAft>
-                <a:spcPts val="300"/>
-              </a:spcAft>
-              <a:buNone/>
-            </a:pPr>
-            <a:r>
-              <a:rPr lang="en-US" sz="1000" dirty="0">
+                <a:spcPts val="600"/>
+              </a:spcAft>
+              <a:buNone/>
+            </a:pPr>
+            <a:r>
+              <a:rPr lang="en-US" sz="1000" b="1" dirty="0">
                 <a:solidFill>
                   <a:srgbClr val="2C3E50"/>
                 </a:solidFill>
-                <a:latin typeface="Courier New" pitchFamily="34" charset="0"/>
-                <a:ea typeface="Courier New" pitchFamily="34" charset="-122"/>
-                <a:cs typeface="Courier New" pitchFamily="34" charset="-120"/>
-              </a:rPr>
-              <a:t>B: [rebuilds full map, runs solver]</a:t>
-            </a:r>
-            <a:endParaRPr lang="en-US" sz="1000" dirty="0"/>
-          </a:p>
-        </p:txBody>
-      </p:sp>
-      <p:sp>
-        <p:nvSpPr>
-          <p:cNvPr id="12" name="Text 7"/>
-          <p:cNvSpPr/>
-          <p:nvPr/>
-        </p:nvSpPr>
-        <p:spPr>
-          <a:xfrm>
-            <a:off x="666601" y="4135934"/>
-            <a:ext cx="8025307" cy="164902"/>
-          </a:xfrm>
-          <a:prstGeom prst="rect">
-            <a:avLst/>
-          </a:prstGeom>
-          <a:noFill/>
-          <a:ln/>
-        </p:spPr>
-        <p:txBody>
-          <a:bodyPr wrap="square" lIns="0" tIns="0" rIns="0" bIns="0" rtlCol="0" anchor="t"/>
-          <a:lstStyle/>
-          <a:p>
+                <a:latin typeface="Arial" pitchFamily="34" charset="0"/>
+                <a:ea typeface="Arial" pitchFamily="34" charset="-122"/>
+                <a:cs typeface="Arial" pitchFamily="34" charset="-120"/>
+              </a:rPr>
+              <a:t>To verify:</a:t>
+            </a:r>
             <a:pPr algn="l" indent="0" marL="0">
               <a:lnSpc>
                 <a:spcPts val="1300"/>
@@ -1707,7 +2037,7 @@
                 <a:spcPts val="300"/>
               </a:spcBef>
               <a:spcAft>
-                <a:spcPts val="300"/>
+                <a:spcPts val="600"/>
               </a:spcAft>
               <a:buNone/>
             </a:pPr>
@@ -1716,97 +2046,105 @@
                 <a:solidFill>
                   <a:srgbClr val="2C3E50"/>
                 </a:solidFill>
-                <a:latin typeface="Courier New" pitchFamily="34" charset="0"/>
-                <a:ea typeface="Courier New" pitchFamily="34" charset="-122"/>
-                <a:cs typeface="Courier New" pitchFamily="34" charset="-120"/>
-              </a:rPr>
-              <a:t>B: "Yes, path exists"</a:t>
-            </a:r>
-            <a:endParaRPr lang="en-US" sz="1000" dirty="0"/>
-          </a:p>
-        </p:txBody>
-      </p:sp>
-      <p:sp>
-        <p:nvSpPr>
-          <p:cNvPr id="13" name="Text 8"/>
-          <p:cNvSpPr/>
-          <p:nvPr/>
-        </p:nvSpPr>
-        <p:spPr>
-          <a:xfrm>
-            <a:off x="507950" y="4503837"/>
-            <a:ext cx="8128099" cy="454372"/>
-          </a:xfrm>
-          <a:prstGeom prst="roundRect">
-            <a:avLst>
-              <a:gd name="adj" fmla="val 11180"/>
-            </a:avLst>
-          </a:prstGeom>
-          <a:solidFill>
-            <a:srgbClr val="FFE6E6"/>
-          </a:solidFill>
-          <a:ln w="19050">
-            <a:solidFill>
-              <a:srgbClr val="E74C3C"/>
-            </a:solidFill>
-          </a:ln>
-        </p:spPr>
-        <p:txBody>
-          <a:bodyPr wrap="square" rtlCol="0" anchor="ctr"/>
-          <a:lstStyle/>
-          <a:p>
-            <a:pPr indent="0" marL="0">
-              <a:buNone/>
-            </a:pPr>
-            <a:endParaRPr lang="en-US" dirty="0"/>
-          </a:p>
-        </p:txBody>
-      </p:sp>
-      <p:sp>
-        <p:nvSpPr>
-          <p:cNvPr id="14" name="Text 9"/>
-          <p:cNvSpPr/>
-          <p:nvPr/>
-        </p:nvSpPr>
-        <p:spPr>
-          <a:xfrm>
-            <a:off x="603200" y="4624388"/>
-            <a:ext cx="8096351" cy="213271"/>
-          </a:xfrm>
-          <a:prstGeom prst="rect">
-            <a:avLst/>
-          </a:prstGeom>
-          <a:noFill/>
-          <a:ln/>
-        </p:spPr>
-        <p:txBody>
-          <a:bodyPr wrap="square" lIns="0" tIns="0" rIns="0" bIns="0" rtlCol="0" anchor="t"/>
-          <a:lstStyle/>
-          <a:p>
+                <a:latin typeface="Arial" pitchFamily="34" charset="0"/>
+                <a:ea typeface="Arial" pitchFamily="34" charset="-122"/>
+                <a:cs typeface="Arial" pitchFamily="34" charset="-120"/>
+              </a:rPr>
+              <a:t> Certificate + Union map only. </a:t>
+            </a:r>
             <a:pPr algn="l" indent="0" marL="0">
               <a:lnSpc>
-                <a:spcPts val="1680"/>
+                <a:spcPts val="1300"/>
               </a:lnSpc>
               <a:spcBef>
-                <a:spcPts val="200"/>
+                <a:spcPts val="300"/>
               </a:spcBef>
               <a:spcAft>
-                <a:spcPts val="200"/>
-              </a:spcAft>
-              <a:buNone/>
-            </a:pPr>
-            <a:r>
-              <a:rPr lang="en-US" sz="1200" b="1" dirty="0">
-                <a:solidFill>
-                  <a:srgbClr val="C0392B"/>
-                </a:solidFill>
-                <a:latin typeface="Arial" pitchFamily="34" charset="0"/>
-                <a:ea typeface="Arial" pitchFamily="34" charset="-122"/>
-                <a:cs typeface="Arial" pitchFamily="34" charset="-120"/>
-              </a:rPr>
-              <a:t>Problem: Raw data, not proof. No attribution. Need solver.</a:t>
-            </a:r>
-            <a:endParaRPr lang="en-US" sz="1200" dirty="0"/>
+                <a:spcPts val="600"/>
+              </a:spcAft>
+              <a:buNone/>
+            </a:pPr>
+            <a:r>
+              <a:rPr lang="en-US" sz="1000" b="1" dirty="0">
+                <a:solidFill>
+                  <a:srgbClr val="2C3E50"/>
+                </a:solidFill>
+                <a:latin typeface="Arial" pitchFamily="34" charset="0"/>
+                <a:ea typeface="Arial" pitchFamily="34" charset="-122"/>
+                <a:cs typeface="Arial" pitchFamily="34" charset="-120"/>
+              </a:rPr>
+              <a:t>Send-All</a:t>
+            </a:r>
+            <a:pPr algn="l" indent="0" marL="0">
+              <a:lnSpc>
+                <a:spcPts val="1300"/>
+              </a:lnSpc>
+              <a:spcBef>
+                <a:spcPts val="300"/>
+              </a:spcBef>
+              <a:spcAft>
+                <a:spcPts val="600"/>
+              </a:spcAft>
+              <a:buNone/>
+            </a:pPr>
+            <a:r>
+              <a:rPr lang="en-US" sz="1000" dirty="0">
+                <a:solidFill>
+                  <a:srgbClr val="2C3E50"/>
+                </a:solidFill>
+                <a:latin typeface="Arial" pitchFamily="34" charset="0"/>
+                <a:ea typeface="Arial" pitchFamily="34" charset="-122"/>
+                <a:cs typeface="Arial" pitchFamily="34" charset="-120"/>
+              </a:rPr>
+              <a:t> sends coords → rebuild + solve. </a:t>
+            </a:r>
+            <a:pPr algn="l" indent="0" marL="0">
+              <a:lnSpc>
+                <a:spcPts val="1300"/>
+              </a:lnSpc>
+              <a:spcBef>
+                <a:spcPts val="300"/>
+              </a:spcBef>
+              <a:spcAft>
+                <a:spcPts val="600"/>
+              </a:spcAft>
+              <a:buNone/>
+            </a:pPr>
+            <a:r>
+              <a:rPr lang="en-US" sz="1000" b="1" dirty="0">
+                <a:solidFill>
+                  <a:srgbClr val="2C3E50"/>
+                </a:solidFill>
+                <a:latin typeface="Arial" pitchFamily="34" charset="0"/>
+                <a:ea typeface="Arial" pitchFamily="34" charset="-122"/>
+                <a:cs typeface="Arial" pitchFamily="34" charset="-120"/>
+              </a:rPr>
+              <a:t>CertTalk</a:t>
+            </a:r>
+            <a:pPr algn="l" indent="0" marL="0">
+              <a:lnSpc>
+                <a:spcPts val="1300"/>
+              </a:lnSpc>
+              <a:spcBef>
+                <a:spcPts val="300"/>
+              </a:spcBef>
+              <a:spcAft>
+                <a:spcPts val="600"/>
+              </a:spcAft>
+              <a:buNone/>
+            </a:pPr>
+            <a:r>
+              <a:rPr lang="en-US" sz="1000" dirty="0">
+                <a:solidFill>
+                  <a:srgbClr val="2C3E50"/>
+                </a:solidFill>
+                <a:latin typeface="Arial" pitchFamily="34" charset="0"/>
+                <a:ea typeface="Arial" pitchFamily="34" charset="-122"/>
+                <a:cs typeface="Arial" pitchFamily="34" charset="-120"/>
+              </a:rPr>
+              <a:t> sends proof → direct check.</a:t>
+            </a:r>
+            <a:endParaRPr lang="en-US" sz="1000" dirty="0"/>
           </a:p>
         </p:txBody>
       </p:sp>
@@ -1850,7 +2188,7 @@
         </p:nvSpPr>
         <p:spPr>
           <a:xfrm>
-            <a:off x="-91440" y="126950"/>
+            <a:off x="-91440" y="101501"/>
             <a:ext cx="9326880" cy="323850"/>
           </a:xfrm>
           <a:prstGeom prst="rect">
@@ -1865,15 +2203,144 @@
           <a:p>
             <a:pPr algn="ctr" indent="0" marL="0">
               <a:spcBef>
+                <a:spcPts val="800"/>
+              </a:spcBef>
+              <a:spcAft>
+                <a:spcPts val="400"/>
+              </a:spcAft>
+              <a:buNone/>
+            </a:pPr>
+            <a:r>
+              <a:rPr lang="en-US" sz="2200" b="1" dirty="0">
+                <a:solidFill>
+                  <a:srgbClr val="2C3E50"/>
+                </a:solidFill>
+                <a:latin typeface="Arial" pitchFamily="34" charset="0"/>
+                <a:ea typeface="Arial" pitchFamily="34" charset="-122"/>
+                <a:cs typeface="Arial" pitchFamily="34" charset="-120"/>
+              </a:rPr>
+              <a:t>Breaking Epistemic Deadlock</a:t>
+            </a:r>
+            <a:endParaRPr lang="en-US" sz="2200" dirty="0"/>
+          </a:p>
+        </p:txBody>
+      </p:sp>
+      <p:sp>
+        <p:nvSpPr>
+          <p:cNvPr id="3" name="Text 1"/>
+          <p:cNvSpPr/>
+          <p:nvPr/>
+        </p:nvSpPr>
+        <p:spPr>
+          <a:xfrm>
+            <a:off x="-91440" y="476101"/>
+            <a:ext cx="9326880" cy="171450"/>
+          </a:xfrm>
+          <a:prstGeom prst="rect">
+            <a:avLst/>
+          </a:prstGeom>
+          <a:noFill/>
+          <a:ln/>
+        </p:spPr>
+        <p:txBody>
+          <a:bodyPr wrap="square" lIns="0" tIns="0" rIns="0" bIns="0" rtlCol="0" anchor="t"/>
+          <a:lstStyle/>
+          <a:p>
+            <a:pPr algn="ctr" indent="0" marL="0">
+              <a:spcAft>
                 <a:spcPts val="1000"/>
-              </a:spcBef>
-              <a:spcAft>
-                <a:spcPts val="600"/>
-              </a:spcAft>
-              <a:buNone/>
-            </a:pPr>
-            <a:r>
-              <a:rPr lang="en-US" sz="2200" b="1" dirty="0">
+              </a:spcAft>
+              <a:buNone/>
+            </a:pPr>
+            <a:r>
+              <a:rPr lang="en-US" sz="1200" dirty="0">
+                <a:solidFill>
+                  <a:srgbClr val="7F8C8D"/>
+                </a:solidFill>
+                <a:latin typeface="Arial" pitchFamily="34" charset="0"/>
+                <a:ea typeface="Arial" pitchFamily="34" charset="-122"/>
+                <a:cs typeface="Arial" pitchFamily="34" charset="-120"/>
+              </a:rPr>
+              <a:t>How agents certify with partial knowledge</a:t>
+            </a:r>
+            <a:endParaRPr lang="en-US" sz="1200" dirty="0"/>
+          </a:p>
+        </p:txBody>
+      </p:sp>
+      <p:sp>
+        <p:nvSpPr>
+          <p:cNvPr id="4" name="Text 2"/>
+          <p:cNvSpPr/>
+          <p:nvPr/>
+        </p:nvSpPr>
+        <p:spPr>
+          <a:xfrm>
+            <a:off x="334363" y="774502"/>
+            <a:ext cx="4119372" cy="238125"/>
+          </a:xfrm>
+          <a:prstGeom prst="rect">
+            <a:avLst/>
+          </a:prstGeom>
+          <a:noFill/>
+          <a:ln/>
+        </p:spPr>
+        <p:txBody>
+          <a:bodyPr wrap="square" lIns="0" tIns="0" rIns="0" bIns="0" rtlCol="0" anchor="t"/>
+          <a:lstStyle/>
+          <a:p>
+            <a:pPr algn="ctr" indent="0" marL="0">
+              <a:spcAft>
+                <a:spcPts val="800"/>
+              </a:spcAft>
+              <a:buNone/>
+            </a:pPr>
+            <a:r>
+              <a:rPr lang="en-US" sz="1600" b="1" dirty="0">
+                <a:solidFill>
+                  <a:srgbClr val="E74C3C"/>
+                </a:solidFill>
+                <a:latin typeface="Arial" pitchFamily="34" charset="0"/>
+                <a:ea typeface="Arial" pitchFamily="34" charset="-122"/>
+                <a:cs typeface="Arial" pitchFamily="34" charset="-120"/>
+              </a:rPr>
+              <a:t>The Problem</a:t>
+            </a:r>
+            <a:endParaRPr lang="en-US" sz="1600" dirty="0"/>
+          </a:p>
+        </p:txBody>
+      </p:sp>
+      <p:sp>
+        <p:nvSpPr>
+          <p:cNvPr id="5" name="Text 3"/>
+          <p:cNvSpPr/>
+          <p:nvPr/>
+        </p:nvSpPr>
+        <p:spPr>
+          <a:xfrm>
+            <a:off x="374749" y="1114127"/>
+            <a:ext cx="4119372" cy="177701"/>
+          </a:xfrm>
+          <a:prstGeom prst="rect">
+            <a:avLst/>
+          </a:prstGeom>
+          <a:noFill/>
+          <a:ln/>
+        </p:spPr>
+        <p:txBody>
+          <a:bodyPr wrap="square" lIns="0" tIns="0" rIns="0" bIns="0" rtlCol="0" anchor="t"/>
+          <a:lstStyle/>
+          <a:p>
+            <a:pPr algn="l" indent="0" marL="0">
+              <a:lnSpc>
+                <a:spcPts val="1400"/>
+              </a:lnSpc>
+              <a:spcAft>
+                <a:spcPts val="1000"/>
+              </a:spcAft>
+              <a:buNone/>
+            </a:pPr>
+            <a:r>
+              <a:rPr lang="en-US" sz="1000" dirty="0">
                 <a:solidFill>
                   <a:srgbClr val="2C3E50"/>
                 </a:solidFill>
@@ -1881,202 +2348,7 @@
                 <a:ea typeface="Arial" pitchFamily="34" charset="-122"/>
                 <a:cs typeface="Arial" pitchFamily="34" charset="-120"/>
               </a:rPr>
-              <a:t>Send the Proof, Not the Data</a:t>
-            </a:r>
-            <a:endParaRPr lang="en-US" sz="2200" dirty="0"/>
-          </a:p>
-        </p:txBody>
-      </p:sp>
-      <p:sp>
-        <p:nvSpPr>
-          <p:cNvPr id="3" name="Text 1"/>
-          <p:cNvSpPr/>
-          <p:nvPr/>
-        </p:nvSpPr>
-        <p:spPr>
-          <a:xfrm>
-            <a:off x="-91440" y="527000"/>
-            <a:ext cx="9326880" cy="219075"/>
-          </a:xfrm>
-          <a:prstGeom prst="rect">
-            <a:avLst/>
-          </a:prstGeom>
-          <a:noFill/>
-          <a:ln/>
-        </p:spPr>
-        <p:txBody>
-          <a:bodyPr wrap="square" lIns="0" tIns="0" rIns="0" bIns="0" rtlCol="0" anchor="t"/>
-          <a:lstStyle/>
-          <a:p>
-            <a:pPr algn="ctr" indent="0" marL="0">
-              <a:spcAft>
-                <a:spcPts val="600"/>
-              </a:spcAft>
-              <a:buNone/>
-            </a:pPr>
-            <a:r>
-              <a:rPr lang="en-US" sz="1400" b="1" dirty="0">
-                <a:solidFill>
-                  <a:srgbClr val="27AE60"/>
-                </a:solidFill>
-                <a:latin typeface="Arial" pitchFamily="34" charset="0"/>
-                <a:ea typeface="Arial" pitchFamily="34" charset="-122"/>
-                <a:cs typeface="Arial" pitchFamily="34" charset="-120"/>
-              </a:rPr>
-              <a:t>✓ CertTalk: Send the certificate</a:t>
-            </a:r>
-            <a:endParaRPr lang="en-US" sz="1400" dirty="0"/>
-          </a:p>
-        </p:txBody>
-      </p:sp>
-      <p:sp>
-        <p:nvSpPr>
-          <p:cNvPr id="4" name="Text 2"/>
-          <p:cNvSpPr/>
-          <p:nvPr/>
-        </p:nvSpPr>
-        <p:spPr>
-          <a:xfrm>
-            <a:off x="340043" y="987326"/>
-            <a:ext cx="4177665" cy="200025"/>
-          </a:xfrm>
-          <a:prstGeom prst="rect">
-            <a:avLst/>
-          </a:prstGeom>
-          <a:noFill/>
-          <a:ln/>
-        </p:spPr>
-        <p:txBody>
-          <a:bodyPr wrap="square" lIns="0" tIns="0" rIns="0" bIns="0" rtlCol="0" anchor="t"/>
-          <a:lstStyle/>
-          <a:p>
-            <a:pPr algn="ctr" indent="0" marL="0">
-              <a:spcBef>
-                <a:spcPts val="1300"/>
-              </a:spcBef>
-              <a:spcAft>
-                <a:spcPts val="400"/>
-              </a:spcAft>
-              <a:buNone/>
-            </a:pPr>
-            <a:r>
-              <a:rPr lang="en-US" sz="1300" b="1" dirty="0">
-                <a:solidFill>
-                  <a:srgbClr val="3498DB"/>
-                </a:solidFill>
-                <a:latin typeface="Arial" pitchFamily="34" charset="0"/>
-                <a:ea typeface="Arial" pitchFamily="34" charset="-122"/>
-                <a:cs typeface="Arial" pitchFamily="34" charset="-120"/>
-              </a:rPr>
-              <a:t>If reachable → PATH_CERT</a:t>
-            </a:r>
-            <a:endParaRPr lang="en-US" sz="1300" dirty="0"/>
-          </a:p>
-        </p:txBody>
-      </p:sp>
-      <p:pic>
-        <p:nvPicPr>
-          <p:cNvPr id="5" name="Image 0" descr="/Users/3bn/Documents/My_Repos/slide-maker/projects/certtalk/v2-results/images/grid_path_cert.png">    </p:cNvPr>
-          <p:cNvPicPr>
-            <a:picLocks noChangeAspect="1"/>
-          </p:cNvPicPr>
-          <p:nvPr/>
-        </p:nvPicPr>
-        <p:blipFill>
-          <a:blip r:embed="rId1"/>
-          <a:stretch>
-            <a:fillRect/>
-          </a:stretch>
-        </p:blipFill>
-        <p:spPr>
-          <a:xfrm>
-            <a:off x="1508075" y="1238101"/>
-            <a:ext cx="1841450" cy="1841450"/>
-          </a:xfrm>
-          <a:prstGeom prst="rect">
-            <a:avLst/>
-          </a:prstGeom>
-        </p:spPr>
-      </p:pic>
-      <p:sp>
-        <p:nvSpPr>
-          <p:cNvPr id="6" name="Text 3"/>
-          <p:cNvSpPr/>
-          <p:nvPr/>
-        </p:nvSpPr>
-        <p:spPr>
-          <a:xfrm>
-            <a:off x="340043" y="3181052"/>
-            <a:ext cx="4177665" cy="171450"/>
-          </a:xfrm>
-          <a:prstGeom prst="rect">
-            <a:avLst/>
-          </a:prstGeom>
-          <a:noFill/>
-          <a:ln/>
-        </p:spPr>
-        <p:txBody>
-          <a:bodyPr wrap="square" lIns="0" tIns="0" rIns="0" bIns="0" rtlCol="0" anchor="t"/>
-          <a:lstStyle/>
-          <a:p>
-            <a:pPr algn="ctr" indent="0" marL="0">
-              <a:spcBef>
-                <a:spcPts val="200"/>
-              </a:spcBef>
-              <a:spcAft>
-                <a:spcPts val="200"/>
-              </a:spcAft>
-              <a:buNone/>
-            </a:pPr>
-            <a:r>
-              <a:rPr lang="en-US" sz="1200" dirty="0">
-                <a:solidFill>
-                  <a:srgbClr val="2C3E50"/>
-                </a:solidFill>
-                <a:latin typeface="Arial" pitchFamily="34" charset="0"/>
-                <a:ea typeface="Arial" pitchFamily="34" charset="-122"/>
-                <a:cs typeface="Arial" pitchFamily="34" charset="-120"/>
-              </a:rPr>
-              <a:t>"Here's the route"</a:t>
-            </a:r>
-            <a:endParaRPr lang="en-US" sz="1200" dirty="0"/>
-          </a:p>
-        </p:txBody>
-      </p:sp>
-      <p:sp>
-        <p:nvSpPr>
-          <p:cNvPr id="7" name="Text 4"/>
-          <p:cNvSpPr/>
-          <p:nvPr/>
-        </p:nvSpPr>
-        <p:spPr>
-          <a:xfrm>
-            <a:off x="340043" y="3377803"/>
-            <a:ext cx="4177665" cy="142875"/>
-          </a:xfrm>
-          <a:prstGeom prst="rect">
-            <a:avLst/>
-          </a:prstGeom>
-          <a:noFill/>
-          <a:ln/>
-        </p:spPr>
-        <p:txBody>
-          <a:bodyPr wrap="square" lIns="0" tIns="0" rIns="0" bIns="0" rtlCol="0" anchor="t"/>
-          <a:lstStyle/>
-          <a:p>
-            <a:pPr algn="ctr" indent="0" marL="0">
-              <a:buNone/>
-            </a:pPr>
-            <a:r>
-              <a:rPr lang="en-US" sz="1000" i="1" dirty="0">
-                <a:solidFill>
-                  <a:srgbClr val="7F8C8D"/>
-                </a:solidFill>
-                <a:latin typeface="Arial" pitchFamily="34" charset="0"/>
-                <a:ea typeface="Arial" pitchFamily="34" charset="-122"/>
-                <a:cs typeface="Arial" pitchFamily="34" charset="-120"/>
-              </a:rPr>
-              <a:t>~12 bytes</a:t>
+              <a:t>A proposes cut with 6 cells. B can only verify 3 of them:</a:t>
             </a:r>
             <a:endParaRPr lang="en-US" sz="1000" dirty="0"/>
           </a:p>
@@ -2084,171 +2356,1507 @@
       </p:sp>
       <p:sp>
         <p:nvSpPr>
-          <p:cNvPr id="8" name="Text 5"/>
-          <p:cNvSpPr/>
-          <p:nvPr/>
-        </p:nvSpPr>
-        <p:spPr>
-          <a:xfrm>
-            <a:off x="4626293" y="987326"/>
-            <a:ext cx="4177665" cy="200025"/>
-          </a:xfrm>
-          <a:prstGeom prst="rect">
-            <a:avLst/>
-          </a:prstGeom>
-          <a:noFill/>
-          <a:ln/>
-        </p:spPr>
-        <p:txBody>
-          <a:bodyPr wrap="square" lIns="0" tIns="0" rIns="0" bIns="0" rtlCol="0" anchor="t"/>
-          <a:lstStyle/>
-          <a:p>
-            <a:pPr algn="ctr" indent="0" marL="0">
-              <a:spcBef>
-                <a:spcPts val="1300"/>
-              </a:spcBef>
-              <a:spcAft>
-                <a:spcPts val="400"/>
-              </a:spcAft>
-              <a:buNone/>
-            </a:pPr>
-            <a:r>
-              <a:rPr lang="en-US" sz="1300" b="1" dirty="0">
-                <a:solidFill>
-                  <a:srgbClr val="E74C3C"/>
-                </a:solidFill>
-                <a:latin typeface="Arial" pitchFamily="34" charset="0"/>
-                <a:ea typeface="Arial" pitchFamily="34" charset="-122"/>
-                <a:cs typeface="Arial" pitchFamily="34" charset="-120"/>
-              </a:rPr>
-              <a:t>If blocked → CUT_CERT</a:t>
-            </a:r>
-            <a:endParaRPr lang="en-US" sz="1300" dirty="0"/>
-          </a:p>
-        </p:txBody>
-      </p:sp>
-      <p:pic>
-        <p:nvPicPr>
-          <p:cNvPr id="9" name="Image 1" descr="/Users/3bn/Documents/My_Repos/slide-maker/projects/certtalk/v2-results/images/grid_cut_cert.png">    </p:cNvPr>
-          <p:cNvPicPr>
-            <a:picLocks noChangeAspect="1"/>
-          </p:cNvPicPr>
-          <p:nvPr/>
-        </p:nvPicPr>
-        <p:blipFill>
-          <a:blip r:embed="rId2"/>
-          <a:stretch>
-            <a:fillRect/>
-          </a:stretch>
-        </p:blipFill>
-        <p:spPr>
-          <a:xfrm>
-            <a:off x="5794325" y="1238101"/>
-            <a:ext cx="1841450" cy="1841450"/>
-          </a:xfrm>
-          <a:prstGeom prst="rect">
-            <a:avLst/>
-          </a:prstGeom>
-        </p:spPr>
-      </p:pic>
-      <p:sp>
-        <p:nvSpPr>
-          <p:cNvPr id="10" name="Text 6"/>
-          <p:cNvSpPr/>
-          <p:nvPr/>
-        </p:nvSpPr>
-        <p:spPr>
-          <a:xfrm>
-            <a:off x="4626293" y="3181052"/>
-            <a:ext cx="4177665" cy="171450"/>
-          </a:xfrm>
-          <a:prstGeom prst="rect">
-            <a:avLst/>
-          </a:prstGeom>
-          <a:noFill/>
-          <a:ln/>
-        </p:spPr>
-        <p:txBody>
-          <a:bodyPr wrap="square" lIns="0" tIns="0" rIns="0" bIns="0" rtlCol="0" anchor="t"/>
-          <a:lstStyle/>
-          <a:p>
-            <a:pPr algn="ctr" indent="0" marL="0">
-              <a:spcBef>
-                <a:spcPts val="200"/>
-              </a:spcBef>
-              <a:spcAft>
-                <a:spcPts val="200"/>
-              </a:spcAft>
-              <a:buNone/>
-            </a:pPr>
-            <a:r>
-              <a:rPr lang="en-US" sz="1200" dirty="0">
-                <a:solidFill>
-                  <a:srgbClr val="2C3E50"/>
-                </a:solidFill>
-                <a:latin typeface="Arial" pitchFamily="34" charset="0"/>
-                <a:ea typeface="Arial" pitchFamily="34" charset="-122"/>
-                <a:cs typeface="Arial" pitchFamily="34" charset="-120"/>
-              </a:rPr>
-              <a:t>"This wall blocks us"</a:t>
-            </a:r>
-            <a:endParaRPr lang="en-US" sz="1200" dirty="0"/>
-          </a:p>
-        </p:txBody>
-      </p:sp>
-      <p:sp>
-        <p:nvSpPr>
-          <p:cNvPr id="11" name="Text 7"/>
-          <p:cNvSpPr/>
-          <p:nvPr/>
-        </p:nvSpPr>
-        <p:spPr>
-          <a:xfrm>
-            <a:off x="4626293" y="3377803"/>
-            <a:ext cx="4177665" cy="142875"/>
-          </a:xfrm>
-          <a:prstGeom prst="rect">
-            <a:avLst/>
-          </a:prstGeom>
-          <a:noFill/>
-          <a:ln/>
-        </p:spPr>
-        <p:txBody>
-          <a:bodyPr wrap="square" lIns="0" tIns="0" rIns="0" bIns="0" rtlCol="0" anchor="t"/>
-          <a:lstStyle/>
-          <a:p>
-            <a:pPr algn="ctr" indent="0" marL="0">
-              <a:buNone/>
-            </a:pPr>
-            <a:r>
-              <a:rPr lang="en-US" sz="1000" i="1" dirty="0">
-                <a:solidFill>
-                  <a:srgbClr val="7F8C8D"/>
-                </a:solidFill>
-                <a:latin typeface="Arial" pitchFamily="34" charset="0"/>
-                <a:ea typeface="Arial" pitchFamily="34" charset="-122"/>
-                <a:cs typeface="Arial" pitchFamily="34" charset="-120"/>
-              </a:rPr>
-              <a:t>~20 bytes</a:t>
-            </a:r>
-            <a:endParaRPr lang="en-US" sz="1000" dirty="0"/>
-          </a:p>
-        </p:txBody>
-      </p:sp>
-      <p:sp>
-        <p:nvSpPr>
-          <p:cNvPr id="12" name="Text 8"/>
-          <p:cNvSpPr/>
-          <p:nvPr/>
-        </p:nvSpPr>
-        <p:spPr>
-          <a:xfrm>
-            <a:off x="507950" y="3673078"/>
-            <a:ext cx="8128099" cy="814388"/>
+          <p:cNvPr id="6" name="Text 4"/>
+          <p:cNvSpPr/>
+          <p:nvPr/>
+        </p:nvSpPr>
+        <p:spPr>
+          <a:xfrm>
+            <a:off x="374749" y="1418779"/>
+            <a:ext cx="609600" cy="609600"/>
           </a:xfrm>
           <a:prstGeom prst="roundRect">
             <a:avLst>
-              <a:gd name="adj" fmla="val 6238"/>
+              <a:gd name="adj" fmla="val 8333"/>
+            </a:avLst>
+          </a:prstGeom>
+          <a:solidFill>
+            <a:srgbClr val="D5F4E6"/>
+          </a:solidFill>
+          <a:ln w="19050">
+            <a:solidFill>
+              <a:srgbClr val="27AE60"/>
+            </a:solidFill>
+          </a:ln>
+        </p:spPr>
+        <p:txBody>
+          <a:bodyPr wrap="square" rtlCol="0" anchor="ctr"/>
+          <a:lstStyle/>
+          <a:p>
+            <a:pPr indent="0" marL="0">
+              <a:buNone/>
+            </a:pPr>
+            <a:endParaRPr lang="en-US" dirty="0"/>
+          </a:p>
+        </p:txBody>
+      </p:sp>
+      <p:sp>
+        <p:nvSpPr>
+          <p:cNvPr id="7" name="Text 5"/>
+          <p:cNvSpPr/>
+          <p:nvPr/>
+        </p:nvSpPr>
+        <p:spPr>
+          <a:xfrm>
+            <a:off x="582513" y="1566416"/>
+            <a:ext cx="197953" cy="314325"/>
+          </a:xfrm>
+          <a:prstGeom prst="rect">
+            <a:avLst/>
+          </a:prstGeom>
+          <a:noFill/>
+          <a:ln/>
+        </p:spPr>
+        <p:txBody>
+          <a:bodyPr wrap="square" lIns="0" tIns="0" rIns="0" bIns="0" rtlCol="0" anchor="t"/>
+          <a:lstStyle/>
+          <a:p>
+            <a:pPr algn="l" indent="0" marL="0">
+              <a:buNone/>
+            </a:pPr>
+            <a:r>
+              <a:rPr lang="en-US" sz="2000" b="1" dirty="0">
+                <a:solidFill>
+                  <a:srgbClr val="27AE60"/>
+                </a:solidFill>
+                <a:latin typeface="Arial" pitchFamily="34" charset="0"/>
+                <a:ea typeface="Arial" pitchFamily="34" charset="-122"/>
+                <a:cs typeface="Arial" pitchFamily="34" charset="-120"/>
+              </a:rPr>
+              <a:t>✓</a:t>
+            </a:r>
+            <a:endParaRPr lang="en-US" sz="2000" dirty="0"/>
+          </a:p>
+        </p:txBody>
+      </p:sp>
+      <p:sp>
+        <p:nvSpPr>
+          <p:cNvPr id="8" name="Text 6"/>
+          <p:cNvSpPr/>
+          <p:nvPr/>
+        </p:nvSpPr>
+        <p:spPr>
+          <a:xfrm>
+            <a:off x="1060549" y="1418779"/>
+            <a:ext cx="609600" cy="609600"/>
+          </a:xfrm>
+          <a:prstGeom prst="roundRect">
+            <a:avLst>
+              <a:gd name="adj" fmla="val 8333"/>
+            </a:avLst>
+          </a:prstGeom>
+          <a:solidFill>
+            <a:srgbClr val="D5F4E6"/>
+          </a:solidFill>
+          <a:ln w="19050">
+            <a:solidFill>
+              <a:srgbClr val="27AE60"/>
+            </a:solidFill>
+          </a:ln>
+        </p:spPr>
+        <p:txBody>
+          <a:bodyPr wrap="square" rtlCol="0" anchor="ctr"/>
+          <a:lstStyle/>
+          <a:p>
+            <a:pPr indent="0" marL="0">
+              <a:buNone/>
+            </a:pPr>
+            <a:endParaRPr lang="en-US" dirty="0"/>
+          </a:p>
+        </p:txBody>
+      </p:sp>
+      <p:sp>
+        <p:nvSpPr>
+          <p:cNvPr id="9" name="Text 7"/>
+          <p:cNvSpPr/>
+          <p:nvPr/>
+        </p:nvSpPr>
+        <p:spPr>
+          <a:xfrm>
+            <a:off x="1268313" y="1566416"/>
+            <a:ext cx="197953" cy="314325"/>
+          </a:xfrm>
+          <a:prstGeom prst="rect">
+            <a:avLst/>
+          </a:prstGeom>
+          <a:noFill/>
+          <a:ln/>
+        </p:spPr>
+        <p:txBody>
+          <a:bodyPr wrap="square" lIns="0" tIns="0" rIns="0" bIns="0" rtlCol="0" anchor="t"/>
+          <a:lstStyle/>
+          <a:p>
+            <a:pPr algn="l" indent="0" marL="0">
+              <a:buNone/>
+            </a:pPr>
+            <a:r>
+              <a:rPr lang="en-US" sz="2000" b="1" dirty="0">
+                <a:solidFill>
+                  <a:srgbClr val="27AE60"/>
+                </a:solidFill>
+                <a:latin typeface="Arial" pitchFamily="34" charset="0"/>
+                <a:ea typeface="Arial" pitchFamily="34" charset="-122"/>
+                <a:cs typeface="Arial" pitchFamily="34" charset="-120"/>
+              </a:rPr>
+              <a:t>✓</a:t>
+            </a:r>
+            <a:endParaRPr lang="en-US" sz="2000" dirty="0"/>
+          </a:p>
+        </p:txBody>
+      </p:sp>
+      <p:sp>
+        <p:nvSpPr>
+          <p:cNvPr id="10" name="Text 8"/>
+          <p:cNvSpPr/>
+          <p:nvPr/>
+        </p:nvSpPr>
+        <p:spPr>
+          <a:xfrm>
+            <a:off x="1746349" y="1418779"/>
+            <a:ext cx="609600" cy="609600"/>
+          </a:xfrm>
+          <a:prstGeom prst="roundRect">
+            <a:avLst>
+              <a:gd name="adj" fmla="val 8333"/>
+            </a:avLst>
+          </a:prstGeom>
+          <a:solidFill>
+            <a:srgbClr val="FADBD8"/>
+          </a:solidFill>
+          <a:ln w="19050">
+            <a:solidFill>
+              <a:srgbClr val="E74C3C"/>
+            </a:solidFill>
+          </a:ln>
+        </p:spPr>
+        <p:txBody>
+          <a:bodyPr wrap="square" rtlCol="0" anchor="ctr"/>
+          <a:lstStyle/>
+          <a:p>
+            <a:pPr indent="0" marL="0">
+              <a:buNone/>
+            </a:pPr>
+            <a:endParaRPr lang="en-US" dirty="0"/>
+          </a:p>
+        </p:txBody>
+      </p:sp>
+      <p:sp>
+        <p:nvSpPr>
+          <p:cNvPr id="11" name="Text 9"/>
+          <p:cNvSpPr/>
+          <p:nvPr/>
+        </p:nvSpPr>
+        <p:spPr>
+          <a:xfrm>
+            <a:off x="1978670" y="1575941"/>
+            <a:ext cx="147858" cy="295275"/>
+          </a:xfrm>
+          <a:prstGeom prst="rect">
+            <a:avLst/>
+          </a:prstGeom>
+          <a:noFill/>
+          <a:ln/>
+        </p:spPr>
+        <p:txBody>
+          <a:bodyPr wrap="square" lIns="0" tIns="0" rIns="0" bIns="0" rtlCol="0" anchor="t"/>
+          <a:lstStyle/>
+          <a:p>
+            <a:pPr algn="l" indent="0" marL="0">
+              <a:buNone/>
+            </a:pPr>
+            <a:r>
+              <a:rPr lang="en-US" sz="2000" b="1" dirty="0">
+                <a:solidFill>
+                  <a:srgbClr val="E74C3C"/>
+                </a:solidFill>
+                <a:latin typeface="Arial" pitchFamily="34" charset="0"/>
+                <a:ea typeface="Arial" pitchFamily="34" charset="-122"/>
+                <a:cs typeface="Arial" pitchFamily="34" charset="-120"/>
+              </a:rPr>
+              <a:t>✗</a:t>
+            </a:r>
+            <a:endParaRPr lang="en-US" sz="2000" dirty="0"/>
+          </a:p>
+        </p:txBody>
+      </p:sp>
+      <p:sp>
+        <p:nvSpPr>
+          <p:cNvPr id="12" name="Text 10"/>
+          <p:cNvSpPr/>
+          <p:nvPr/>
+        </p:nvSpPr>
+        <p:spPr>
+          <a:xfrm>
+            <a:off x="2432149" y="1418779"/>
+            <a:ext cx="609600" cy="609600"/>
+          </a:xfrm>
+          <a:prstGeom prst="roundRect">
+            <a:avLst>
+              <a:gd name="adj" fmla="val 8333"/>
+            </a:avLst>
+          </a:prstGeom>
+          <a:solidFill>
+            <a:srgbClr val="FADBD8"/>
+          </a:solidFill>
+          <a:ln w="19050">
+            <a:solidFill>
+              <a:srgbClr val="E74C3C"/>
+            </a:solidFill>
+          </a:ln>
+        </p:spPr>
+        <p:txBody>
+          <a:bodyPr wrap="square" rtlCol="0" anchor="ctr"/>
+          <a:lstStyle/>
+          <a:p>
+            <a:pPr indent="0" marL="0">
+              <a:buNone/>
+            </a:pPr>
+            <a:endParaRPr lang="en-US" dirty="0"/>
+          </a:p>
+        </p:txBody>
+      </p:sp>
+      <p:sp>
+        <p:nvSpPr>
+          <p:cNvPr id="13" name="Text 11"/>
+          <p:cNvSpPr/>
+          <p:nvPr/>
+        </p:nvSpPr>
+        <p:spPr>
+          <a:xfrm>
+            <a:off x="2664470" y="1575941"/>
+            <a:ext cx="147858" cy="295275"/>
+          </a:xfrm>
+          <a:prstGeom prst="rect">
+            <a:avLst/>
+          </a:prstGeom>
+          <a:noFill/>
+          <a:ln/>
+        </p:spPr>
+        <p:txBody>
+          <a:bodyPr wrap="square" lIns="0" tIns="0" rIns="0" bIns="0" rtlCol="0" anchor="t"/>
+          <a:lstStyle/>
+          <a:p>
+            <a:pPr algn="l" indent="0" marL="0">
+              <a:buNone/>
+            </a:pPr>
+            <a:r>
+              <a:rPr lang="en-US" sz="2000" b="1" dirty="0">
+                <a:solidFill>
+                  <a:srgbClr val="E74C3C"/>
+                </a:solidFill>
+                <a:latin typeface="Arial" pitchFamily="34" charset="0"/>
+                <a:ea typeface="Arial" pitchFamily="34" charset="-122"/>
+                <a:cs typeface="Arial" pitchFamily="34" charset="-120"/>
+              </a:rPr>
+              <a:t>✗</a:t>
+            </a:r>
+            <a:endParaRPr lang="en-US" sz="2000" dirty="0"/>
+          </a:p>
+        </p:txBody>
+      </p:sp>
+      <p:sp>
+        <p:nvSpPr>
+          <p:cNvPr id="14" name="Text 12"/>
+          <p:cNvSpPr/>
+          <p:nvPr/>
+        </p:nvSpPr>
+        <p:spPr>
+          <a:xfrm>
+            <a:off x="3117949" y="1418779"/>
+            <a:ext cx="609600" cy="609600"/>
+          </a:xfrm>
+          <a:prstGeom prst="roundRect">
+            <a:avLst>
+              <a:gd name="adj" fmla="val 8333"/>
+            </a:avLst>
+          </a:prstGeom>
+          <a:solidFill>
+            <a:srgbClr val="D5F4E6"/>
+          </a:solidFill>
+          <a:ln w="19050">
+            <a:solidFill>
+              <a:srgbClr val="27AE60"/>
+            </a:solidFill>
+          </a:ln>
+        </p:spPr>
+        <p:txBody>
+          <a:bodyPr wrap="square" rtlCol="0" anchor="ctr"/>
+          <a:lstStyle/>
+          <a:p>
+            <a:pPr indent="0" marL="0">
+              <a:buNone/>
+            </a:pPr>
+            <a:endParaRPr lang="en-US" dirty="0"/>
+          </a:p>
+        </p:txBody>
+      </p:sp>
+      <p:sp>
+        <p:nvSpPr>
+          <p:cNvPr id="15" name="Text 13"/>
+          <p:cNvSpPr/>
+          <p:nvPr/>
+        </p:nvSpPr>
+        <p:spPr>
+          <a:xfrm>
+            <a:off x="3325713" y="1566416"/>
+            <a:ext cx="197953" cy="314325"/>
+          </a:xfrm>
+          <a:prstGeom prst="rect">
+            <a:avLst/>
+          </a:prstGeom>
+          <a:noFill/>
+          <a:ln/>
+        </p:spPr>
+        <p:txBody>
+          <a:bodyPr wrap="square" lIns="0" tIns="0" rIns="0" bIns="0" rtlCol="0" anchor="t"/>
+          <a:lstStyle/>
+          <a:p>
+            <a:pPr algn="l" indent="0" marL="0">
+              <a:buNone/>
+            </a:pPr>
+            <a:r>
+              <a:rPr lang="en-US" sz="2000" b="1" dirty="0">
+                <a:solidFill>
+                  <a:srgbClr val="27AE60"/>
+                </a:solidFill>
+                <a:latin typeface="Arial" pitchFamily="34" charset="0"/>
+                <a:ea typeface="Arial" pitchFamily="34" charset="-122"/>
+                <a:cs typeface="Arial" pitchFamily="34" charset="-120"/>
+              </a:rPr>
+              <a:t>✓</a:t>
+            </a:r>
+            <a:endParaRPr lang="en-US" sz="2000" dirty="0"/>
+          </a:p>
+        </p:txBody>
+      </p:sp>
+      <p:sp>
+        <p:nvSpPr>
+          <p:cNvPr id="16" name="Text 14"/>
+          <p:cNvSpPr/>
+          <p:nvPr/>
+        </p:nvSpPr>
+        <p:spPr>
+          <a:xfrm>
+            <a:off x="3803749" y="1418779"/>
+            <a:ext cx="609600" cy="609600"/>
+          </a:xfrm>
+          <a:prstGeom prst="roundRect">
+            <a:avLst>
+              <a:gd name="adj" fmla="val 8333"/>
+            </a:avLst>
+          </a:prstGeom>
+          <a:solidFill>
+            <a:srgbClr val="FADBD8"/>
+          </a:solidFill>
+          <a:ln w="19050">
+            <a:solidFill>
+              <a:srgbClr val="E74C3C"/>
+            </a:solidFill>
+          </a:ln>
+        </p:spPr>
+        <p:txBody>
+          <a:bodyPr wrap="square" rtlCol="0" anchor="ctr"/>
+          <a:lstStyle/>
+          <a:p>
+            <a:pPr indent="0" marL="0">
+              <a:buNone/>
+            </a:pPr>
+            <a:endParaRPr lang="en-US" dirty="0"/>
+          </a:p>
+        </p:txBody>
+      </p:sp>
+      <p:sp>
+        <p:nvSpPr>
+          <p:cNvPr id="17" name="Text 15"/>
+          <p:cNvSpPr/>
+          <p:nvPr/>
+        </p:nvSpPr>
+        <p:spPr>
+          <a:xfrm>
+            <a:off x="4036070" y="1575941"/>
+            <a:ext cx="147858" cy="295275"/>
+          </a:xfrm>
+          <a:prstGeom prst="rect">
+            <a:avLst/>
+          </a:prstGeom>
+          <a:noFill/>
+          <a:ln/>
+        </p:spPr>
+        <p:txBody>
+          <a:bodyPr wrap="square" lIns="0" tIns="0" rIns="0" bIns="0" rtlCol="0" anchor="t"/>
+          <a:lstStyle/>
+          <a:p>
+            <a:pPr algn="l" indent="0" marL="0">
+              <a:buNone/>
+            </a:pPr>
+            <a:r>
+              <a:rPr lang="en-US" sz="2000" b="1" dirty="0">
+                <a:solidFill>
+                  <a:srgbClr val="E74C3C"/>
+                </a:solidFill>
+                <a:latin typeface="Arial" pitchFamily="34" charset="0"/>
+                <a:ea typeface="Arial" pitchFamily="34" charset="-122"/>
+                <a:cs typeface="Arial" pitchFamily="34" charset="-120"/>
+              </a:rPr>
+              <a:t>✗</a:t>
+            </a:r>
+            <a:endParaRPr lang="en-US" sz="2000" dirty="0"/>
+          </a:p>
+        </p:txBody>
+      </p:sp>
+      <p:sp>
+        <p:nvSpPr>
+          <p:cNvPr id="18" name="Text 16"/>
+          <p:cNvSpPr/>
+          <p:nvPr/>
+        </p:nvSpPr>
+        <p:spPr>
+          <a:xfrm>
+            <a:off x="334363" y="2129879"/>
+            <a:ext cx="4119372" cy="177701"/>
+          </a:xfrm>
+          <a:prstGeom prst="rect">
+            <a:avLst/>
+          </a:prstGeom>
+          <a:noFill/>
+          <a:ln/>
+        </p:spPr>
+        <p:txBody>
+          <a:bodyPr wrap="square" lIns="0" tIns="0" rIns="0" bIns="0" rtlCol="0" anchor="t"/>
+          <a:lstStyle/>
+          <a:p>
+            <a:pPr algn="ctr" indent="0" marL="0">
+              <a:lnSpc>
+                <a:spcPts val="1400"/>
+              </a:lnSpc>
+              <a:spcAft>
+                <a:spcPts val="800"/>
+              </a:spcAft>
+              <a:buNone/>
+            </a:pPr>
+            <a:r>
+              <a:rPr lang="en-US" sz="1000" b="1" dirty="0">
+                <a:solidFill>
+                  <a:srgbClr val="2C3E50"/>
+                </a:solidFill>
+                <a:latin typeface="Arial" pitchFamily="34" charset="0"/>
+                <a:ea typeface="Arial" pitchFamily="34" charset="-122"/>
+                <a:cs typeface="Arial" pitchFamily="34" charset="-120"/>
+              </a:rPr>
+              <a:t>What B sees</a:t>
+            </a:r>
+            <a:endParaRPr lang="en-US" sz="1000" dirty="0"/>
+          </a:p>
+        </p:txBody>
+      </p:sp>
+      <p:sp>
+        <p:nvSpPr>
+          <p:cNvPr id="19" name="Text 17"/>
+          <p:cNvSpPr/>
+          <p:nvPr/>
+        </p:nvSpPr>
+        <p:spPr>
+          <a:xfrm>
+            <a:off x="374749" y="2510582"/>
+            <a:ext cx="4038600" cy="1052810"/>
+          </a:xfrm>
+          <a:prstGeom prst="roundRect">
+            <a:avLst>
+              <a:gd name="adj" fmla="val 4825"/>
+            </a:avLst>
+          </a:prstGeom>
+          <a:solidFill>
+            <a:srgbClr val="FADBD8"/>
+          </a:solidFill>
+          <a:ln w="19050">
+            <a:solidFill>
+              <a:srgbClr val="E74C3C"/>
+            </a:solidFill>
+          </a:ln>
+        </p:spPr>
+        <p:txBody>
+          <a:bodyPr wrap="square" rtlCol="0" anchor="ctr"/>
+          <a:lstStyle/>
+          <a:p>
+            <a:pPr indent="0" marL="0">
+              <a:buNone/>
+            </a:pPr>
+            <a:endParaRPr lang="en-US" dirty="0"/>
+          </a:p>
+        </p:txBody>
+      </p:sp>
+      <p:sp>
+        <p:nvSpPr>
+          <p:cNvPr id="20" name="Text 18"/>
+          <p:cNvSpPr/>
+          <p:nvPr/>
+        </p:nvSpPr>
+        <p:spPr>
+          <a:xfrm>
+            <a:off x="495300" y="2669232"/>
+            <a:ext cx="3873448" cy="164902"/>
+          </a:xfrm>
+          <a:prstGeom prst="rect">
+            <a:avLst/>
+          </a:prstGeom>
+          <a:noFill/>
+          <a:ln/>
+        </p:spPr>
+        <p:txBody>
+          <a:bodyPr wrap="square" lIns="0" tIns="0" rIns="0" bIns="0" rtlCol="0" anchor="t"/>
+          <a:lstStyle/>
+          <a:p>
+            <a:pPr algn="l" indent="0" marL="0">
+              <a:lnSpc>
+                <a:spcPts val="1300"/>
+              </a:lnSpc>
+              <a:spcBef>
+                <a:spcPts val="300"/>
+              </a:spcBef>
+              <a:spcAft>
+                <a:spcPts val="300"/>
+              </a:spcAft>
+              <a:buNone/>
+            </a:pPr>
+            <a:r>
+              <a:rPr lang="en-US" sz="1000" b="1" dirty="0">
+                <a:solidFill>
+                  <a:srgbClr val="2C3E50"/>
+                </a:solidFill>
+                <a:latin typeface="Arial" pitchFamily="34" charset="0"/>
+                <a:ea typeface="Arial" pitchFamily="34" charset="-122"/>
+                <a:cs typeface="Arial" pitchFamily="34" charset="-120"/>
+              </a:rPr>
+              <a:t>Without attribution:</a:t>
+            </a:r>
+            <a:endParaRPr lang="en-US" sz="1000" dirty="0"/>
+          </a:p>
+        </p:txBody>
+      </p:sp>
+      <p:sp>
+        <p:nvSpPr>
+          <p:cNvPr id="21" name="Text 19"/>
+          <p:cNvSpPr/>
+          <p:nvPr/>
+        </p:nvSpPr>
+        <p:spPr>
+          <a:xfrm>
+            <a:off x="495300" y="2872234"/>
+            <a:ext cx="3797498" cy="545306"/>
+          </a:xfrm>
+          <a:prstGeom prst="rect">
+            <a:avLst/>
+          </a:prstGeom>
+          <a:noFill/>
+          <a:ln/>
+        </p:spPr>
+        <p:txBody>
+          <a:bodyPr wrap="square" lIns="101600" tIns="0" rIns="0" bIns="0" rtlCol="0" anchor="t"/>
+          <a:lstStyle/>
+          <a:p>
+            <a:pPr algn="l" marL="101600" indent="-101600">
+              <a:lnSpc>
+                <a:spcPts val="1300"/>
+              </a:lnSpc>
+              <a:spcAft>
+                <a:spcPts val="200"/>
+              </a:spcAft>
+              <a:buSzPct val="100000"/>
+              <a:buChar char="•"/>
+            </a:pPr>
+            <a:r>
+              <a:rPr lang="en-US" sz="1000" dirty="0">
+                <a:solidFill>
+                  <a:srgbClr val="2C3E50"/>
+                </a:solidFill>
+                <a:latin typeface="Arial" pitchFamily="34" charset="0"/>
+                <a:ea typeface="Arial" pitchFamily="34" charset="-122"/>
+                <a:cs typeface="Arial" pitchFamily="34" charset="-120"/>
+              </a:rPr>
+              <a:t>B must NACK (can't verify 3 cells)</a:t>
+            </a:r>
+            <a:endParaRPr lang="en-US" sz="1000" dirty="0"/>
+          </a:p>
+          <a:p>
+            <a:pPr algn="l" marL="101600" indent="-101600">
+              <a:lnSpc>
+                <a:spcPts val="1300"/>
+              </a:lnSpc>
+              <a:spcAft>
+                <a:spcPts val="200"/>
+              </a:spcAft>
+              <a:buSzPct val="100000"/>
+              <a:buChar char="•"/>
+            </a:pPr>
+            <a:r>
+              <a:rPr lang="en-US" sz="1000" dirty="0">
+                <a:solidFill>
+                  <a:srgbClr val="2C3E50"/>
+                </a:solidFill>
+                <a:latin typeface="Arial" pitchFamily="34" charset="0"/>
+                <a:ea typeface="Arial" pitchFamily="34" charset="-122"/>
+                <a:cs typeface="Arial" pitchFamily="34" charset="-120"/>
+              </a:rPr>
+              <a:t>A sends PROBE</a:t>
+            </a:r>
+            <a:endParaRPr lang="en-US" sz="1000" dirty="0"/>
+          </a:p>
+          <a:p>
+            <a:pPr algn="l" marL="101600" indent="-101600">
+              <a:lnSpc>
+                <a:spcPts val="1300"/>
+              </a:lnSpc>
+              <a:spcAft>
+                <a:spcPts val="200"/>
+              </a:spcAft>
+              <a:buSzPct val="100000"/>
+              <a:buChar char="•"/>
+            </a:pPr>
+            <a:r>
+              <a:rPr lang="en-US" sz="1000" dirty="0">
+                <a:solidFill>
+                  <a:srgbClr val="2C3E50"/>
+                </a:solidFill>
+                <a:latin typeface="Arial" pitchFamily="34" charset="0"/>
+                <a:ea typeface="Arial" pitchFamily="34" charset="-122"/>
+                <a:cs typeface="Arial" pitchFamily="34" charset="-120"/>
+              </a:rPr>
+              <a:t>Deadlock: 5+ messages</a:t>
+            </a:r>
+            <a:endParaRPr lang="en-US" sz="1000" dirty="0"/>
+          </a:p>
+        </p:txBody>
+      </p:sp>
+      <p:sp>
+        <p:nvSpPr>
+          <p:cNvPr id="22" name="Text 20"/>
+          <p:cNvSpPr/>
+          <p:nvPr/>
+        </p:nvSpPr>
+        <p:spPr>
+          <a:xfrm>
+            <a:off x="4690414" y="774502"/>
+            <a:ext cx="4119372" cy="238125"/>
+          </a:xfrm>
+          <a:prstGeom prst="rect">
+            <a:avLst/>
+          </a:prstGeom>
+          <a:noFill/>
+          <a:ln/>
+        </p:spPr>
+        <p:txBody>
+          <a:bodyPr wrap="square" lIns="0" tIns="0" rIns="0" bIns="0" rtlCol="0" anchor="t"/>
+          <a:lstStyle/>
+          <a:p>
+            <a:pPr algn="ctr" indent="0" marL="0">
+              <a:spcAft>
+                <a:spcPts val="800"/>
+              </a:spcAft>
+              <a:buNone/>
+            </a:pPr>
+            <a:r>
+              <a:rPr lang="en-US" sz="1600" b="1" dirty="0">
+                <a:solidFill>
+                  <a:srgbClr val="27AE60"/>
+                </a:solidFill>
+                <a:latin typeface="Arial" pitchFamily="34" charset="0"/>
+                <a:ea typeface="Arial" pitchFamily="34" charset="-122"/>
+                <a:cs typeface="Arial" pitchFamily="34" charset="-120"/>
+              </a:rPr>
+              <a:t>The Solution</a:t>
+            </a:r>
+            <a:endParaRPr lang="en-US" sz="1600" dirty="0"/>
+          </a:p>
+        </p:txBody>
+      </p:sp>
+      <p:sp>
+        <p:nvSpPr>
+          <p:cNvPr id="23" name="Text 21"/>
+          <p:cNvSpPr/>
+          <p:nvPr/>
+        </p:nvSpPr>
+        <p:spPr>
+          <a:xfrm>
+            <a:off x="4730800" y="1114127"/>
+            <a:ext cx="4119372" cy="177701"/>
+          </a:xfrm>
+          <a:prstGeom prst="rect">
+            <a:avLst/>
+          </a:prstGeom>
+          <a:noFill/>
+          <a:ln/>
+        </p:spPr>
+        <p:txBody>
+          <a:bodyPr wrap="square" lIns="0" tIns="0" rIns="0" bIns="0" rtlCol="0" anchor="t"/>
+          <a:lstStyle/>
+          <a:p>
+            <a:pPr algn="l" indent="0" marL="0">
+              <a:lnSpc>
+                <a:spcPts val="1400"/>
+              </a:lnSpc>
+              <a:spcAft>
+                <a:spcPts val="1000"/>
+              </a:spcAft>
+              <a:buNone/>
+            </a:pPr>
+            <a:r>
+              <a:rPr lang="en-US" sz="1000" dirty="0">
+                <a:solidFill>
+                  <a:srgbClr val="2C3E50"/>
+                </a:solidFill>
+                <a:latin typeface="Arial" pitchFamily="34" charset="0"/>
+                <a:ea typeface="Arial" pitchFamily="34" charset="-122"/>
+                <a:cs typeface="Arial" pitchFamily="34" charset="-120"/>
+              </a:rPr>
+              <a:t>Witness bits (1 per cell) encode WHO vouches:</a:t>
+            </a:r>
+            <a:endParaRPr lang="en-US" sz="1000" dirty="0"/>
+          </a:p>
+        </p:txBody>
+      </p:sp>
+      <p:sp>
+        <p:nvSpPr>
+          <p:cNvPr id="24" name="Text 22"/>
+          <p:cNvSpPr/>
+          <p:nvPr/>
+        </p:nvSpPr>
+        <p:spPr>
+          <a:xfrm>
+            <a:off x="4730800" y="1418779"/>
+            <a:ext cx="609600" cy="482501"/>
+          </a:xfrm>
+          <a:prstGeom prst="roundRect">
+            <a:avLst>
+              <a:gd name="adj" fmla="val 10528"/>
+            </a:avLst>
+          </a:prstGeom>
+          <a:solidFill>
+            <a:srgbClr val="D6EAF8"/>
+          </a:solidFill>
+          <a:ln w="19050">
+            <a:solidFill>
+              <a:srgbClr val="3498DB"/>
+            </a:solidFill>
+          </a:ln>
+        </p:spPr>
+        <p:txBody>
+          <a:bodyPr wrap="square" rtlCol="0" anchor="ctr"/>
+          <a:lstStyle/>
+          <a:p>
+            <a:pPr indent="0" marL="0">
+              <a:buNone/>
+            </a:pPr>
+            <a:endParaRPr lang="en-US" dirty="0"/>
+          </a:p>
+        </p:txBody>
+      </p:sp>
+      <p:sp>
+        <p:nvSpPr>
+          <p:cNvPr id="25" name="Text 23"/>
+          <p:cNvSpPr/>
+          <p:nvPr/>
+        </p:nvSpPr>
+        <p:spPr>
+          <a:xfrm>
+            <a:off x="4971901" y="1526679"/>
+            <a:ext cx="129793" cy="266700"/>
+          </a:xfrm>
+          <a:prstGeom prst="rect">
+            <a:avLst/>
+          </a:prstGeom>
+          <a:noFill/>
+          <a:ln/>
+        </p:spPr>
+        <p:txBody>
+          <a:bodyPr wrap="square" lIns="0" tIns="0" rIns="0" bIns="0" rtlCol="0" anchor="t"/>
+          <a:lstStyle/>
+          <a:p>
+            <a:pPr algn="l" indent="0" marL="0">
+              <a:buNone/>
+            </a:pPr>
+            <a:r>
+              <a:rPr lang="en-US" sz="1800" b="1" dirty="0">
+                <a:solidFill>
+                  <a:srgbClr val="3498DB"/>
+                </a:solidFill>
+                <a:latin typeface="Arial" pitchFamily="34" charset="0"/>
+                <a:ea typeface="Arial" pitchFamily="34" charset="-122"/>
+                <a:cs typeface="Arial" pitchFamily="34" charset="-120"/>
+              </a:rPr>
+              <a:t>1</a:t>
+            </a:r>
+            <a:endParaRPr lang="en-US" sz="1800" dirty="0"/>
+          </a:p>
+        </p:txBody>
+      </p:sp>
+      <p:sp>
+        <p:nvSpPr>
+          <p:cNvPr id="26" name="Text 24"/>
+          <p:cNvSpPr/>
+          <p:nvPr/>
+        </p:nvSpPr>
+        <p:spPr>
+          <a:xfrm>
+            <a:off x="5416600" y="1418779"/>
+            <a:ext cx="609600" cy="482501"/>
+          </a:xfrm>
+          <a:prstGeom prst="roundRect">
+            <a:avLst>
+              <a:gd name="adj" fmla="val 10528"/>
+            </a:avLst>
+          </a:prstGeom>
+          <a:solidFill>
+            <a:srgbClr val="D6EAF8"/>
+          </a:solidFill>
+          <a:ln w="19050">
+            <a:solidFill>
+              <a:srgbClr val="3498DB"/>
+            </a:solidFill>
+          </a:ln>
+        </p:spPr>
+        <p:txBody>
+          <a:bodyPr wrap="square" rtlCol="0" anchor="ctr"/>
+          <a:lstStyle/>
+          <a:p>
+            <a:pPr indent="0" marL="0">
+              <a:buNone/>
+            </a:pPr>
+            <a:endParaRPr lang="en-US" dirty="0"/>
+          </a:p>
+        </p:txBody>
+      </p:sp>
+      <p:sp>
+        <p:nvSpPr>
+          <p:cNvPr id="27" name="Text 25"/>
+          <p:cNvSpPr/>
+          <p:nvPr/>
+        </p:nvSpPr>
+        <p:spPr>
+          <a:xfrm>
+            <a:off x="5657701" y="1526679"/>
+            <a:ext cx="129793" cy="266700"/>
+          </a:xfrm>
+          <a:prstGeom prst="rect">
+            <a:avLst/>
+          </a:prstGeom>
+          <a:noFill/>
+          <a:ln/>
+        </p:spPr>
+        <p:txBody>
+          <a:bodyPr wrap="square" lIns="0" tIns="0" rIns="0" bIns="0" rtlCol="0" anchor="t"/>
+          <a:lstStyle/>
+          <a:p>
+            <a:pPr algn="l" indent="0" marL="0">
+              <a:buNone/>
+            </a:pPr>
+            <a:r>
+              <a:rPr lang="en-US" sz="1800" b="1" dirty="0">
+                <a:solidFill>
+                  <a:srgbClr val="3498DB"/>
+                </a:solidFill>
+                <a:latin typeface="Arial" pitchFamily="34" charset="0"/>
+                <a:ea typeface="Arial" pitchFamily="34" charset="-122"/>
+                <a:cs typeface="Arial" pitchFamily="34" charset="-120"/>
+              </a:rPr>
+              <a:t>1</a:t>
+            </a:r>
+            <a:endParaRPr lang="en-US" sz="1800" dirty="0"/>
+          </a:p>
+        </p:txBody>
+      </p:sp>
+      <p:sp>
+        <p:nvSpPr>
+          <p:cNvPr id="28" name="Text 26"/>
+          <p:cNvSpPr/>
+          <p:nvPr/>
+        </p:nvSpPr>
+        <p:spPr>
+          <a:xfrm>
+            <a:off x="6102400" y="1418779"/>
+            <a:ext cx="609600" cy="482501"/>
+          </a:xfrm>
+          <a:prstGeom prst="roundRect">
+            <a:avLst>
+              <a:gd name="adj" fmla="val 10528"/>
+            </a:avLst>
+          </a:prstGeom>
+          <a:solidFill>
+            <a:srgbClr val="FEF5E7"/>
+          </a:solidFill>
+          <a:ln w="19050">
+            <a:solidFill>
+              <a:srgbClr val="F39C12"/>
+            </a:solidFill>
+          </a:ln>
+        </p:spPr>
+        <p:txBody>
+          <a:bodyPr wrap="square" rtlCol="0" anchor="ctr"/>
+          <a:lstStyle/>
+          <a:p>
+            <a:pPr indent="0" marL="0">
+              <a:buNone/>
+            </a:pPr>
+            <a:endParaRPr lang="en-US" dirty="0"/>
+          </a:p>
+        </p:txBody>
+      </p:sp>
+      <p:sp>
+        <p:nvSpPr>
+          <p:cNvPr id="29" name="Text 27"/>
+          <p:cNvSpPr/>
+          <p:nvPr/>
+        </p:nvSpPr>
+        <p:spPr>
+          <a:xfrm>
+            <a:off x="6343501" y="1526679"/>
+            <a:ext cx="129793" cy="266700"/>
+          </a:xfrm>
+          <a:prstGeom prst="rect">
+            <a:avLst/>
+          </a:prstGeom>
+          <a:noFill/>
+          <a:ln/>
+        </p:spPr>
+        <p:txBody>
+          <a:bodyPr wrap="square" lIns="0" tIns="0" rIns="0" bIns="0" rtlCol="0" anchor="t"/>
+          <a:lstStyle/>
+          <a:p>
+            <a:pPr algn="l" indent="0" marL="0">
+              <a:buNone/>
+            </a:pPr>
+            <a:r>
+              <a:rPr lang="en-US" sz="1800" b="1" dirty="0">
+                <a:solidFill>
+                  <a:srgbClr val="F39C12"/>
+                </a:solidFill>
+                <a:latin typeface="Arial" pitchFamily="34" charset="0"/>
+                <a:ea typeface="Arial" pitchFamily="34" charset="-122"/>
+                <a:cs typeface="Arial" pitchFamily="34" charset="-120"/>
+              </a:rPr>
+              <a:t>0</a:t>
+            </a:r>
+            <a:endParaRPr lang="en-US" sz="1800" dirty="0"/>
+          </a:p>
+        </p:txBody>
+      </p:sp>
+      <p:sp>
+        <p:nvSpPr>
+          <p:cNvPr id="30" name="Text 28"/>
+          <p:cNvSpPr/>
+          <p:nvPr/>
+        </p:nvSpPr>
+        <p:spPr>
+          <a:xfrm>
+            <a:off x="6788200" y="1418779"/>
+            <a:ext cx="609600" cy="482501"/>
+          </a:xfrm>
+          <a:prstGeom prst="roundRect">
+            <a:avLst>
+              <a:gd name="adj" fmla="val 10528"/>
+            </a:avLst>
+          </a:prstGeom>
+          <a:solidFill>
+            <a:srgbClr val="FEF5E7"/>
+          </a:solidFill>
+          <a:ln w="19050">
+            <a:solidFill>
+              <a:srgbClr val="F39C12"/>
+            </a:solidFill>
+          </a:ln>
+        </p:spPr>
+        <p:txBody>
+          <a:bodyPr wrap="square" rtlCol="0" anchor="ctr"/>
+          <a:lstStyle/>
+          <a:p>
+            <a:pPr indent="0" marL="0">
+              <a:buNone/>
+            </a:pPr>
+            <a:endParaRPr lang="en-US" dirty="0"/>
+          </a:p>
+        </p:txBody>
+      </p:sp>
+      <p:sp>
+        <p:nvSpPr>
+          <p:cNvPr id="31" name="Text 29"/>
+          <p:cNvSpPr/>
+          <p:nvPr/>
+        </p:nvSpPr>
+        <p:spPr>
+          <a:xfrm>
+            <a:off x="7029301" y="1526679"/>
+            <a:ext cx="129793" cy="266700"/>
+          </a:xfrm>
+          <a:prstGeom prst="rect">
+            <a:avLst/>
+          </a:prstGeom>
+          <a:noFill/>
+          <a:ln/>
+        </p:spPr>
+        <p:txBody>
+          <a:bodyPr wrap="square" lIns="0" tIns="0" rIns="0" bIns="0" rtlCol="0" anchor="t"/>
+          <a:lstStyle/>
+          <a:p>
+            <a:pPr algn="l" indent="0" marL="0">
+              <a:buNone/>
+            </a:pPr>
+            <a:r>
+              <a:rPr lang="en-US" sz="1800" b="1" dirty="0">
+                <a:solidFill>
+                  <a:srgbClr val="F39C12"/>
+                </a:solidFill>
+                <a:latin typeface="Arial" pitchFamily="34" charset="0"/>
+                <a:ea typeface="Arial" pitchFamily="34" charset="-122"/>
+                <a:cs typeface="Arial" pitchFamily="34" charset="-120"/>
+              </a:rPr>
+              <a:t>0</a:t>
+            </a:r>
+            <a:endParaRPr lang="en-US" sz="1800" dirty="0"/>
+          </a:p>
+        </p:txBody>
+      </p:sp>
+      <p:sp>
+        <p:nvSpPr>
+          <p:cNvPr id="32" name="Text 30"/>
+          <p:cNvSpPr/>
+          <p:nvPr/>
+        </p:nvSpPr>
+        <p:spPr>
+          <a:xfrm>
+            <a:off x="7474000" y="1418779"/>
+            <a:ext cx="609600" cy="482501"/>
+          </a:xfrm>
+          <a:prstGeom prst="roundRect">
+            <a:avLst>
+              <a:gd name="adj" fmla="val 10528"/>
+            </a:avLst>
+          </a:prstGeom>
+          <a:solidFill>
+            <a:srgbClr val="D6EAF8"/>
+          </a:solidFill>
+          <a:ln w="19050">
+            <a:solidFill>
+              <a:srgbClr val="3498DB"/>
+            </a:solidFill>
+          </a:ln>
+        </p:spPr>
+        <p:txBody>
+          <a:bodyPr wrap="square" rtlCol="0" anchor="ctr"/>
+          <a:lstStyle/>
+          <a:p>
+            <a:pPr indent="0" marL="0">
+              <a:buNone/>
+            </a:pPr>
+            <a:endParaRPr lang="en-US" dirty="0"/>
+          </a:p>
+        </p:txBody>
+      </p:sp>
+      <p:sp>
+        <p:nvSpPr>
+          <p:cNvPr id="33" name="Text 31"/>
+          <p:cNvSpPr/>
+          <p:nvPr/>
+        </p:nvSpPr>
+        <p:spPr>
+          <a:xfrm>
+            <a:off x="7715101" y="1526679"/>
+            <a:ext cx="129793" cy="266700"/>
+          </a:xfrm>
+          <a:prstGeom prst="rect">
+            <a:avLst/>
+          </a:prstGeom>
+          <a:noFill/>
+          <a:ln/>
+        </p:spPr>
+        <p:txBody>
+          <a:bodyPr wrap="square" lIns="0" tIns="0" rIns="0" bIns="0" rtlCol="0" anchor="t"/>
+          <a:lstStyle/>
+          <a:p>
+            <a:pPr algn="l" indent="0" marL="0">
+              <a:buNone/>
+            </a:pPr>
+            <a:r>
+              <a:rPr lang="en-US" sz="1800" b="1" dirty="0">
+                <a:solidFill>
+                  <a:srgbClr val="3498DB"/>
+                </a:solidFill>
+                <a:latin typeface="Arial" pitchFamily="34" charset="0"/>
+                <a:ea typeface="Arial" pitchFamily="34" charset="-122"/>
+                <a:cs typeface="Arial" pitchFamily="34" charset="-120"/>
+              </a:rPr>
+              <a:t>1</a:t>
+            </a:r>
+            <a:endParaRPr lang="en-US" sz="1800" dirty="0"/>
+          </a:p>
+        </p:txBody>
+      </p:sp>
+      <p:sp>
+        <p:nvSpPr>
+          <p:cNvPr id="34" name="Text 32"/>
+          <p:cNvSpPr/>
+          <p:nvPr/>
+        </p:nvSpPr>
+        <p:spPr>
+          <a:xfrm>
+            <a:off x="8159800" y="1418779"/>
+            <a:ext cx="609600" cy="482501"/>
+          </a:xfrm>
+          <a:prstGeom prst="roundRect">
+            <a:avLst>
+              <a:gd name="adj" fmla="val 10528"/>
+            </a:avLst>
+          </a:prstGeom>
+          <a:solidFill>
+            <a:srgbClr val="FEF5E7"/>
+          </a:solidFill>
+          <a:ln w="19050">
+            <a:solidFill>
+              <a:srgbClr val="F39C12"/>
+            </a:solidFill>
+          </a:ln>
+        </p:spPr>
+        <p:txBody>
+          <a:bodyPr wrap="square" rtlCol="0" anchor="ctr"/>
+          <a:lstStyle/>
+          <a:p>
+            <a:pPr indent="0" marL="0">
+              <a:buNone/>
+            </a:pPr>
+            <a:endParaRPr lang="en-US" dirty="0"/>
+          </a:p>
+        </p:txBody>
+      </p:sp>
+      <p:sp>
+        <p:nvSpPr>
+          <p:cNvPr id="35" name="Text 33"/>
+          <p:cNvSpPr/>
+          <p:nvPr/>
+        </p:nvSpPr>
+        <p:spPr>
+          <a:xfrm>
+            <a:off x="8400901" y="1526679"/>
+            <a:ext cx="129793" cy="266700"/>
+          </a:xfrm>
+          <a:prstGeom prst="rect">
+            <a:avLst/>
+          </a:prstGeom>
+          <a:noFill/>
+          <a:ln/>
+        </p:spPr>
+        <p:txBody>
+          <a:bodyPr wrap="square" lIns="0" tIns="0" rIns="0" bIns="0" rtlCol="0" anchor="t"/>
+          <a:lstStyle/>
+          <a:p>
+            <a:pPr algn="l" indent="0" marL="0">
+              <a:buNone/>
+            </a:pPr>
+            <a:r>
+              <a:rPr lang="en-US" sz="1800" b="1" dirty="0">
+                <a:solidFill>
+                  <a:srgbClr val="F39C12"/>
+                </a:solidFill>
+                <a:latin typeface="Arial" pitchFamily="34" charset="0"/>
+                <a:ea typeface="Arial" pitchFamily="34" charset="-122"/>
+                <a:cs typeface="Arial" pitchFamily="34" charset="-120"/>
+              </a:rPr>
+              <a:t>0</a:t>
+            </a:r>
+            <a:endParaRPr lang="en-US" sz="1800" dirty="0"/>
+          </a:p>
+        </p:txBody>
+      </p:sp>
+      <p:sp>
+        <p:nvSpPr>
+          <p:cNvPr id="36" name="Text 34"/>
+          <p:cNvSpPr/>
+          <p:nvPr/>
+        </p:nvSpPr>
+        <p:spPr>
+          <a:xfrm>
+            <a:off x="4839385" y="1952030"/>
+            <a:ext cx="582930" cy="142875"/>
+          </a:xfrm>
+          <a:prstGeom prst="rect">
+            <a:avLst/>
+          </a:prstGeom>
+          <a:noFill/>
+          <a:ln/>
+        </p:spPr>
+        <p:txBody>
+          <a:bodyPr wrap="square" lIns="0" tIns="0" rIns="0" bIns="0" rtlCol="0" anchor="t"/>
+          <a:lstStyle/>
+          <a:p>
+            <a:pPr algn="ctr" indent="0" marL="0">
+              <a:buNone/>
+            </a:pPr>
+            <a:r>
+              <a:rPr lang="en-US" sz="1000" b="1" dirty="0">
+                <a:solidFill>
+                  <a:srgbClr val="7F8C8D"/>
+                </a:solidFill>
+                <a:latin typeface="Arial" pitchFamily="34" charset="0"/>
+                <a:ea typeface="Arial" pitchFamily="34" charset="-122"/>
+                <a:cs typeface="Arial" pitchFamily="34" charset="-120"/>
+              </a:rPr>
+              <a:t>B</a:t>
+            </a:r>
+            <a:endParaRPr lang="en-US" sz="1000" dirty="0"/>
+          </a:p>
+        </p:txBody>
+      </p:sp>
+      <p:sp>
+        <p:nvSpPr>
+          <p:cNvPr id="37" name="Text 35"/>
+          <p:cNvSpPr/>
+          <p:nvPr/>
+        </p:nvSpPr>
+        <p:spPr>
+          <a:xfrm>
+            <a:off x="5487085" y="1952030"/>
+            <a:ext cx="582930" cy="142875"/>
+          </a:xfrm>
+          <a:prstGeom prst="rect">
+            <a:avLst/>
+          </a:prstGeom>
+          <a:noFill/>
+          <a:ln/>
+        </p:spPr>
+        <p:txBody>
+          <a:bodyPr wrap="square" lIns="0" tIns="0" rIns="0" bIns="0" rtlCol="0" anchor="t"/>
+          <a:lstStyle/>
+          <a:p>
+            <a:pPr algn="ctr" indent="0" marL="0">
+              <a:buNone/>
+            </a:pPr>
+            <a:r>
+              <a:rPr lang="en-US" sz="1000" b="1" dirty="0">
+                <a:solidFill>
+                  <a:srgbClr val="7F8C8D"/>
+                </a:solidFill>
+                <a:latin typeface="Arial" pitchFamily="34" charset="0"/>
+                <a:ea typeface="Arial" pitchFamily="34" charset="-122"/>
+                <a:cs typeface="Arial" pitchFamily="34" charset="-120"/>
+              </a:rPr>
+              <a:t>B</a:t>
+            </a:r>
+            <a:endParaRPr lang="en-US" sz="1000" dirty="0"/>
+          </a:p>
+        </p:txBody>
+      </p:sp>
+      <p:sp>
+        <p:nvSpPr>
+          <p:cNvPr id="38" name="Text 36"/>
+          <p:cNvSpPr/>
+          <p:nvPr/>
+        </p:nvSpPr>
+        <p:spPr>
+          <a:xfrm>
+            <a:off x="6134785" y="1952030"/>
+            <a:ext cx="582930" cy="142875"/>
+          </a:xfrm>
+          <a:prstGeom prst="rect">
+            <a:avLst/>
+          </a:prstGeom>
+          <a:noFill/>
+          <a:ln/>
+        </p:spPr>
+        <p:txBody>
+          <a:bodyPr wrap="square" lIns="0" tIns="0" rIns="0" bIns="0" rtlCol="0" anchor="t"/>
+          <a:lstStyle/>
+          <a:p>
+            <a:pPr algn="ctr" indent="0" marL="0">
+              <a:buNone/>
+            </a:pPr>
+            <a:r>
+              <a:rPr lang="en-US" sz="1000" b="1" dirty="0">
+                <a:solidFill>
+                  <a:srgbClr val="7F8C8D"/>
+                </a:solidFill>
+                <a:latin typeface="Arial" pitchFamily="34" charset="0"/>
+                <a:ea typeface="Arial" pitchFamily="34" charset="-122"/>
+                <a:cs typeface="Arial" pitchFamily="34" charset="-120"/>
+              </a:rPr>
+              <a:t>A</a:t>
+            </a:r>
+            <a:endParaRPr lang="en-US" sz="1000" dirty="0"/>
+          </a:p>
+        </p:txBody>
+      </p:sp>
+      <p:sp>
+        <p:nvSpPr>
+          <p:cNvPr id="39" name="Text 37"/>
+          <p:cNvSpPr/>
+          <p:nvPr/>
+        </p:nvSpPr>
+        <p:spPr>
+          <a:xfrm>
+            <a:off x="6782485" y="1952030"/>
+            <a:ext cx="582930" cy="142875"/>
+          </a:xfrm>
+          <a:prstGeom prst="rect">
+            <a:avLst/>
+          </a:prstGeom>
+          <a:noFill/>
+          <a:ln/>
+        </p:spPr>
+        <p:txBody>
+          <a:bodyPr wrap="square" lIns="0" tIns="0" rIns="0" bIns="0" rtlCol="0" anchor="t"/>
+          <a:lstStyle/>
+          <a:p>
+            <a:pPr algn="ctr" indent="0" marL="0">
+              <a:buNone/>
+            </a:pPr>
+            <a:r>
+              <a:rPr lang="en-US" sz="1000" b="1" dirty="0">
+                <a:solidFill>
+                  <a:srgbClr val="7F8C8D"/>
+                </a:solidFill>
+                <a:latin typeface="Arial" pitchFamily="34" charset="0"/>
+                <a:ea typeface="Arial" pitchFamily="34" charset="-122"/>
+                <a:cs typeface="Arial" pitchFamily="34" charset="-120"/>
+              </a:rPr>
+              <a:t>A</a:t>
+            </a:r>
+            <a:endParaRPr lang="en-US" sz="1000" dirty="0"/>
+          </a:p>
+        </p:txBody>
+      </p:sp>
+      <p:sp>
+        <p:nvSpPr>
+          <p:cNvPr id="40" name="Text 38"/>
+          <p:cNvSpPr/>
+          <p:nvPr/>
+        </p:nvSpPr>
+        <p:spPr>
+          <a:xfrm>
+            <a:off x="7430185" y="1952030"/>
+            <a:ext cx="582930" cy="142875"/>
+          </a:xfrm>
+          <a:prstGeom prst="rect">
+            <a:avLst/>
+          </a:prstGeom>
+          <a:noFill/>
+          <a:ln/>
+        </p:spPr>
+        <p:txBody>
+          <a:bodyPr wrap="square" lIns="0" tIns="0" rIns="0" bIns="0" rtlCol="0" anchor="t"/>
+          <a:lstStyle/>
+          <a:p>
+            <a:pPr algn="ctr" indent="0" marL="0">
+              <a:buNone/>
+            </a:pPr>
+            <a:r>
+              <a:rPr lang="en-US" sz="1000" b="1" dirty="0">
+                <a:solidFill>
+                  <a:srgbClr val="7F8C8D"/>
+                </a:solidFill>
+                <a:latin typeface="Arial" pitchFamily="34" charset="0"/>
+                <a:ea typeface="Arial" pitchFamily="34" charset="-122"/>
+                <a:cs typeface="Arial" pitchFamily="34" charset="-120"/>
+              </a:rPr>
+              <a:t>B</a:t>
+            </a:r>
+            <a:endParaRPr lang="en-US" sz="1000" dirty="0"/>
+          </a:p>
+        </p:txBody>
+      </p:sp>
+      <p:sp>
+        <p:nvSpPr>
+          <p:cNvPr id="41" name="Text 39"/>
+          <p:cNvSpPr/>
+          <p:nvPr/>
+        </p:nvSpPr>
+        <p:spPr>
+          <a:xfrm>
+            <a:off x="8077885" y="1952030"/>
+            <a:ext cx="582930" cy="142875"/>
+          </a:xfrm>
+          <a:prstGeom prst="rect">
+            <a:avLst/>
+          </a:prstGeom>
+          <a:noFill/>
+          <a:ln/>
+        </p:spPr>
+        <p:txBody>
+          <a:bodyPr wrap="square" lIns="0" tIns="0" rIns="0" bIns="0" rtlCol="0" anchor="t"/>
+          <a:lstStyle/>
+          <a:p>
+            <a:pPr algn="ctr" indent="0" marL="0">
+              <a:buNone/>
+            </a:pPr>
+            <a:r>
+              <a:rPr lang="en-US" sz="1000" b="1" dirty="0">
+                <a:solidFill>
+                  <a:srgbClr val="7F8C8D"/>
+                </a:solidFill>
+                <a:latin typeface="Arial" pitchFamily="34" charset="0"/>
+                <a:ea typeface="Arial" pitchFamily="34" charset="-122"/>
+                <a:cs typeface="Arial" pitchFamily="34" charset="-120"/>
+              </a:rPr>
+              <a:t>A</a:t>
+            </a:r>
+            <a:endParaRPr lang="en-US" sz="1000" dirty="0"/>
+          </a:p>
+        </p:txBody>
+      </p:sp>
+      <p:sp>
+        <p:nvSpPr>
+          <p:cNvPr id="42" name="Text 40"/>
+          <p:cNvSpPr/>
+          <p:nvPr/>
+        </p:nvSpPr>
+        <p:spPr>
+          <a:xfrm>
+            <a:off x="4690414" y="2221855"/>
+            <a:ext cx="4119372" cy="177701"/>
+          </a:xfrm>
+          <a:prstGeom prst="rect">
+            <a:avLst/>
+          </a:prstGeom>
+          <a:noFill/>
+          <a:ln/>
+        </p:spPr>
+        <p:txBody>
+          <a:bodyPr wrap="square" lIns="0" tIns="0" rIns="0" bIns="0" rtlCol="0" anchor="t"/>
+          <a:lstStyle/>
+          <a:p>
+            <a:pPr algn="ctr" indent="0" marL="0">
+              <a:lnSpc>
+                <a:spcPts val="1400"/>
+              </a:lnSpc>
+              <a:spcAft>
+                <a:spcPts val="800"/>
+              </a:spcAft>
+              <a:buNone/>
+            </a:pPr>
+            <a:r>
+              <a:rPr lang="en-US" sz="1000" b="1" dirty="0">
+                <a:solidFill>
+                  <a:srgbClr val="2C3E50"/>
+                </a:solidFill>
+                <a:latin typeface="Arial" pitchFamily="34" charset="0"/>
+                <a:ea typeface="Arial" pitchFamily="34" charset="-122"/>
+                <a:cs typeface="Arial" pitchFamily="34" charset="-120"/>
+              </a:rPr>
+              <a:t>Who attests each cell</a:t>
+            </a:r>
+            <a:endParaRPr lang="en-US" sz="1000" dirty="0"/>
+          </a:p>
+        </p:txBody>
+      </p:sp>
+      <p:sp>
+        <p:nvSpPr>
+          <p:cNvPr id="43" name="Text 41"/>
+          <p:cNvSpPr/>
+          <p:nvPr/>
+        </p:nvSpPr>
+        <p:spPr>
+          <a:xfrm>
+            <a:off x="4730800" y="2602557"/>
+            <a:ext cx="4038600" cy="1065609"/>
+          </a:xfrm>
+          <a:prstGeom prst="roundRect">
+            <a:avLst>
+              <a:gd name="adj" fmla="val 4767"/>
             </a:avLst>
           </a:prstGeom>
           <a:solidFill>
@@ -2273,14 +3881,14 @@
       </p:sp>
       <p:sp>
         <p:nvSpPr>
-          <p:cNvPr id="13" name="Text 9"/>
-          <p:cNvSpPr/>
-          <p:nvPr/>
-        </p:nvSpPr>
-        <p:spPr>
-          <a:xfrm>
-            <a:off x="603200" y="3768328"/>
-            <a:ext cx="8096351" cy="200025"/>
+          <p:cNvPr id="44" name="Text 42"/>
+          <p:cNvSpPr/>
+          <p:nvPr/>
+        </p:nvSpPr>
+        <p:spPr>
+          <a:xfrm>
+            <a:off x="4851350" y="2761208"/>
+            <a:ext cx="3873448" cy="164902"/>
           </a:xfrm>
           <a:prstGeom prst="rect">
             <a:avLst/>
@@ -2293,59 +3901,136 @@
           <a:lstStyle/>
           <a:p>
             <a:pPr algn="l" indent="0" marL="0">
-              <a:spcAft>
-                <a:spcPts val="400"/>
-              </a:spcAft>
-              <a:buNone/>
-            </a:pPr>
-            <a:r>
-              <a:rPr lang="en-US" sz="1300" b="1" dirty="0">
-                <a:solidFill>
-                  <a:srgbClr val="27AE60"/>
-                </a:solidFill>
-                <a:latin typeface="Arial" pitchFamily="34" charset="0"/>
-                <a:ea typeface="Arial" pitchFamily="34" charset="-122"/>
-                <a:cs typeface="Arial" pitchFamily="34" charset="-120"/>
-              </a:rPr>
-              <a:t>How to verify (no solver needed):</a:t>
-            </a:r>
-            <a:endParaRPr lang="en-US" sz="1300" dirty="0"/>
-          </a:p>
-        </p:txBody>
-      </p:sp>
-      <p:sp>
-        <p:nvSpPr>
-          <p:cNvPr id="14" name="Text 10"/>
-          <p:cNvSpPr/>
-          <p:nvPr/>
-        </p:nvSpPr>
-        <p:spPr>
-          <a:xfrm>
-            <a:off x="831800" y="4019104"/>
-            <a:ext cx="7708999" cy="347811"/>
-          </a:xfrm>
-          <a:prstGeom prst="rect">
-            <a:avLst/>
-          </a:prstGeom>
-          <a:noFill/>
-          <a:ln/>
-        </p:spPr>
-        <p:txBody>
-          <a:bodyPr wrap="square" lIns="0" tIns="0" rIns="0" bIns="0" rtlCol="0" anchor="t"/>
-          <a:lstStyle/>
-          <a:p>
-            <a:pPr algn="l" marL="342900" indent="-342900">
               <a:lnSpc>
-                <a:spcPts val="1320"/>
+                <a:spcPts val="1300"/>
               </a:lnSpc>
-              <a:spcAft>
-                <a:spcPts val="100"/>
+              <a:spcBef>
+                <a:spcPts val="300"/>
+              </a:spcBef>
+              <a:spcAft>
+                <a:spcPts val="300"/>
+              </a:spcAft>
+              <a:buNone/>
+            </a:pPr>
+            <a:r>
+              <a:rPr lang="en-US" sz="1000" b="1" dirty="0">
+                <a:solidFill>
+                  <a:srgbClr val="2C3E50"/>
+                </a:solidFill>
+                <a:latin typeface="Arial" pitchFamily="34" charset="0"/>
+                <a:ea typeface="Arial" pitchFamily="34" charset="-122"/>
+                <a:cs typeface="Arial" pitchFamily="34" charset="-120"/>
+              </a:rPr>
+              <a:t>B's acceptance rule:</a:t>
+            </a:r>
+            <a:endParaRPr lang="en-US" sz="1000" dirty="0"/>
+          </a:p>
+        </p:txBody>
+      </p:sp>
+      <p:sp>
+        <p:nvSpPr>
+          <p:cNvPr id="45" name="Text 43"/>
+          <p:cNvSpPr/>
+          <p:nvPr/>
+        </p:nvSpPr>
+        <p:spPr>
+          <a:xfrm>
+            <a:off x="4851350" y="2964210"/>
+            <a:ext cx="3873448" cy="164902"/>
+          </a:xfrm>
+          <a:prstGeom prst="rect">
+            <a:avLst/>
+          </a:prstGeom>
+          <a:noFill/>
+          <a:ln/>
+        </p:spPr>
+        <p:txBody>
+          <a:bodyPr wrap="square" lIns="0" tIns="0" rIns="0" bIns="0" rtlCol="0" anchor="t"/>
+          <a:lstStyle/>
+          <a:p>
+            <a:pPr algn="l" indent="0" marL="0">
+              <a:lnSpc>
+                <a:spcPts val="1300"/>
+              </a:lnSpc>
+              <a:spcBef>
+                <a:spcPts val="300"/>
+              </a:spcBef>
+              <a:spcAft>
+                <a:spcPts val="300"/>
+              </a:spcAft>
+              <a:buNone/>
+            </a:pPr>
+            <a:r>
+              <a:rPr lang="en-US" sz="1000" dirty="0">
+                <a:solidFill>
+                  <a:srgbClr val="2C3E50"/>
+                </a:solidFill>
+                <a:latin typeface="Arial" pitchFamily="34" charset="0"/>
+                <a:ea typeface="Arial" pitchFamily="34" charset="-122"/>
+                <a:cs typeface="Arial" pitchFamily="34" charset="-120"/>
+              </a:rPr>
+              <a:t>Accept cell if: </a:t>
+            </a:r>
+            <a:pPr algn="l" indent="0" marL="0">
+              <a:lnSpc>
+                <a:spcPts val="1300"/>
+              </a:lnSpc>
+              <a:spcBef>
+                <a:spcPts val="300"/>
+              </a:spcBef>
+              <a:spcAft>
+                <a:spcPts val="300"/>
+              </a:spcAft>
+              <a:buNone/>
+            </a:pPr>
+            <a:r>
+              <a:rPr lang="en-US" sz="1000" b="1" dirty="0">
+                <a:solidFill>
+                  <a:srgbClr val="2C3E50"/>
+                </a:solidFill>
+                <a:latin typeface="Arial" pitchFamily="34" charset="0"/>
+                <a:ea typeface="Arial" pitchFamily="34" charset="-122"/>
+                <a:cs typeface="Arial" pitchFamily="34" charset="-120"/>
+              </a:rPr>
+              <a:t>(I see blocked) OR (bit=0)</a:t>
+            </a:r>
+            <a:endParaRPr lang="en-US" sz="1000" dirty="0"/>
+          </a:p>
+        </p:txBody>
+      </p:sp>
+      <p:sp>
+        <p:nvSpPr>
+          <p:cNvPr id="46" name="Text 44"/>
+          <p:cNvSpPr/>
+          <p:nvPr/>
+        </p:nvSpPr>
+        <p:spPr>
+          <a:xfrm>
+            <a:off x="4851350" y="3167211"/>
+            <a:ext cx="3797498" cy="355104"/>
+          </a:xfrm>
+          <a:prstGeom prst="rect">
+            <a:avLst/>
+          </a:prstGeom>
+          <a:noFill/>
+          <a:ln/>
+        </p:spPr>
+        <p:txBody>
+          <a:bodyPr wrap="square" lIns="101600" tIns="0" rIns="0" bIns="0" rtlCol="0" anchor="t"/>
+          <a:lstStyle/>
+          <a:p>
+            <a:pPr algn="l" marL="101600" indent="-101600">
+              <a:lnSpc>
+                <a:spcPts val="1300"/>
+              </a:lnSpc>
+              <a:spcAft>
+                <a:spcPts val="200"/>
               </a:spcAft>
               <a:buSzPct val="100000"/>
               <a:buChar char="•"/>
             </a:pPr>
             <a:r>
-              <a:rPr lang="en-US" sz="1100" b="1" dirty="0">
+              <a:rPr lang="en-US" sz="1000" dirty="0">
                 <a:solidFill>
                   <a:srgbClr val="2C3E50"/>
                 </a:solidFill>
@@ -2353,43 +4038,23 @@
                 <a:ea typeface="Arial" pitchFamily="34" charset="-122"/>
                 <a:cs typeface="Arial" pitchFamily="34" charset="-120"/>
               </a:rPr>
-              <a:t>PATH:</a:t>
-            </a:r>
-            <a:pPr algn="l" indent="0" marL="0">
+              <a:t>All 6 cells pass ✓</a:t>
+            </a:r>
+            <a:endParaRPr lang="en-US" sz="1000" dirty="0"/>
+          </a:p>
+          <a:p>
+            <a:pPr algn="l" marL="101600" indent="-101600">
               <a:lnSpc>
-                <a:spcPts val="1320"/>
+                <a:spcPts val="1300"/>
               </a:lnSpc>
               <a:spcAft>
-                <a:spcPts val="100"/>
-              </a:spcAft>
-              <a:buNone/>
-            </a:pPr>
-            <a:r>
-              <a:rPr lang="en-US" sz="1100" dirty="0">
-                <a:solidFill>
-                  <a:srgbClr val="2C3E50"/>
-                </a:solidFill>
-                <a:latin typeface="Arial" pitchFamily="34" charset="0"/>
-                <a:ea typeface="Arial" pitchFamily="34" charset="-122"/>
-                <a:cs typeface="Arial" pitchFamily="34" charset="-120"/>
-              </a:rPr>
-              <a:t> Walk route cell-by-cell → check no obstacles → verify endpoints</a:t>
-            </a:r>
-            <a:endParaRPr lang="en-US" sz="1100" dirty="0"/>
-          </a:p>
-          <a:p>
-            <a:pPr algn="l" marL="342900" indent="-342900">
-              <a:lnSpc>
-                <a:spcPts val="1320"/>
-              </a:lnSpc>
-              <a:spcAft>
-                <a:spcPts val="100"/>
+                <a:spcPts val="200"/>
               </a:spcAft>
               <a:buSzPct val="100000"/>
               <a:buChar char="•"/>
             </a:pPr>
             <a:r>
-              <a:rPr lang="en-US" sz="1100" b="1" dirty="0">
+              <a:rPr lang="en-US" sz="1000" dirty="0">
                 <a:solidFill>
                   <a:srgbClr val="2C3E50"/>
                 </a:solidFill>
@@ -2397,42 +4062,22 @@
                 <a:ea typeface="Arial" pitchFamily="34" charset="-122"/>
                 <a:cs typeface="Arial" pitchFamily="34" charset="-120"/>
               </a:rPr>
-              <a:t>CUT:</a:t>
-            </a:r>
-            <a:pPr algn="l" indent="0" marL="0">
-              <a:lnSpc>
-                <a:spcPts val="1320"/>
-              </a:lnSpc>
-              <a:spcAft>
-                <a:spcPts val="100"/>
-              </a:spcAft>
-              <a:buNone/>
-            </a:pPr>
-            <a:r>
-              <a:rPr lang="en-US" sz="1100" dirty="0">
-                <a:solidFill>
-                  <a:srgbClr val="2C3E50"/>
-                </a:solidFill>
-                <a:latin typeface="Arial" pitchFamily="34" charset="0"/>
-                <a:ea typeface="Arial" pitchFamily="34" charset="-122"/>
-                <a:cs typeface="Arial" pitchFamily="34" charset="-120"/>
-              </a:rPr>
-              <a:t> Check cells blocked → remove barrier → verify S can't reach G</a:t>
-            </a:r>
-            <a:endParaRPr lang="en-US" sz="1100" dirty="0"/>
-          </a:p>
-        </p:txBody>
-      </p:sp>
-      <p:sp>
-        <p:nvSpPr>
-          <p:cNvPr id="15" name="Text 11"/>
-          <p:cNvSpPr/>
-          <p:nvPr/>
-        </p:nvSpPr>
-        <p:spPr>
-          <a:xfrm>
-            <a:off x="-91440" y="4563517"/>
-            <a:ext cx="9326880" cy="171450"/>
+              <a:t>Fast path: 3 messages</a:t>
+            </a:r>
+            <a:endParaRPr lang="en-US" sz="1000" dirty="0"/>
+          </a:p>
+        </p:txBody>
+      </p:sp>
+      <p:sp>
+        <p:nvSpPr>
+          <p:cNvPr id="47" name="Text 45"/>
+          <p:cNvSpPr/>
+          <p:nvPr/>
+        </p:nvSpPr>
+        <p:spPr>
+          <a:xfrm>
+            <a:off x="-91440" y="4737199"/>
+            <a:ext cx="9326880" cy="152400"/>
           </a:xfrm>
           <a:prstGeom prst="rect">
             <a:avLst/>
@@ -2446,15 +4091,15 @@
           <a:p>
             <a:pPr algn="ctr" indent="0" marL="0">
               <a:spcBef>
-                <a:spcPts val="200"/>
+                <a:spcPts val="600"/>
               </a:spcBef>
               <a:spcAft>
-                <a:spcPts val="8000"/>
-              </a:spcAft>
-              <a:buNone/>
-            </a:pPr>
-            <a:r>
-              <a:rPr lang="en-US" sz="1200" b="1" dirty="0">
+                <a:spcPts val="2000"/>
+              </a:spcAft>
+              <a:buNone/>
+            </a:pPr>
+            <a:r>
+              <a:rPr lang="en-US" sz="1100" b="1" dirty="0">
                 <a:solidFill>
                   <a:srgbClr val="27AE60"/>
                 </a:solidFill>
@@ -2462,9 +4107,9 @@
                 <a:ea typeface="Arial" pitchFamily="34" charset="-122"/>
                 <a:cs typeface="Arial" pitchFamily="34" charset="-120"/>
               </a:rPr>
-              <a:t>Proof in transcript. Visual, verifiable.</a:t>
-            </a:r>
-            <a:endParaRPr lang="en-US" sz="1200" dirty="0"/>
+              <a:t>Cost: 1 byte (6 bits) • Benefit: Eliminates probe round (~200 bytes)</a:t>
+            </a:r>
+            <a:endParaRPr lang="en-US" sz="1100" dirty="0"/>
           </a:p>
         </p:txBody>
       </p:sp>
@@ -5012,7 +6657,7 @@
         </p:nvSpPr>
         <p:spPr>
           <a:xfrm>
-            <a:off x="-91440" y="126950"/>
+            <a:off x="-91440" y="101501"/>
             <a:ext cx="9326880" cy="323850"/>
           </a:xfrm>
           <a:prstGeom prst="rect">
@@ -5027,15 +6672,213 @@
           <a:p>
             <a:pPr algn="ctr" indent="0" marL="0">
               <a:spcBef>
-                <a:spcPts val="1000"/>
+                <a:spcPts val="800"/>
               </a:spcBef>
               <a:spcAft>
+                <a:spcPts val="400"/>
+              </a:spcAft>
+              <a:buNone/>
+            </a:pPr>
+            <a:r>
+              <a:rPr lang="en-US" sz="2200" b="1" dirty="0">
+                <a:solidFill>
+                  <a:srgbClr val="2C3E50"/>
+                </a:solidFill>
+                <a:latin typeface="Arial" pitchFamily="34" charset="0"/>
+                <a:ea typeface="Arial" pitchFamily="34" charset="-122"/>
+                <a:cs typeface="Arial" pitchFamily="34" charset="-120"/>
+              </a:rPr>
+              <a:t>Timeline &amp; Deliverables</a:t>
+            </a:r>
+            <a:endParaRPr lang="en-US" sz="2200" dirty="0"/>
+          </a:p>
+        </p:txBody>
+      </p:sp>
+      <p:sp>
+        <p:nvSpPr>
+          <p:cNvPr id="3" name="Text 1"/>
+          <p:cNvSpPr/>
+          <p:nvPr/>
+        </p:nvSpPr>
+        <p:spPr>
+          <a:xfrm>
+            <a:off x="-91440" y="476101"/>
+            <a:ext cx="9326880" cy="171450"/>
+          </a:xfrm>
+          <a:prstGeom prst="rect">
+            <a:avLst/>
+          </a:prstGeom>
+          <a:noFill/>
+          <a:ln/>
+        </p:spPr>
+        <p:txBody>
+          <a:bodyPr wrap="square" lIns="0" tIns="0" rIns="0" bIns="0" rtlCol="0" anchor="t"/>
+          <a:lstStyle/>
+          <a:p>
+            <a:pPr algn="ctr" indent="0" marL="0">
+              <a:spcAft>
                 <a:spcPts val="600"/>
               </a:spcAft>
               <a:buNone/>
             </a:pPr>
             <a:r>
-              <a:rPr lang="en-US" sz="2200" b="1" dirty="0">
+              <a:rPr lang="en-US" sz="1200" dirty="0">
+                <a:solidFill>
+                  <a:srgbClr val="7F8C8D"/>
+                </a:solidFill>
+                <a:latin typeface="Arial" pitchFamily="34" charset="0"/>
+                <a:ea typeface="Arial" pitchFamily="34" charset="-122"/>
+                <a:cs typeface="Arial" pitchFamily="34" charset="-120"/>
+              </a:rPr>
+              <a:t>Oct 26 → Dec 6 (6 weeks)</a:t>
+            </a:r>
+            <a:endParaRPr lang="en-US" sz="1200" dirty="0"/>
+          </a:p>
+        </p:txBody>
+      </p:sp>
+      <p:sp>
+        <p:nvSpPr>
+          <p:cNvPr id="4" name="Text 2"/>
+          <p:cNvSpPr/>
+          <p:nvPr/>
+        </p:nvSpPr>
+        <p:spPr>
+          <a:xfrm>
+            <a:off x="2009937" y="723751"/>
+            <a:ext cx="2245343" cy="133350"/>
+          </a:xfrm>
+          <a:prstGeom prst="rect">
+            <a:avLst/>
+          </a:prstGeom>
+          <a:noFill/>
+          <a:ln/>
+        </p:spPr>
+        <p:txBody>
+          <a:bodyPr wrap="square" lIns="0" tIns="0" rIns="0" bIns="0" rtlCol="0" anchor="t"/>
+          <a:lstStyle/>
+          <a:p>
+            <a:pPr algn="ctr" indent="0" marL="0">
+              <a:buNone/>
+            </a:pPr>
+            <a:r>
+              <a:rPr lang="en-US" sz="900" b="1" dirty="0">
+                <a:solidFill>
+                  <a:srgbClr val="7F8C8D"/>
+                </a:solidFill>
+                <a:latin typeface="Arial" pitchFamily="34" charset="0"/>
+                <a:ea typeface="Arial" pitchFamily="34" charset="-122"/>
+                <a:cs typeface="Arial" pitchFamily="34" charset="-120"/>
+              </a:rPr>
+              <a:t>Week 1-2</a:t>
+            </a:r>
+            <a:endParaRPr lang="en-US" sz="900" dirty="0"/>
+          </a:p>
+        </p:txBody>
+      </p:sp>
+      <p:sp>
+        <p:nvSpPr>
+          <p:cNvPr id="5" name="Text 3"/>
+          <p:cNvSpPr/>
+          <p:nvPr/>
+        </p:nvSpPr>
+        <p:spPr>
+          <a:xfrm>
+            <a:off x="4211254" y="723751"/>
+            <a:ext cx="2245343" cy="133350"/>
+          </a:xfrm>
+          <a:prstGeom prst="rect">
+            <a:avLst/>
+          </a:prstGeom>
+          <a:noFill/>
+          <a:ln/>
+        </p:spPr>
+        <p:txBody>
+          <a:bodyPr wrap="square" lIns="0" tIns="0" rIns="0" bIns="0" rtlCol="0" anchor="t"/>
+          <a:lstStyle/>
+          <a:p>
+            <a:pPr algn="ctr" indent="0" marL="0">
+              <a:buNone/>
+            </a:pPr>
+            <a:r>
+              <a:rPr lang="en-US" sz="900" b="1" dirty="0">
+                <a:solidFill>
+                  <a:srgbClr val="7F8C8D"/>
+                </a:solidFill>
+                <a:latin typeface="Arial" pitchFamily="34" charset="0"/>
+                <a:ea typeface="Arial" pitchFamily="34" charset="-122"/>
+                <a:cs typeface="Arial" pitchFamily="34" charset="-120"/>
+              </a:rPr>
+              <a:t>Week 3-4</a:t>
+            </a:r>
+            <a:endParaRPr lang="en-US" sz="900" dirty="0"/>
+          </a:p>
+        </p:txBody>
+      </p:sp>
+      <p:sp>
+        <p:nvSpPr>
+          <p:cNvPr id="6" name="Text 4"/>
+          <p:cNvSpPr/>
+          <p:nvPr/>
+        </p:nvSpPr>
+        <p:spPr>
+          <a:xfrm>
+            <a:off x="6412571" y="723751"/>
+            <a:ext cx="2245343" cy="133350"/>
+          </a:xfrm>
+          <a:prstGeom prst="rect">
+            <a:avLst/>
+          </a:prstGeom>
+          <a:noFill/>
+          <a:ln/>
+        </p:spPr>
+        <p:txBody>
+          <a:bodyPr wrap="square" lIns="0" tIns="0" rIns="0" bIns="0" rtlCol="0" anchor="t"/>
+          <a:lstStyle/>
+          <a:p>
+            <a:pPr algn="ctr" indent="0" marL="0">
+              <a:buNone/>
+            </a:pPr>
+            <a:r>
+              <a:rPr lang="en-US" sz="900" b="1" dirty="0">
+                <a:solidFill>
+                  <a:srgbClr val="7F8C8D"/>
+                </a:solidFill>
+                <a:latin typeface="Arial" pitchFamily="34" charset="0"/>
+                <a:ea typeface="Arial" pitchFamily="34" charset="-122"/>
+                <a:cs typeface="Arial" pitchFamily="34" charset="-120"/>
+              </a:rPr>
+              <a:t>Week 5-6</a:t>
+            </a:r>
+            <a:endParaRPr lang="en-US" sz="900" dirty="0"/>
+          </a:p>
+        </p:txBody>
+      </p:sp>
+      <p:sp>
+        <p:nvSpPr>
+          <p:cNvPr id="7" name="Text 5"/>
+          <p:cNvSpPr/>
+          <p:nvPr/>
+        </p:nvSpPr>
+        <p:spPr>
+          <a:xfrm>
+            <a:off x="507950" y="1206252"/>
+            <a:ext cx="1489659" cy="342900"/>
+          </a:xfrm>
+          <a:prstGeom prst="rect">
+            <a:avLst/>
+          </a:prstGeom>
+          <a:noFill/>
+          <a:ln/>
+        </p:spPr>
+        <p:txBody>
+          <a:bodyPr wrap="square" lIns="0" tIns="0" rIns="0" bIns="0" rtlCol="0" anchor="t"/>
+          <a:lstStyle/>
+          <a:p>
+            <a:pPr algn="l" indent="0" marL="0">
+              <a:buNone/>
+            </a:pPr>
+            <a:r>
+              <a:rPr lang="en-US" sz="1200" b="1" dirty="0">
                 <a:solidFill>
                   <a:srgbClr val="2C3E50"/>
                 </a:solidFill>
@@ -5043,49 +6886,7 @@
                 <a:ea typeface="Arial" pitchFamily="34" charset="-122"/>
                 <a:cs typeface="Arial" pitchFamily="34" charset="-120"/>
               </a:rPr>
-              <a:t>Our Approach: Implementation &amp; Evaluation</a:t>
-            </a:r>
-            <a:endParaRPr lang="en-US" sz="2200" dirty="0"/>
-          </a:p>
-        </p:txBody>
-      </p:sp>
-      <p:sp>
-        <p:nvSpPr>
-          <p:cNvPr id="3" name="Text 1"/>
-          <p:cNvSpPr/>
-          <p:nvPr/>
-        </p:nvSpPr>
-        <p:spPr>
-          <a:xfrm>
-            <a:off x="-91440" y="527000"/>
-            <a:ext cx="9326880" cy="171450"/>
-          </a:xfrm>
-          <a:prstGeom prst="rect">
-            <a:avLst/>
-          </a:prstGeom>
-          <a:noFill/>
-          <a:ln/>
-        </p:spPr>
-        <p:txBody>
-          <a:bodyPr wrap="square" lIns="0" tIns="0" rIns="0" bIns="0" rtlCol="0" anchor="t"/>
-          <a:lstStyle/>
-          <a:p>
-            <a:pPr algn="ctr" indent="0" marL="0">
-              <a:spcAft>
-                <a:spcPts val="1000"/>
-              </a:spcAft>
-              <a:buNone/>
-            </a:pPr>
-            <a:r>
-              <a:rPr lang="en-US" sz="1200" dirty="0">
-                <a:solidFill>
-                  <a:srgbClr val="7F8C8D"/>
-                </a:solidFill>
-                <a:latin typeface="Arial" pitchFamily="34" charset="0"/>
-                <a:ea typeface="Arial" pitchFamily="34" charset="-122"/>
-                <a:cs typeface="Arial" pitchFamily="34" charset="-120"/>
-              </a:rPr>
-              <a:t>How we'll build and test the system</a:t>
+              <a:t>Core Implementation</a:t>
             </a:r>
             <a:endParaRPr lang="en-US" sz="1200" dirty="0"/>
           </a:p>
@@ -5093,22 +6894,22 @@
       </p:sp>
       <p:sp>
         <p:nvSpPr>
-          <p:cNvPr id="4" name="Text 2"/>
-          <p:cNvSpPr/>
-          <p:nvPr/>
-        </p:nvSpPr>
-        <p:spPr>
-          <a:xfrm>
-            <a:off x="444401" y="825401"/>
-            <a:ext cx="8255198" cy="1567755"/>
+          <p:cNvPr id="8" name="Text 6"/>
+          <p:cNvSpPr/>
+          <p:nvPr/>
+        </p:nvSpPr>
+        <p:spPr>
+          <a:xfrm>
+            <a:off x="2031802" y="933301"/>
+            <a:ext cx="2201168" cy="888950"/>
           </a:xfrm>
           <a:prstGeom prst="roundRect">
             <a:avLst>
-              <a:gd name="adj" fmla="val 3240"/>
+              <a:gd name="adj" fmla="val 5715"/>
             </a:avLst>
           </a:prstGeom>
           <a:solidFill>
-            <a:srgbClr val="EBF5FB"/>
+            <a:srgbClr val="3498DB"/>
           </a:solidFill>
           <a:ln/>
         </p:spPr>
@@ -5125,37 +6926,14 @@
       </p:sp>
       <p:sp>
         <p:nvSpPr>
-          <p:cNvPr id="5" name="Shape 3"/>
-          <p:cNvSpPr/>
-          <p:nvPr/>
-        </p:nvSpPr>
-        <p:spPr>
-          <a:xfrm>
-            <a:off x="472976" y="825401"/>
-            <a:ext cx="0" cy="1567755"/>
-          </a:xfrm>
-          <a:prstGeom prst="line">
-            <a:avLst/>
-          </a:prstGeom>
-          <a:noFill/>
-          <a:ln w="57150">
-            <a:solidFill>
-              <a:srgbClr val="3498DB"/>
-            </a:solidFill>
-            <a:prstDash val="solid"/>
-          </a:ln>
-        </p:spPr>
-      </p:sp>
-      <p:sp>
-        <p:nvSpPr>
-          <p:cNvPr id="6" name="Text 4"/>
-          <p:cNvSpPr/>
-          <p:nvPr/>
-        </p:nvSpPr>
-        <p:spPr>
-          <a:xfrm>
-            <a:off x="653951" y="926902"/>
-            <a:ext cx="8051113" cy="209550"/>
+          <p:cNvPr id="9" name="Text 7"/>
+          <p:cNvSpPr/>
+          <p:nvPr/>
+        </p:nvSpPr>
+        <p:spPr>
+          <a:xfrm>
+            <a:off x="2412653" y="1301502"/>
+            <a:ext cx="1468103" cy="152400"/>
           </a:xfrm>
           <a:prstGeom prst="rect">
             <a:avLst/>
@@ -5168,13 +6946,49 @@
           <a:lstStyle/>
           <a:p>
             <a:pPr algn="l" indent="0" marL="0">
-              <a:spcAft>
-                <a:spcPts val="600"/>
-              </a:spcAft>
-              <a:buNone/>
-            </a:pPr>
-            <a:r>
-              <a:rPr lang="en-US" sz="1400" b="1" dirty="0">
+              <a:buNone/>
+            </a:pPr>
+            <a:r>
+              <a:rPr lang="en-US" sz="1100" b="1" dirty="0">
+                <a:solidFill>
+                  <a:srgbClr val="FFFFFF"/>
+                </a:solidFill>
+                <a:latin typeface="Arial" pitchFamily="34" charset="0"/>
+                <a:ea typeface="Arial" pitchFamily="34" charset="-122"/>
+                <a:cs typeface="Arial" pitchFamily="34" charset="-120"/>
+              </a:rPr>
+              <a:t>Protocol + Encodings</a:t>
+            </a:r>
+            <a:endParaRPr lang="en-US" sz="1100" dirty="0"/>
+          </a:p>
+        </p:txBody>
+      </p:sp>
+      <p:sp>
+        <p:nvSpPr>
+          <p:cNvPr id="10" name="Text 8"/>
+          <p:cNvSpPr/>
+          <p:nvPr/>
+        </p:nvSpPr>
+        <p:spPr>
+          <a:xfrm>
+            <a:off x="507950" y="2384078"/>
+            <a:ext cx="1489659" cy="171450"/>
+          </a:xfrm>
+          <a:prstGeom prst="rect">
+            <a:avLst/>
+          </a:prstGeom>
+          <a:noFill/>
+          <a:ln/>
+        </p:spPr>
+        <p:txBody>
+          <a:bodyPr wrap="square" lIns="0" tIns="0" rIns="0" bIns="0" rtlCol="0" anchor="t"/>
+          <a:lstStyle/>
+          <a:p>
+            <a:pPr algn="l" indent="0" marL="0">
+              <a:buNone/>
+            </a:pPr>
+            <a:r>
+              <a:rPr lang="en-US" sz="1200" b="1" dirty="0">
                 <a:solidFill>
                   <a:srgbClr val="2C3E50"/>
                 </a:solidFill>
@@ -5182,269 +6996,9 @@
                 <a:ea typeface="Arial" pitchFamily="34" charset="-122"/>
                 <a:cs typeface="Arial" pitchFamily="34" charset="-120"/>
               </a:rPr>
-              <a:t>1. What We'll Implement</a:t>
-            </a:r>
-            <a:endParaRPr lang="en-US" sz="1400" dirty="0"/>
-          </a:p>
-        </p:txBody>
-      </p:sp>
-      <p:sp>
-        <p:nvSpPr>
-          <p:cNvPr id="7" name="Text 5"/>
-          <p:cNvSpPr/>
-          <p:nvPr/>
-        </p:nvSpPr>
-        <p:spPr>
-          <a:xfrm>
-            <a:off x="653951" y="1339602"/>
-            <a:ext cx="3947833" cy="177701"/>
-          </a:xfrm>
-          <a:prstGeom prst="rect">
-            <a:avLst/>
-          </a:prstGeom>
-          <a:noFill/>
-          <a:ln/>
-        </p:spPr>
-        <p:txBody>
-          <a:bodyPr wrap="square" lIns="0" tIns="0" rIns="0" bIns="0" rtlCol="0" anchor="t"/>
-          <a:lstStyle/>
-          <a:p>
-            <a:pPr algn="l" indent="0" marL="0">
-              <a:lnSpc>
-                <a:spcPts val="1400"/>
-              </a:lnSpc>
-              <a:spcBef>
-                <a:spcPts val="1000"/>
-              </a:spcBef>
-              <a:spcAft>
-                <a:spcPts val="1000"/>
-              </a:spcAft>
-              <a:buNone/>
-            </a:pPr>
-            <a:r>
-              <a:rPr lang="en-US" sz="1000" b="1" dirty="0">
-                <a:solidFill>
-                  <a:srgbClr val="2C3E50"/>
-                </a:solidFill>
-                <a:latin typeface="Arial" pitchFamily="34" charset="0"/>
-                <a:ea typeface="Arial" pitchFamily="34" charset="-122"/>
-                <a:cs typeface="Arial" pitchFamily="34" charset="-120"/>
-              </a:rPr>
-              <a:t>CertTalk Protocol:</a:t>
-            </a:r>
-            <a:endParaRPr lang="en-US" sz="1000" dirty="0"/>
-          </a:p>
-        </p:txBody>
-      </p:sp>
-      <p:sp>
-        <p:nvSpPr>
-          <p:cNvPr id="8" name="Text 6"/>
-          <p:cNvSpPr/>
-          <p:nvPr/>
-        </p:nvSpPr>
-        <p:spPr>
-          <a:xfrm>
-            <a:off x="653951" y="1644253"/>
-            <a:ext cx="3870424" cy="609302"/>
-          </a:xfrm>
-          <a:prstGeom prst="rect">
-            <a:avLst/>
-          </a:prstGeom>
-          <a:noFill/>
-          <a:ln/>
-        </p:spPr>
-        <p:txBody>
-          <a:bodyPr wrap="square" lIns="114300" tIns="0" rIns="0" bIns="0" rtlCol="0" anchor="t"/>
-          <a:lstStyle/>
-          <a:p>
-            <a:pPr algn="l" marL="114300" indent="-114300">
-              <a:lnSpc>
-                <a:spcPts val="1400"/>
-              </a:lnSpc>
-              <a:spcAft>
-                <a:spcPts val="300"/>
-              </a:spcAft>
-              <a:buSzPct val="100000"/>
-              <a:buChar char="•"/>
-            </a:pPr>
-            <a:r>
-              <a:rPr lang="en-US" sz="1000" dirty="0">
-                <a:solidFill>
-                  <a:srgbClr val="2C3E50"/>
-                </a:solidFill>
-                <a:latin typeface="Arial" pitchFamily="34" charset="0"/>
-                <a:ea typeface="Arial" pitchFamily="34" charset="-122"/>
-                <a:cs typeface="Arial" pitchFamily="34" charset="-120"/>
-              </a:rPr>
-              <a:t>PATH &amp; CUT certificate encodings</a:t>
-            </a:r>
-            <a:endParaRPr lang="en-US" sz="1000" dirty="0"/>
-          </a:p>
-          <a:p>
-            <a:pPr algn="l" marL="114300" indent="-114300">
-              <a:lnSpc>
-                <a:spcPts val="1400"/>
-              </a:lnSpc>
-              <a:spcAft>
-                <a:spcPts val="300"/>
-              </a:spcAft>
-              <a:buSzPct val="100000"/>
-              <a:buChar char="•"/>
-            </a:pPr>
-            <a:r>
-              <a:rPr lang="en-US" sz="1000" dirty="0">
-                <a:solidFill>
-                  <a:srgbClr val="2C3E50"/>
-                </a:solidFill>
-                <a:latin typeface="Arial" pitchFamily="34" charset="0"/>
-                <a:ea typeface="Arial" pitchFamily="34" charset="-122"/>
-                <a:cs typeface="Arial" pitchFamily="34" charset="-120"/>
-              </a:rPr>
-              <a:t>Witness bit negotiation</a:t>
-            </a:r>
-            <a:endParaRPr lang="en-US" sz="1000" dirty="0"/>
-          </a:p>
-          <a:p>
-            <a:pPr algn="l" marL="114300" indent="-114300">
-              <a:lnSpc>
-                <a:spcPts val="1400"/>
-              </a:lnSpc>
-              <a:spcAft>
-                <a:spcPts val="300"/>
-              </a:spcAft>
-              <a:buSzPct val="100000"/>
-              <a:buChar char="•"/>
-            </a:pPr>
-            <a:r>
-              <a:rPr lang="en-US" sz="1000" dirty="0">
-                <a:solidFill>
-                  <a:srgbClr val="2C3E50"/>
-                </a:solidFill>
-                <a:latin typeface="Arial" pitchFamily="34" charset="0"/>
-                <a:ea typeface="Arial" pitchFamily="34" charset="-122"/>
-                <a:cs typeface="Arial" pitchFamily="34" charset="-120"/>
-              </a:rPr>
-              <a:t>Oracle verification module</a:t>
-            </a:r>
-            <a:endParaRPr lang="en-US" sz="1000" dirty="0"/>
-          </a:p>
-        </p:txBody>
-      </p:sp>
-      <p:sp>
-        <p:nvSpPr>
-          <p:cNvPr id="9" name="Text 7"/>
-          <p:cNvSpPr/>
-          <p:nvPr/>
-        </p:nvSpPr>
-        <p:spPr>
-          <a:xfrm>
-            <a:off x="4676775" y="1339602"/>
-            <a:ext cx="3947833" cy="177701"/>
-          </a:xfrm>
-          <a:prstGeom prst="rect">
-            <a:avLst/>
-          </a:prstGeom>
-          <a:noFill/>
-          <a:ln/>
-        </p:spPr>
-        <p:txBody>
-          <a:bodyPr wrap="square" lIns="0" tIns="0" rIns="0" bIns="0" rtlCol="0" anchor="t"/>
-          <a:lstStyle/>
-          <a:p>
-            <a:pPr algn="l" indent="0" marL="0">
-              <a:lnSpc>
-                <a:spcPts val="1400"/>
-              </a:lnSpc>
-              <a:spcBef>
-                <a:spcPts val="1000"/>
-              </a:spcBef>
-              <a:spcAft>
-                <a:spcPts val="1000"/>
-              </a:spcAft>
-              <a:buNone/>
-            </a:pPr>
-            <a:r>
-              <a:rPr lang="en-US" sz="1000" b="1" dirty="0">
-                <a:solidFill>
-                  <a:srgbClr val="2C3E50"/>
-                </a:solidFill>
-                <a:latin typeface="Arial" pitchFamily="34" charset="0"/>
-                <a:ea typeface="Arial" pitchFamily="34" charset="-122"/>
-                <a:cs typeface="Arial" pitchFamily="34" charset="-120"/>
-              </a:rPr>
-              <a:t>Baseline Systems:</a:t>
-            </a:r>
-            <a:endParaRPr lang="en-US" sz="1000" dirty="0"/>
-          </a:p>
-        </p:txBody>
-      </p:sp>
-      <p:sp>
-        <p:nvSpPr>
-          <p:cNvPr id="10" name="Text 8"/>
-          <p:cNvSpPr/>
-          <p:nvPr/>
-        </p:nvSpPr>
-        <p:spPr>
-          <a:xfrm>
-            <a:off x="4676775" y="1644253"/>
-            <a:ext cx="3870424" cy="393502"/>
-          </a:xfrm>
-          <a:prstGeom prst="rect">
-            <a:avLst/>
-          </a:prstGeom>
-          <a:noFill/>
-          <a:ln/>
-        </p:spPr>
-        <p:txBody>
-          <a:bodyPr wrap="square" lIns="114300" tIns="0" rIns="0" bIns="0" rtlCol="0" anchor="t"/>
-          <a:lstStyle/>
-          <a:p>
-            <a:pPr algn="l" marL="114300" indent="-114300">
-              <a:lnSpc>
-                <a:spcPts val="1400"/>
-              </a:lnSpc>
-              <a:spcAft>
-                <a:spcPts val="300"/>
-              </a:spcAft>
-              <a:buSzPct val="100000"/>
-              <a:buChar char="•"/>
-            </a:pPr>
-            <a:r>
-              <a:rPr lang="en-US" sz="1000" dirty="0">
-                <a:solidFill>
-                  <a:srgbClr val="2C3E50"/>
-                </a:solidFill>
-                <a:latin typeface="Arial" pitchFamily="34" charset="0"/>
-                <a:ea typeface="Arial" pitchFamily="34" charset="-122"/>
-                <a:cs typeface="Arial" pitchFamily="34" charset="-120"/>
-              </a:rPr>
-              <a:t>Send-All (raw coordinates)</a:t>
-            </a:r>
-            <a:endParaRPr lang="en-US" sz="1000" dirty="0"/>
-          </a:p>
-          <a:p>
-            <a:pPr algn="l" marL="114300" indent="-114300">
-              <a:lnSpc>
-                <a:spcPts val="1400"/>
-              </a:lnSpc>
-              <a:spcAft>
-                <a:spcPts val="300"/>
-              </a:spcAft>
-              <a:buSzPct val="100000"/>
-              <a:buChar char="•"/>
-            </a:pPr>
-            <a:r>
-              <a:rPr lang="en-US" sz="1000" dirty="0">
-                <a:solidFill>
-                  <a:srgbClr val="2C3E50"/>
-                </a:solidFill>
-                <a:latin typeface="Arial" pitchFamily="34" charset="0"/>
-                <a:ea typeface="Arial" pitchFamily="34" charset="-122"/>
-                <a:cs typeface="Arial" pitchFamily="34" charset="-120"/>
-              </a:rPr>
-              <a:t>Other exploration strategies</a:t>
-            </a:r>
-            <a:endParaRPr lang="en-US" sz="1000" dirty="0"/>
+              <a:t>Baselines &amp; Dataset</a:t>
+            </a:r>
+            <a:endParaRPr lang="en-US" sz="1200" dirty="0"/>
           </a:p>
         </p:txBody>
       </p:sp>
@@ -5456,16 +7010,16 @@
         </p:nvSpPr>
         <p:spPr>
           <a:xfrm>
-            <a:off x="444401" y="2494657"/>
-            <a:ext cx="8255198" cy="1351955"/>
+            <a:off x="4232970" y="2025402"/>
+            <a:ext cx="2201168" cy="888950"/>
           </a:xfrm>
           <a:prstGeom prst="roundRect">
             <a:avLst>
-              <a:gd name="adj" fmla="val 3758"/>
+              <a:gd name="adj" fmla="val 5715"/>
             </a:avLst>
           </a:prstGeom>
           <a:solidFill>
-            <a:srgbClr val="FEF5E7"/>
+            <a:srgbClr val="F39C12"/>
           </a:solidFill>
           <a:ln/>
         </p:spPr>
@@ -5482,37 +7036,199 @@
       </p:sp>
       <p:sp>
         <p:nvSpPr>
-          <p:cNvPr id="12" name="Shape 10"/>
-          <p:cNvSpPr/>
-          <p:nvPr/>
-        </p:nvSpPr>
-        <p:spPr>
-          <a:xfrm>
-            <a:off x="472976" y="2494657"/>
-            <a:ext cx="0" cy="1351955"/>
-          </a:xfrm>
-          <a:prstGeom prst="line">
-            <a:avLst/>
-          </a:prstGeom>
-          <a:noFill/>
-          <a:ln w="57150">
+          <p:cNvPr id="12" name="Text 10"/>
+          <p:cNvSpPr/>
+          <p:nvPr/>
+        </p:nvSpPr>
+        <p:spPr>
+          <a:xfrm>
+            <a:off x="4463504" y="2393603"/>
+            <a:ext cx="1774749" cy="152400"/>
+          </a:xfrm>
+          <a:prstGeom prst="rect">
+            <a:avLst/>
+          </a:prstGeom>
+          <a:noFill/>
+          <a:ln/>
+        </p:spPr>
+        <p:txBody>
+          <a:bodyPr wrap="square" lIns="0" tIns="0" rIns="0" bIns="0" rtlCol="0" anchor="t"/>
+          <a:lstStyle/>
+          <a:p>
+            <a:pPr algn="l" indent="0" marL="0">
+              <a:buNone/>
+            </a:pPr>
+            <a:r>
+              <a:rPr lang="en-US" sz="1100" b="1" dirty="0">
+                <a:solidFill>
+                  <a:srgbClr val="FFFFFF"/>
+                </a:solidFill>
+                <a:latin typeface="Arial" pitchFamily="34" charset="0"/>
+                <a:ea typeface="Arial" pitchFamily="34" charset="-122"/>
+                <a:cs typeface="Arial" pitchFamily="34" charset="-120"/>
+              </a:rPr>
+              <a:t>1,000 grids + Test harness</a:t>
+            </a:r>
+            <a:endParaRPr lang="en-US" sz="1100" dirty="0"/>
+          </a:p>
+        </p:txBody>
+      </p:sp>
+      <p:sp>
+        <p:nvSpPr>
+          <p:cNvPr id="13" name="Text 11"/>
+          <p:cNvSpPr/>
+          <p:nvPr/>
+        </p:nvSpPr>
+        <p:spPr>
+          <a:xfrm>
+            <a:off x="507950" y="3390454"/>
+            <a:ext cx="1489659" cy="342900"/>
+          </a:xfrm>
+          <a:prstGeom prst="rect">
+            <a:avLst/>
+          </a:prstGeom>
+          <a:noFill/>
+          <a:ln/>
+        </p:spPr>
+        <p:txBody>
+          <a:bodyPr wrap="square" lIns="0" tIns="0" rIns="0" bIns="0" rtlCol="0" anchor="t"/>
+          <a:lstStyle/>
+          <a:p>
+            <a:pPr algn="l" indent="0" marL="0">
+              <a:buNone/>
+            </a:pPr>
+            <a:r>
+              <a:rPr lang="en-US" sz="1200" b="1" dirty="0">
+                <a:solidFill>
+                  <a:srgbClr val="2C3E50"/>
+                </a:solidFill>
+                <a:latin typeface="Arial" pitchFamily="34" charset="0"/>
+                <a:ea typeface="Arial" pitchFamily="34" charset="-122"/>
+                <a:cs typeface="Arial" pitchFamily="34" charset="-120"/>
+              </a:rPr>
+              <a:t>Experiments &amp; Analysis</a:t>
+            </a:r>
+            <a:endParaRPr lang="en-US" sz="1200" dirty="0"/>
+          </a:p>
+        </p:txBody>
+      </p:sp>
+      <p:sp>
+        <p:nvSpPr>
+          <p:cNvPr id="14" name="Text 12"/>
+          <p:cNvSpPr/>
+          <p:nvPr/>
+        </p:nvSpPr>
+        <p:spPr>
+          <a:xfrm>
+            <a:off x="6434138" y="3117503"/>
+            <a:ext cx="2201763" cy="888950"/>
+          </a:xfrm>
+          <a:prstGeom prst="roundRect">
+            <a:avLst>
+              <a:gd name="adj" fmla="val 5715"/>
+            </a:avLst>
+          </a:prstGeom>
+          <a:solidFill>
+            <a:srgbClr val="E74C3C"/>
+          </a:solidFill>
+          <a:ln/>
+        </p:spPr>
+        <p:txBody>
+          <a:bodyPr wrap="square" rtlCol="0" anchor="ctr"/>
+          <a:lstStyle/>
+          <a:p>
+            <a:pPr indent="0" marL="0">
+              <a:buNone/>
+            </a:pPr>
+            <a:endParaRPr lang="en-US" dirty="0"/>
+          </a:p>
+        </p:txBody>
+      </p:sp>
+      <p:sp>
+        <p:nvSpPr>
+          <p:cNvPr id="15" name="Text 13"/>
+          <p:cNvSpPr/>
+          <p:nvPr/>
+        </p:nvSpPr>
+        <p:spPr>
+          <a:xfrm>
+            <a:off x="6966496" y="3485704"/>
+            <a:ext cx="1159636" cy="152400"/>
+          </a:xfrm>
+          <a:prstGeom prst="rect">
+            <a:avLst/>
+          </a:prstGeom>
+          <a:noFill/>
+          <a:ln/>
+        </p:spPr>
+        <p:txBody>
+          <a:bodyPr wrap="square" lIns="0" tIns="0" rIns="0" bIns="0" rtlCol="0" anchor="t"/>
+          <a:lstStyle/>
+          <a:p>
+            <a:pPr algn="l" indent="0" marL="0">
+              <a:buNone/>
+            </a:pPr>
+            <a:r>
+              <a:rPr lang="en-US" sz="1100" b="1" dirty="0">
+                <a:solidFill>
+                  <a:srgbClr val="FFFFFF"/>
+                </a:solidFill>
+                <a:latin typeface="Arial" pitchFamily="34" charset="0"/>
+                <a:ea typeface="Arial" pitchFamily="34" charset="-122"/>
+                <a:cs typeface="Arial" pitchFamily="34" charset="-120"/>
+              </a:rPr>
+              <a:t>Full runs + Paper</a:t>
+            </a:r>
+            <a:endParaRPr lang="en-US" sz="1100" dirty="0"/>
+          </a:p>
+        </p:txBody>
+      </p:sp>
+      <p:sp>
+        <p:nvSpPr>
+          <p:cNvPr id="16" name="Text 14"/>
+          <p:cNvSpPr/>
+          <p:nvPr/>
+        </p:nvSpPr>
+        <p:spPr>
+          <a:xfrm>
+            <a:off x="444401" y="4285804"/>
+            <a:ext cx="8255198" cy="774650"/>
+          </a:xfrm>
+          <a:prstGeom prst="roundRect">
+            <a:avLst>
+              <a:gd name="adj" fmla="val 9837"/>
+            </a:avLst>
+          </a:prstGeom>
+          <a:solidFill>
+            <a:srgbClr val="FFF9E6"/>
+          </a:solidFill>
+          <a:ln w="19050">
             <a:solidFill>
               <a:srgbClr val="F39C12"/>
             </a:solidFill>
-            <a:prstDash val="solid"/>
           </a:ln>
         </p:spPr>
-      </p:sp>
-      <p:sp>
-        <p:nvSpPr>
-          <p:cNvPr id="13" name="Text 11"/>
-          <p:cNvSpPr/>
-          <p:nvPr/>
-        </p:nvSpPr>
-        <p:spPr>
-          <a:xfrm>
-            <a:off x="653951" y="2596158"/>
-            <a:ext cx="8051113" cy="209550"/>
+        <p:txBody>
+          <a:bodyPr wrap="square" rtlCol="0" anchor="ctr"/>
+          <a:lstStyle/>
+          <a:p>
+            <a:pPr indent="0" marL="0">
+              <a:buNone/>
+            </a:pPr>
+            <a:endParaRPr lang="en-US" dirty="0"/>
+          </a:p>
+        </p:txBody>
+      </p:sp>
+      <p:sp>
+        <p:nvSpPr>
+          <p:cNvPr id="17" name="Text 15"/>
+          <p:cNvSpPr/>
+          <p:nvPr/>
+        </p:nvSpPr>
+        <p:spPr>
+          <a:xfrm>
+            <a:off x="615851" y="4381054"/>
+            <a:ext cx="8070544" cy="200025"/>
           </a:xfrm>
           <a:prstGeom prst="rect">
             <a:avLst/>
@@ -5526,183 +7242,49 @@
           <a:p>
             <a:pPr algn="l" indent="0" marL="0">
               <a:spcAft>
-                <a:spcPts val="600"/>
-              </a:spcAft>
-              <a:buNone/>
-            </a:pPr>
-            <a:r>
-              <a:rPr lang="en-US" sz="1400" b="1" dirty="0">
-                <a:solidFill>
-                  <a:srgbClr val="2C3E50"/>
-                </a:solidFill>
-                <a:latin typeface="Arial" pitchFamily="34" charset="0"/>
-                <a:ea typeface="Arial" pitchFamily="34" charset="-122"/>
-                <a:cs typeface="Arial" pitchFamily="34" charset="-120"/>
-              </a:rPr>
-              <a:t>2. Dataset &amp; Testing</a:t>
-            </a:r>
-            <a:endParaRPr lang="en-US" sz="1400" dirty="0"/>
-          </a:p>
-        </p:txBody>
-      </p:sp>
-      <p:sp>
-        <p:nvSpPr>
-          <p:cNvPr id="14" name="Text 12"/>
-          <p:cNvSpPr/>
-          <p:nvPr/>
-        </p:nvSpPr>
-        <p:spPr>
-          <a:xfrm>
-            <a:off x="653951" y="2881908"/>
-            <a:ext cx="7893248" cy="825103"/>
-          </a:xfrm>
-          <a:prstGeom prst="rect">
-            <a:avLst/>
-          </a:prstGeom>
-          <a:noFill/>
-          <a:ln/>
-        </p:spPr>
-        <p:txBody>
-          <a:bodyPr wrap="square" lIns="114300" tIns="0" rIns="0" bIns="0" rtlCol="0" anchor="t"/>
-          <a:lstStyle/>
-          <a:p>
-            <a:pPr algn="l" marL="114300" indent="-114300">
-              <a:lnSpc>
-                <a:spcPts val="1400"/>
-              </a:lnSpc>
-              <a:spcAft>
-                <a:spcPts val="300"/>
-              </a:spcAft>
-              <a:buSzPct val="100000"/>
-              <a:buChar char="•"/>
-            </a:pPr>
-            <a:r>
-              <a:rPr lang="en-US" sz="1000" dirty="0">
-                <a:solidFill>
-                  <a:srgbClr val="2C3E50"/>
-                </a:solidFill>
-                <a:latin typeface="Arial" pitchFamily="34" charset="0"/>
-                <a:ea typeface="Arial" pitchFamily="34" charset="-122"/>
-                <a:cs typeface="Arial" pitchFamily="34" charset="-120"/>
-              </a:rPr>
-              <a:t>Generate </a:t>
-            </a:r>
-            <a:pPr algn="l" indent="0" marL="0">
-              <a:lnSpc>
-                <a:spcPts val="1400"/>
-              </a:lnSpc>
-              <a:spcAft>
-                <a:spcPts val="300"/>
-              </a:spcAft>
-              <a:buNone/>
-            </a:pPr>
-            <a:r>
-              <a:rPr lang="en-US" sz="1000" b="1" dirty="0">
-                <a:solidFill>
-                  <a:srgbClr val="2C3E50"/>
-                </a:solidFill>
-                <a:latin typeface="Arial" pitchFamily="34" charset="0"/>
-                <a:ea typeface="Arial" pitchFamily="34" charset="-122"/>
-                <a:cs typeface="Arial" pitchFamily="34" charset="-120"/>
-              </a:rPr>
-              <a:t>1,000 cached grids (4×4 to 22×22, varied density 5%-30%)</a:t>
-            </a:r>
-            <a:endParaRPr lang="en-US" sz="1000" dirty="0"/>
-          </a:p>
-          <a:p>
-            <a:pPr algn="l" marL="114300" indent="-114300">
-              <a:lnSpc>
-                <a:spcPts val="1400"/>
-              </a:lnSpc>
-              <a:spcAft>
-                <a:spcPts val="300"/>
-              </a:spcAft>
-              <a:buSzPct val="100000"/>
-              <a:buChar char="•"/>
-            </a:pPr>
-            <a:r>
-              <a:rPr lang="en-US" sz="1000" dirty="0">
-                <a:solidFill>
-                  <a:srgbClr val="2C3E50"/>
-                </a:solidFill>
-                <a:latin typeface="Arial" pitchFamily="34" charset="0"/>
-                <a:ea typeface="Arial" pitchFamily="34" charset="-122"/>
-                <a:cs typeface="Arial" pitchFamily="34" charset="-120"/>
-              </a:rPr>
-              <a:t>Mix reachable and unreachable scenarios for comprehensive coverage</a:t>
-            </a:r>
-            <a:endParaRPr lang="en-US" sz="1000" dirty="0"/>
-          </a:p>
-          <a:p>
-            <a:pPr algn="l" marL="114300" indent="-114300">
-              <a:lnSpc>
-                <a:spcPts val="1400"/>
-              </a:lnSpc>
-              <a:spcAft>
-                <a:spcPts val="300"/>
-              </a:spcAft>
-              <a:buSzPct val="100000"/>
-              <a:buChar char="•"/>
-            </a:pPr>
-            <a:r>
-              <a:rPr lang="en-US" sz="1000" dirty="0">
-                <a:solidFill>
-                  <a:srgbClr val="2C3E50"/>
-                </a:solidFill>
-                <a:latin typeface="Arial" pitchFamily="34" charset="0"/>
-                <a:ea typeface="Arial" pitchFamily="34" charset="-122"/>
-                <a:cs typeface="Arial" pitchFamily="34" charset="-120"/>
-              </a:rPr>
-              <a:t>Run all systems under identical constraints (64 msg, 256 bytes/packet)</a:t>
-            </a:r>
-            <a:endParaRPr lang="en-US" sz="1000" dirty="0"/>
-          </a:p>
-          <a:p>
-            <a:pPr algn="l" marL="114300" indent="-114300">
-              <a:lnSpc>
-                <a:spcPts val="1400"/>
-              </a:lnSpc>
-              <a:spcAft>
-                <a:spcPts val="300"/>
-              </a:spcAft>
-              <a:buSzPct val="100000"/>
-              <a:buChar char="•"/>
-            </a:pPr>
-            <a:r>
-              <a:rPr lang="en-US" sz="1000" dirty="0">
-                <a:solidFill>
-                  <a:srgbClr val="2C3E50"/>
-                </a:solidFill>
-                <a:latin typeface="Arial" pitchFamily="34" charset="0"/>
-                <a:ea typeface="Arial" pitchFamily="34" charset="-122"/>
-                <a:cs typeface="Arial" pitchFamily="34" charset="-120"/>
-              </a:rPr>
-              <a:t>Oracle validates final artifacts against union map</a:t>
-            </a:r>
-            <a:endParaRPr lang="en-US" sz="1000" dirty="0"/>
-          </a:p>
-        </p:txBody>
-      </p:sp>
-      <p:sp>
-        <p:nvSpPr>
-          <p:cNvPr id="15" name="Text 13"/>
-          <p:cNvSpPr/>
-          <p:nvPr/>
-        </p:nvSpPr>
-        <p:spPr>
-          <a:xfrm>
-            <a:off x="444401" y="3948112"/>
-            <a:ext cx="8255198" cy="1174105"/>
+                <a:spcPts val="400"/>
+              </a:spcAft>
+              <a:buNone/>
+            </a:pPr>
+            <a:r>
+              <a:rPr lang="en-US" sz="1300" b="1" dirty="0">
+                <a:solidFill>
+                  <a:srgbClr val="E67E22"/>
+                </a:solidFill>
+                <a:latin typeface="Arial" pitchFamily="34" charset="0"/>
+                <a:ea typeface="Arial" pitchFamily="34" charset="-122"/>
+                <a:cs typeface="Arial" pitchFamily="34" charset="-120"/>
+              </a:rPr>
+              <a:t>Final Deliverables:</a:t>
+            </a:r>
+            <a:endParaRPr lang="en-US" sz="1300" dirty="0"/>
+          </a:p>
+        </p:txBody>
+      </p:sp>
+      <p:sp>
+        <p:nvSpPr>
+          <p:cNvPr id="18" name="Text 16"/>
+          <p:cNvSpPr/>
+          <p:nvPr/>
+        </p:nvSpPr>
+        <p:spPr>
+          <a:xfrm>
+            <a:off x="615851" y="4631829"/>
+            <a:ext cx="1920925" cy="333375"/>
           </a:xfrm>
           <a:prstGeom prst="roundRect">
             <a:avLst>
-              <a:gd name="adj" fmla="val 4327"/>
+              <a:gd name="adj" fmla="val 15238"/>
             </a:avLst>
           </a:prstGeom>
           <a:solidFill>
-            <a:srgbClr val="EAFAF1"/>
+            <a:srgbClr val="FFFFFF"/>
           </a:solidFill>
-          <a:ln/>
+          <a:ln w="19050">
+            <a:solidFill>
+              <a:srgbClr val="F39C12"/>
+            </a:solidFill>
+          </a:ln>
         </p:spPr>
         <p:txBody>
           <a:bodyPr wrap="square" rtlCol="0" anchor="ctr"/>
@@ -5717,56 +7299,105 @@
       </p:sp>
       <p:sp>
         <p:nvSpPr>
-          <p:cNvPr id="16" name="Shape 14"/>
-          <p:cNvSpPr/>
-          <p:nvPr/>
-        </p:nvSpPr>
-        <p:spPr>
-          <a:xfrm>
-            <a:off x="472976" y="3948112"/>
-            <a:ext cx="0" cy="1174105"/>
-          </a:xfrm>
-          <a:prstGeom prst="line">
-            <a:avLst/>
-          </a:prstGeom>
-          <a:noFill/>
-          <a:ln w="57150">
+          <p:cNvPr id="19" name="Text 17"/>
+          <p:cNvSpPr/>
+          <p:nvPr/>
+        </p:nvSpPr>
+        <p:spPr>
+          <a:xfrm>
+            <a:off x="693797" y="4727079"/>
+            <a:ext cx="1765033" cy="142875"/>
+          </a:xfrm>
+          <a:prstGeom prst="rect">
+            <a:avLst/>
+          </a:prstGeom>
+          <a:noFill/>
+          <a:ln/>
+        </p:spPr>
+        <p:txBody>
+          <a:bodyPr wrap="square" lIns="0" tIns="0" rIns="0" bIns="0" rtlCol="0" anchor="t"/>
+          <a:lstStyle/>
+          <a:p>
+            <a:pPr algn="ctr" indent="0" marL="0">
+              <a:buNone/>
+            </a:pPr>
+            <a:r>
+              <a:rPr lang="en-US" sz="1000" b="1" dirty="0">
+                <a:solidFill>
+                  <a:srgbClr val="2C3E50"/>
+                </a:solidFill>
+                <a:latin typeface="Arial" pitchFamily="34" charset="0"/>
+                <a:ea typeface="Arial" pitchFamily="34" charset="-122"/>
+                <a:cs typeface="Arial" pitchFamily="34" charset="-120"/>
+              </a:rPr>
+              <a:t>Code (GitHub)</a:t>
+            </a:r>
+            <a:endParaRPr lang="en-US" sz="1000" dirty="0"/>
+          </a:p>
+        </p:txBody>
+      </p:sp>
+      <p:sp>
+        <p:nvSpPr>
+          <p:cNvPr id="20" name="Text 18"/>
+          <p:cNvSpPr/>
+          <p:nvPr/>
+        </p:nvSpPr>
+        <p:spPr>
+          <a:xfrm>
+            <a:off x="2612975" y="4631829"/>
+            <a:ext cx="1920925" cy="333375"/>
+          </a:xfrm>
+          <a:prstGeom prst="roundRect">
+            <a:avLst>
+              <a:gd name="adj" fmla="val 15238"/>
+            </a:avLst>
+          </a:prstGeom>
+          <a:solidFill>
+            <a:srgbClr val="FFFFFF"/>
+          </a:solidFill>
+          <a:ln w="19050">
             <a:solidFill>
-              <a:srgbClr val="27AE60"/>
+              <a:srgbClr val="F39C12"/>
             </a:solidFill>
-            <a:prstDash val="solid"/>
           </a:ln>
         </p:spPr>
-      </p:sp>
-      <p:sp>
-        <p:nvSpPr>
-          <p:cNvPr id="17" name="Text 15"/>
-          <p:cNvSpPr/>
-          <p:nvPr/>
-        </p:nvSpPr>
-        <p:spPr>
-          <a:xfrm>
-            <a:off x="653951" y="4049613"/>
-            <a:ext cx="8051113" cy="209550"/>
-          </a:xfrm>
-          <a:prstGeom prst="rect">
-            <a:avLst/>
-          </a:prstGeom>
-          <a:noFill/>
-          <a:ln/>
-        </p:spPr>
-        <p:txBody>
-          <a:bodyPr wrap="square" lIns="0" tIns="0" rIns="0" bIns="0" rtlCol="0" anchor="t"/>
-          <a:lstStyle/>
-          <a:p>
-            <a:pPr algn="l" indent="0" marL="0">
-              <a:spcAft>
-                <a:spcPts val="600"/>
-              </a:spcAft>
-              <a:buNone/>
-            </a:pPr>
-            <a:r>
-              <a:rPr lang="en-US" sz="1400" b="1" dirty="0">
+        <p:txBody>
+          <a:bodyPr wrap="square" rtlCol="0" anchor="ctr"/>
+          <a:lstStyle/>
+          <a:p>
+            <a:pPr indent="0" marL="0">
+              <a:buNone/>
+            </a:pPr>
+            <a:endParaRPr lang="en-US" dirty="0"/>
+          </a:p>
+        </p:txBody>
+      </p:sp>
+      <p:sp>
+        <p:nvSpPr>
+          <p:cNvPr id="21" name="Text 19"/>
+          <p:cNvSpPr/>
+          <p:nvPr/>
+        </p:nvSpPr>
+        <p:spPr>
+          <a:xfrm>
+            <a:off x="2690921" y="4727079"/>
+            <a:ext cx="1765033" cy="142875"/>
+          </a:xfrm>
+          <a:prstGeom prst="rect">
+            <a:avLst/>
+          </a:prstGeom>
+          <a:noFill/>
+          <a:ln/>
+        </p:spPr>
+        <p:txBody>
+          <a:bodyPr wrap="square" lIns="0" tIns="0" rIns="0" bIns="0" rtlCol="0" anchor="t"/>
+          <a:lstStyle/>
+          <a:p>
+            <a:pPr algn="ctr" indent="0" marL="0">
+              <a:buNone/>
+            </a:pPr>
+            <a:r>
+              <a:rPr lang="en-US" sz="1000" b="1" dirty="0">
                 <a:solidFill>
                   <a:srgbClr val="2C3E50"/>
                 </a:solidFill>
@@ -5774,89 +7405,145 @@
                 <a:ea typeface="Arial" pitchFamily="34" charset="-122"/>
                 <a:cs typeface="Arial" pitchFamily="34" charset="-120"/>
               </a:rPr>
-              <a:t>3. Metrics &amp; Why We Measure Them</a:t>
-            </a:r>
-            <a:endParaRPr lang="en-US" sz="1400" dirty="0"/>
-          </a:p>
-        </p:txBody>
-      </p:sp>
-      <p:sp>
-        <p:nvSpPr>
-          <p:cNvPr id="18" name="Text 16"/>
-          <p:cNvSpPr/>
-          <p:nvPr/>
-        </p:nvSpPr>
-        <p:spPr>
-          <a:xfrm>
-            <a:off x="653951" y="4335363"/>
-            <a:ext cx="8051113" cy="177701"/>
-          </a:xfrm>
-          <a:prstGeom prst="rect">
-            <a:avLst/>
-          </a:prstGeom>
-          <a:noFill/>
-          <a:ln/>
-        </p:spPr>
-        <p:txBody>
-          <a:bodyPr wrap="square" lIns="0" tIns="0" rIns="0" bIns="0" rtlCol="0" anchor="t"/>
-          <a:lstStyle/>
-          <a:p>
-            <a:pPr algn="l" indent="0" marL="0">
-              <a:lnSpc>
-                <a:spcPts val="1400"/>
-              </a:lnSpc>
-              <a:spcBef>
-                <a:spcPts val="400"/>
-              </a:spcBef>
-              <a:spcAft>
-                <a:spcPts val="400"/>
-              </a:spcAft>
+              <a:t>Dataset (1K grids)</a:t>
+            </a:r>
+            <a:endParaRPr lang="en-US" sz="1000" dirty="0"/>
+          </a:p>
+        </p:txBody>
+      </p:sp>
+      <p:sp>
+        <p:nvSpPr>
+          <p:cNvPr id="22" name="Text 20"/>
+          <p:cNvSpPr/>
+          <p:nvPr/>
+        </p:nvSpPr>
+        <p:spPr>
+          <a:xfrm>
+            <a:off x="4610100" y="4631829"/>
+            <a:ext cx="1920925" cy="333375"/>
+          </a:xfrm>
+          <a:prstGeom prst="roundRect">
+            <a:avLst>
+              <a:gd name="adj" fmla="val 15238"/>
+            </a:avLst>
+          </a:prstGeom>
+          <a:solidFill>
+            <a:srgbClr val="FFFFFF"/>
+          </a:solidFill>
+          <a:ln w="19050">
+            <a:solidFill>
+              <a:srgbClr val="F39C12"/>
+            </a:solidFill>
+          </a:ln>
+        </p:spPr>
+        <p:txBody>
+          <a:bodyPr wrap="square" rtlCol="0" anchor="ctr"/>
+          <a:lstStyle/>
+          <a:p>
+            <a:pPr indent="0" marL="0">
+              <a:buNone/>
+            </a:pPr>
+            <a:endParaRPr lang="en-US" dirty="0"/>
+          </a:p>
+        </p:txBody>
+      </p:sp>
+      <p:sp>
+        <p:nvSpPr>
+          <p:cNvPr id="23" name="Text 21"/>
+          <p:cNvSpPr/>
+          <p:nvPr/>
+        </p:nvSpPr>
+        <p:spPr>
+          <a:xfrm>
+            <a:off x="4688046" y="4727079"/>
+            <a:ext cx="1765033" cy="142875"/>
+          </a:xfrm>
+          <a:prstGeom prst="rect">
+            <a:avLst/>
+          </a:prstGeom>
+          <a:noFill/>
+          <a:ln/>
+        </p:spPr>
+        <p:txBody>
+          <a:bodyPr wrap="square" lIns="0" tIns="0" rIns="0" bIns="0" rtlCol="0" anchor="t"/>
+          <a:lstStyle/>
+          <a:p>
+            <a:pPr algn="ctr" indent="0" marL="0">
               <a:buNone/>
             </a:pPr>
             <a:r>
               <a:rPr lang="en-US" sz="1000" b="1" dirty="0">
                 <a:solidFill>
-                  <a:srgbClr val="27AE60"/>
-                </a:solidFill>
-                <a:latin typeface="Arial" pitchFamily="34" charset="0"/>
-                <a:ea typeface="Arial" pitchFamily="34" charset="-122"/>
-                <a:cs typeface="Arial" pitchFamily="34" charset="-120"/>
-              </a:rPr>
-              <a:t>✓</a:t>
-            </a:r>
-            <a:pPr algn="l" indent="0" marL="0">
-              <a:lnSpc>
-                <a:spcPts val="1400"/>
-              </a:lnSpc>
-              <a:spcBef>
-                <a:spcPts val="400"/>
-              </a:spcBef>
-              <a:spcAft>
-                <a:spcPts val="400"/>
-              </a:spcAft>
-              <a:buNone/>
-            </a:pPr>
-            <a:r>
-              <a:rPr lang="en-US" sz="1000" dirty="0">
-                <a:solidFill>
                   <a:srgbClr val="2C3E50"/>
                 </a:solidFill>
                 <a:latin typeface="Arial" pitchFamily="34" charset="0"/>
                 <a:ea typeface="Arial" pitchFamily="34" charset="-122"/>
                 <a:cs typeface="Arial" pitchFamily="34" charset="-120"/>
               </a:rPr>
-              <a:t> </a:t>
-            </a:r>
-            <a:pPr algn="l" indent="0" marL="0">
-              <a:lnSpc>
-                <a:spcPts val="1400"/>
-              </a:lnSpc>
-              <a:spcBef>
-                <a:spcPts val="400"/>
-              </a:spcBef>
-              <a:spcAft>
-                <a:spcPts val="400"/>
-              </a:spcAft>
+              <a:t>Paper (Arxiv)</a:t>
+            </a:r>
+            <a:endParaRPr lang="en-US" sz="1000" dirty="0"/>
+          </a:p>
+        </p:txBody>
+      </p:sp>
+      <p:sp>
+        <p:nvSpPr>
+          <p:cNvPr id="24" name="Text 22"/>
+          <p:cNvSpPr/>
+          <p:nvPr/>
+        </p:nvSpPr>
+        <p:spPr>
+          <a:xfrm>
+            <a:off x="6607225" y="4631829"/>
+            <a:ext cx="1920925" cy="333375"/>
+          </a:xfrm>
+          <a:prstGeom prst="roundRect">
+            <a:avLst>
+              <a:gd name="adj" fmla="val 15238"/>
+            </a:avLst>
+          </a:prstGeom>
+          <a:solidFill>
+            <a:srgbClr val="FFFFFF"/>
+          </a:solidFill>
+          <a:ln w="19050">
+            <a:solidFill>
+              <a:srgbClr val="F39C12"/>
+            </a:solidFill>
+          </a:ln>
+        </p:spPr>
+        <p:txBody>
+          <a:bodyPr wrap="square" rtlCol="0" anchor="ctr"/>
+          <a:lstStyle/>
+          <a:p>
+            <a:pPr indent="0" marL="0">
+              <a:buNone/>
+            </a:pPr>
+            <a:endParaRPr lang="en-US" dirty="0"/>
+          </a:p>
+        </p:txBody>
+      </p:sp>
+      <p:sp>
+        <p:nvSpPr>
+          <p:cNvPr id="25" name="Text 23"/>
+          <p:cNvSpPr/>
+          <p:nvPr/>
+        </p:nvSpPr>
+        <p:spPr>
+          <a:xfrm>
+            <a:off x="6685170" y="4727079"/>
+            <a:ext cx="1765033" cy="142875"/>
+          </a:xfrm>
+          <a:prstGeom prst="rect">
+            <a:avLst/>
+          </a:prstGeom>
+          <a:noFill/>
+          <a:ln/>
+        </p:spPr>
+        <p:txBody>
+          <a:bodyPr wrap="square" lIns="0" tIns="0" rIns="0" bIns="0" rtlCol="0" anchor="t"/>
+          <a:lstStyle/>
+          <a:p>
+            <a:pPr algn="ctr" indent="0" marL="0">
               <a:buNone/>
             </a:pPr>
             <a:r>
@@ -5868,264 +7555,7 @@
                 <a:ea typeface="Arial" pitchFamily="34" charset="-122"/>
                 <a:cs typeface="Arial" pitchFamily="34" charset="-120"/>
               </a:rPr>
-              <a:t>Correctness:</a:t>
-            </a:r>
-            <a:pPr algn="l" indent="0" marL="0">
-              <a:lnSpc>
-                <a:spcPts val="1400"/>
-              </a:lnSpc>
-              <a:spcBef>
-                <a:spcPts val="400"/>
-              </a:spcBef>
-              <a:spcAft>
-                <a:spcPts val="400"/>
-              </a:spcAft>
-              <a:buNone/>
-            </a:pPr>
-            <a:r>
-              <a:rPr lang="en-US" sz="1000" dirty="0">
-                <a:solidFill>
-                  <a:srgbClr val="2C3E50"/>
-                </a:solidFill>
-                <a:latin typeface="Arial" pitchFamily="34" charset="0"/>
-                <a:ea typeface="Arial" pitchFamily="34" charset="-122"/>
-                <a:cs typeface="Arial" pitchFamily="34" charset="-120"/>
-              </a:rPr>
-              <a:t> Oracle acceptance rate → Validates certificates work</a:t>
-            </a:r>
-            <a:endParaRPr lang="en-US" sz="1000" dirty="0"/>
-          </a:p>
-        </p:txBody>
-      </p:sp>
-      <p:sp>
-        <p:nvSpPr>
-          <p:cNvPr id="19" name="Text 17"/>
-          <p:cNvSpPr/>
-          <p:nvPr/>
-        </p:nvSpPr>
-        <p:spPr>
-          <a:xfrm>
-            <a:off x="653951" y="4563814"/>
-            <a:ext cx="8051113" cy="177701"/>
-          </a:xfrm>
-          <a:prstGeom prst="rect">
-            <a:avLst/>
-          </a:prstGeom>
-          <a:noFill/>
-          <a:ln/>
-        </p:spPr>
-        <p:txBody>
-          <a:bodyPr wrap="square" lIns="0" tIns="0" rIns="0" bIns="0" rtlCol="0" anchor="t"/>
-          <a:lstStyle/>
-          <a:p>
-            <a:pPr algn="l" indent="0" marL="0">
-              <a:lnSpc>
-                <a:spcPts val="1400"/>
-              </a:lnSpc>
-              <a:spcBef>
-                <a:spcPts val="400"/>
-              </a:spcBef>
-              <a:spcAft>
-                <a:spcPts val="400"/>
-              </a:spcAft>
-              <a:buNone/>
-            </a:pPr>
-            <a:r>
-              <a:rPr lang="en-US" sz="1000" b="1" dirty="0">
-                <a:solidFill>
-                  <a:srgbClr val="27AE60"/>
-                </a:solidFill>
-                <a:latin typeface="Arial" pitchFamily="34" charset="0"/>
-                <a:ea typeface="Arial" pitchFamily="34" charset="-122"/>
-                <a:cs typeface="Arial" pitchFamily="34" charset="-120"/>
-              </a:rPr>
-              <a:t>✓</a:t>
-            </a:r>
-            <a:pPr algn="l" indent="0" marL="0">
-              <a:lnSpc>
-                <a:spcPts val="1400"/>
-              </a:lnSpc>
-              <a:spcBef>
-                <a:spcPts val="400"/>
-              </a:spcBef>
-              <a:spcAft>
-                <a:spcPts val="400"/>
-              </a:spcAft>
-              <a:buNone/>
-            </a:pPr>
-            <a:r>
-              <a:rPr lang="en-US" sz="1000" dirty="0">
-                <a:solidFill>
-                  <a:srgbClr val="2C3E50"/>
-                </a:solidFill>
-                <a:latin typeface="Arial" pitchFamily="34" charset="0"/>
-                <a:ea typeface="Arial" pitchFamily="34" charset="-122"/>
-                <a:cs typeface="Arial" pitchFamily="34" charset="-120"/>
-              </a:rPr>
-              <a:t> </a:t>
-            </a:r>
-            <a:pPr algn="l" indent="0" marL="0">
-              <a:lnSpc>
-                <a:spcPts val="1400"/>
-              </a:lnSpc>
-              <a:spcBef>
-                <a:spcPts val="400"/>
-              </a:spcBef>
-              <a:spcAft>
-                <a:spcPts val="400"/>
-              </a:spcAft>
-              <a:buNone/>
-            </a:pPr>
-            <a:r>
-              <a:rPr lang="en-US" sz="1000" b="1" dirty="0">
-                <a:solidFill>
-                  <a:srgbClr val="2C3E50"/>
-                </a:solidFill>
-                <a:latin typeface="Arial" pitchFamily="34" charset="0"/>
-                <a:ea typeface="Arial" pitchFamily="34" charset="-122"/>
-                <a:cs typeface="Arial" pitchFamily="34" charset="-120"/>
-              </a:rPr>
-              <a:t>Efficiency:</a:t>
-            </a:r>
-            <a:pPr algn="l" indent="0" marL="0">
-              <a:lnSpc>
-                <a:spcPts val="1400"/>
-              </a:lnSpc>
-              <a:spcBef>
-                <a:spcPts val="400"/>
-              </a:spcBef>
-              <a:spcAft>
-                <a:spcPts val="400"/>
-              </a:spcAft>
-              <a:buNone/>
-            </a:pPr>
-            <a:r>
-              <a:rPr lang="en-US" sz="1000" dirty="0">
-                <a:solidFill>
-                  <a:srgbClr val="2C3E50"/>
-                </a:solidFill>
-                <a:latin typeface="Arial" pitchFamily="34" charset="0"/>
-                <a:ea typeface="Arial" pitchFamily="34" charset="-122"/>
-                <a:cs typeface="Arial" pitchFamily="34" charset="-120"/>
-              </a:rPr>
-              <a:t> Bytes + messages per conversation → Ensures practical overhead</a:t>
-            </a:r>
-            <a:endParaRPr lang="en-US" sz="1000" dirty="0"/>
-          </a:p>
-        </p:txBody>
-      </p:sp>
-      <p:sp>
-        <p:nvSpPr>
-          <p:cNvPr id="20" name="Text 18"/>
-          <p:cNvSpPr/>
-          <p:nvPr/>
-        </p:nvSpPr>
-        <p:spPr>
-          <a:xfrm>
-            <a:off x="653951" y="4792266"/>
-            <a:ext cx="8051113" cy="177701"/>
-          </a:xfrm>
-          <a:prstGeom prst="rect">
-            <a:avLst/>
-          </a:prstGeom>
-          <a:noFill/>
-          <a:ln/>
-        </p:spPr>
-        <p:txBody>
-          <a:bodyPr wrap="square" lIns="0" tIns="0" rIns="0" bIns="0" rtlCol="0" anchor="t"/>
-          <a:lstStyle/>
-          <a:p>
-            <a:pPr algn="l" indent="0" marL="0">
-              <a:lnSpc>
-                <a:spcPts val="1400"/>
-              </a:lnSpc>
-              <a:spcBef>
-                <a:spcPts val="400"/>
-              </a:spcBef>
-              <a:spcAft>
-                <a:spcPts val="400"/>
-              </a:spcAft>
-              <a:buNone/>
-            </a:pPr>
-            <a:r>
-              <a:rPr lang="en-US" sz="1000" b="1" dirty="0">
-                <a:solidFill>
-                  <a:srgbClr val="27AE60"/>
-                </a:solidFill>
-                <a:latin typeface="Arial" pitchFamily="34" charset="0"/>
-                <a:ea typeface="Arial" pitchFamily="34" charset="-122"/>
-                <a:cs typeface="Arial" pitchFamily="34" charset="-120"/>
-              </a:rPr>
-              <a:t>✓</a:t>
-            </a:r>
-            <a:pPr algn="l" indent="0" marL="0">
-              <a:lnSpc>
-                <a:spcPts val="1400"/>
-              </a:lnSpc>
-              <a:spcBef>
-                <a:spcPts val="400"/>
-              </a:spcBef>
-              <a:spcAft>
-                <a:spcPts val="400"/>
-              </a:spcAft>
-              <a:buNone/>
-            </a:pPr>
-            <a:r>
-              <a:rPr lang="en-US" sz="1000" dirty="0">
-                <a:solidFill>
-                  <a:srgbClr val="2C3E50"/>
-                </a:solidFill>
-                <a:latin typeface="Arial" pitchFamily="34" charset="0"/>
-                <a:ea typeface="Arial" pitchFamily="34" charset="-122"/>
-                <a:cs typeface="Arial" pitchFamily="34" charset="-120"/>
-              </a:rPr>
-              <a:t> </a:t>
-            </a:r>
-            <a:pPr algn="l" indent="0" marL="0">
-              <a:lnSpc>
-                <a:spcPts val="1400"/>
-              </a:lnSpc>
-              <a:spcBef>
-                <a:spcPts val="400"/>
-              </a:spcBef>
-              <a:spcAft>
-                <a:spcPts val="400"/>
-              </a:spcAft>
-              <a:buNone/>
-            </a:pPr>
-            <a:r>
-              <a:rPr lang="en-US" sz="1000" b="1" dirty="0">
-                <a:solidFill>
-                  <a:srgbClr val="2C3E50"/>
-                </a:solidFill>
-                <a:latin typeface="Arial" pitchFamily="34" charset="0"/>
-                <a:ea typeface="Arial" pitchFamily="34" charset="-122"/>
-                <a:cs typeface="Arial" pitchFamily="34" charset="-120"/>
-              </a:rPr>
-              <a:t>Interpretability:</a:t>
-            </a:r>
-            <a:pPr algn="l" indent="0" marL="0">
-              <a:lnSpc>
-                <a:spcPts val="1400"/>
-              </a:lnSpc>
-              <a:spcBef>
-                <a:spcPts val="400"/>
-              </a:spcBef>
-              <a:spcAft>
-                <a:spcPts val="400"/>
-              </a:spcAft>
-              <a:buNone/>
-            </a:pPr>
-            <a:r>
-              <a:rPr lang="en-US" sz="1000" dirty="0">
-                <a:solidFill>
-                  <a:srgbClr val="2C3E50"/>
-                </a:solidFill>
-                <a:latin typeface="Arial" pitchFamily="34" charset="0"/>
-                <a:ea typeface="Arial" pitchFamily="34" charset="-122"/>
-                <a:cs typeface="Arial" pitchFamily="34" charset="-120"/>
-              </a:rPr>
-              <a:t> Human verification time → Tests auditability feasibility</a:t>
+              <a:t>Presentation</a:t>
             </a:r>
             <a:endParaRPr lang="en-US" sz="1000" dirty="0"/>
           </a:p>
@@ -6171,7 +7601,7 @@
         </p:nvSpPr>
         <p:spPr>
           <a:xfrm>
-            <a:off x="-91440" y="126950"/>
+            <a:off x="-91440" y="101501"/>
             <a:ext cx="9326880" cy="323850"/>
           </a:xfrm>
           <a:prstGeom prst="rect">
@@ -6186,52 +7616,52 @@
           <a:p>
             <a:pPr algn="ctr" indent="0" marL="0">
               <a:spcBef>
+                <a:spcPts val="800"/>
+              </a:spcBef>
+              <a:spcAft>
+                <a:spcPts val="400"/>
+              </a:spcAft>
+              <a:buNone/>
+            </a:pPr>
+            <a:r>
+              <a:rPr lang="en-US" sz="2200" b="1" dirty="0">
+                <a:solidFill>
+                  <a:srgbClr val="2C3E50"/>
+                </a:solidFill>
+                <a:latin typeface="Arial" pitchFamily="34" charset="0"/>
+                <a:ea typeface="Arial" pitchFamily="34" charset="-122"/>
+                <a:cs typeface="Arial" pitchFamily="34" charset="-120"/>
+              </a:rPr>
+              <a:t>Risks &amp; Mitigation</a:t>
+            </a:r>
+            <a:endParaRPr lang="en-US" sz="2200" dirty="0"/>
+          </a:p>
+        </p:txBody>
+      </p:sp>
+      <p:sp>
+        <p:nvSpPr>
+          <p:cNvPr id="3" name="Text 1"/>
+          <p:cNvSpPr/>
+          <p:nvPr/>
+        </p:nvSpPr>
+        <p:spPr>
+          <a:xfrm>
+            <a:off x="-91440" y="476101"/>
+            <a:ext cx="9326880" cy="171450"/>
+          </a:xfrm>
+          <a:prstGeom prst="rect">
+            <a:avLst/>
+          </a:prstGeom>
+          <a:noFill/>
+          <a:ln/>
+        </p:spPr>
+        <p:txBody>
+          <a:bodyPr wrap="square" lIns="0" tIns="0" rIns="0" bIns="0" rtlCol="0" anchor="t"/>
+          <a:lstStyle/>
+          <a:p>
+            <a:pPr algn="ctr" indent="0" marL="0">
+              <a:spcAft>
                 <a:spcPts val="1000"/>
-              </a:spcBef>
-              <a:spcAft>
-                <a:spcPts val="600"/>
-              </a:spcAft>
-              <a:buNone/>
-            </a:pPr>
-            <a:r>
-              <a:rPr lang="en-US" sz="2200" b="1" dirty="0">
-                <a:solidFill>
-                  <a:srgbClr val="2C3E50"/>
-                </a:solidFill>
-                <a:latin typeface="Arial" pitchFamily="34" charset="0"/>
-                <a:ea typeface="Arial" pitchFamily="34" charset="-122"/>
-                <a:cs typeface="Arial" pitchFamily="34" charset="-120"/>
-              </a:rPr>
-              <a:t>Timeline &amp; Deliverables</a:t>
-            </a:r>
-            <a:endParaRPr lang="en-US" sz="2200" dirty="0"/>
-          </a:p>
-        </p:txBody>
-      </p:sp>
-      <p:sp>
-        <p:nvSpPr>
-          <p:cNvPr id="3" name="Text 1"/>
-          <p:cNvSpPr/>
-          <p:nvPr/>
-        </p:nvSpPr>
-        <p:spPr>
-          <a:xfrm>
-            <a:off x="-91440" y="527000"/>
-            <a:ext cx="9326880" cy="171450"/>
-          </a:xfrm>
-          <a:prstGeom prst="rect">
-            <a:avLst/>
-          </a:prstGeom>
-          <a:noFill/>
-          <a:ln/>
-        </p:spPr>
-        <p:txBody>
-          <a:bodyPr wrap="square" lIns="0" tIns="0" rIns="0" bIns="0" rtlCol="0" anchor="t"/>
-          <a:lstStyle/>
-          <a:p>
-            <a:pPr algn="ctr" indent="0" marL="0">
-              <a:spcAft>
-                <a:spcPts val="800"/>
               </a:spcAft>
               <a:buNone/>
             </a:pPr>
@@ -6244,7 +7674,7 @@
                 <a:ea typeface="Arial" pitchFamily="34" charset="-122"/>
                 <a:cs typeface="Arial" pitchFamily="34" charset="-120"/>
               </a:rPr>
-              <a:t>Oct 26 → Early Dec</a:t>
+              <a:t>Anticipated challenges and our strategies</a:t>
             </a:r>
             <a:endParaRPr lang="en-US" sz="1200" dirty="0"/>
           </a:p>
@@ -6258,18 +7688,22 @@
         </p:nvSpPr>
         <p:spPr>
           <a:xfrm>
-            <a:off x="444401" y="799951"/>
-            <a:ext cx="8255198" cy="298252"/>
+            <a:off x="444401" y="774502"/>
+            <a:ext cx="4032349" cy="1019770"/>
           </a:xfrm>
           <a:prstGeom prst="roundRect">
             <a:avLst>
-              <a:gd name="adj" fmla="val 17033"/>
+              <a:gd name="adj" fmla="val 7472"/>
             </a:avLst>
           </a:prstGeom>
           <a:solidFill>
-            <a:srgbClr val="3498DB"/>
+            <a:srgbClr val="FADBD8"/>
           </a:solidFill>
-          <a:ln/>
+          <a:ln w="19050">
+            <a:solidFill>
+              <a:srgbClr val="E74C3C"/>
+            </a:solidFill>
+          </a:ln>
         </p:spPr>
         <p:txBody>
           <a:bodyPr wrap="square" rtlCol="0" anchor="ctr"/>
@@ -6290,8 +7724,8 @@
         </p:nvSpPr>
         <p:spPr>
           <a:xfrm>
-            <a:off x="571351" y="863352"/>
-            <a:ext cx="8161324" cy="171450"/>
+            <a:off x="641152" y="945952"/>
+            <a:ext cx="3711625" cy="257175"/>
           </a:xfrm>
           <a:prstGeom prst="rect">
             <a:avLst/>
@@ -6304,20 +7738,23 @@
           <a:lstStyle/>
           <a:p>
             <a:pPr algn="l" indent="0" marL="0">
-              <a:buNone/>
-            </a:pPr>
-            <a:r>
-              <a:rPr lang="en-US" sz="1200" b="1" dirty="0">
-                <a:solidFill>
-                  <a:srgbClr val="FFFFFF"/>
-                </a:solidFill>
-                <a:latin typeface="Arial" pitchFamily="34" charset="0"/>
-                <a:ea typeface="Arial" pitchFamily="34" charset="-122"/>
-                <a:cs typeface="Arial" pitchFamily="34" charset="-120"/>
-              </a:rPr>
-              <a:t>Week 1-2 (Oct 26 - Nov 8): Core Implementation</a:t>
-            </a:r>
-            <a:endParaRPr lang="en-US" sz="1200" dirty="0"/>
+              <a:spcAft>
+                <a:spcPts val="600"/>
+              </a:spcAft>
+              <a:buNone/>
+            </a:pPr>
+            <a:r>
+              <a:rPr lang="en-US" sz="1300" b="1" dirty="0">
+                <a:solidFill>
+                  <a:srgbClr val="C0392B"/>
+                </a:solidFill>
+                <a:latin typeface="Arial" pitchFamily="34" charset="0"/>
+                <a:ea typeface="Arial" pitchFamily="34" charset="-122"/>
+                <a:cs typeface="Arial" pitchFamily="34" charset="-120"/>
+              </a:rPr>
+              <a:t>⚠️ Computational Scalability</a:t>
+            </a:r>
+            <a:endParaRPr lang="en-US" sz="1300" dirty="0"/>
           </a:p>
         </p:txBody>
       </p:sp>
@@ -6329,31 +7766,27 @@
         </p:nvSpPr>
         <p:spPr>
           <a:xfrm>
-            <a:off x="571351" y="1148953"/>
-            <a:ext cx="8001298" cy="309711"/>
-          </a:xfrm>
-          <a:prstGeom prst="rect">
-            <a:avLst/>
-          </a:prstGeom>
-          <a:noFill/>
-          <a:ln/>
-        </p:spPr>
-        <p:txBody>
-          <a:bodyPr wrap="square" lIns="101600" tIns="0" rIns="0" bIns="0" rtlCol="0" anchor="t"/>
-          <a:lstStyle/>
-          <a:p>
-            <a:pPr algn="l" marL="101600" indent="-101600">
+            <a:off x="641152" y="1279327"/>
+            <a:ext cx="3711625" cy="195560"/>
+          </a:xfrm>
+          <a:prstGeom prst="rect">
+            <a:avLst/>
+          </a:prstGeom>
+          <a:noFill/>
+          <a:ln/>
+        </p:spPr>
+        <p:txBody>
+          <a:bodyPr wrap="square" lIns="0" tIns="0" rIns="0" bIns="0" rtlCol="0" anchor="t"/>
+          <a:lstStyle/>
+          <a:p>
+            <a:pPr algn="l" indent="0" marL="0">
               <a:lnSpc>
-                <a:spcPts val="1170"/>
+                <a:spcPts val="1540"/>
               </a:lnSpc>
-              <a:spcAft>
-                <a:spcPts val="100"/>
-              </a:spcAft>
-              <a:buSzPct val="100000"/>
-              <a:buChar char="•"/>
-            </a:pPr>
-            <a:r>
-              <a:rPr lang="en-US" sz="900" dirty="0">
+              <a:buNone/>
+            </a:pPr>
+            <a:r>
+              <a:rPr lang="en-US" sz="1100" dirty="0">
                 <a:solidFill>
                   <a:srgbClr val="2C3E50"/>
                 </a:solidFill>
@@ -6361,33 +7794,9 @@
                 <a:ea typeface="Arial" pitchFamily="34" charset="-122"/>
                 <a:cs typeface="Arial" pitchFamily="34" charset="-120"/>
               </a:rPr>
-              <a:t>CertTalk protocol + PATH/CUT encodings</a:t>
-            </a:r>
-            <a:endParaRPr lang="en-US" sz="900" dirty="0"/>
-          </a:p>
-          <a:p>
-            <a:pPr algn="l" marL="101600" indent="-101600">
-              <a:lnSpc>
-                <a:spcPts val="1170"/>
-              </a:lnSpc>
-              <a:spcAft>
-                <a:spcPts val="100"/>
-              </a:spcAft>
-              <a:buSzPct val="100000"/>
-              <a:buChar char="•"/>
-            </a:pPr>
-            <a:r>
-              <a:rPr lang="en-US" sz="900" dirty="0">
-                <a:solidFill>
-                  <a:srgbClr val="2C3E50"/>
-                </a:solidFill>
-                <a:latin typeface="Arial" pitchFamily="34" charset="0"/>
-                <a:ea typeface="Arial" pitchFamily="34" charset="-122"/>
-                <a:cs typeface="Arial" pitchFamily="34" charset="-120"/>
-              </a:rPr>
-              <a:t>Witness bit negotiation + Oracle verification</a:t>
-            </a:r>
-            <a:endParaRPr lang="en-US" sz="900" dirty="0"/>
+              <a:t>Simulation caps at 22×22 grids (1,000 seeds max)</a:t>
+            </a:r>
+            <a:endParaRPr lang="en-US" sz="1100" dirty="0"/>
           </a:p>
         </p:txBody>
       </p:sp>
@@ -6399,52 +7808,75 @@
         </p:nvSpPr>
         <p:spPr>
           <a:xfrm>
-            <a:off x="571351" y="1496764"/>
-            <a:ext cx="8001298" cy="250031"/>
+            <a:off x="4667250" y="774502"/>
+            <a:ext cx="4032349" cy="1019770"/>
           </a:xfrm>
           <a:prstGeom prst="roundRect">
             <a:avLst>
-              <a:gd name="adj" fmla="val 15238"/>
+              <a:gd name="adj" fmla="val 7472"/>
             </a:avLst>
           </a:prstGeom>
           <a:solidFill>
-            <a:srgbClr val="E8F8F5"/>
+            <a:srgbClr val="D5F4E6"/>
           </a:solidFill>
-          <a:ln/>
-        </p:spPr>
-        <p:txBody>
-          <a:bodyPr wrap="square" rtlCol="0" anchor="ctr"/>
-          <a:lstStyle/>
-          <a:p>
-            <a:pPr indent="0" marL="0">
-              <a:buNone/>
-            </a:pPr>
-            <a:endParaRPr lang="en-US" dirty="0"/>
-          </a:p>
-        </p:txBody>
-      </p:sp>
-      <p:sp>
-        <p:nvSpPr>
-          <p:cNvPr id="8" name="Shape 6"/>
-          <p:cNvSpPr/>
-          <p:nvPr/>
-        </p:nvSpPr>
-        <p:spPr>
-          <a:xfrm>
-            <a:off x="595164" y="1496764"/>
-            <a:ext cx="0" cy="250031"/>
-          </a:xfrm>
-          <a:prstGeom prst="line">
-            <a:avLst/>
-          </a:prstGeom>
-          <a:noFill/>
-          <a:ln w="47625">
+          <a:ln w="19050">
             <a:solidFill>
               <a:srgbClr val="27AE60"/>
             </a:solidFill>
-            <a:prstDash val="solid"/>
           </a:ln>
         </p:spPr>
+        <p:txBody>
+          <a:bodyPr wrap="square" rtlCol="0" anchor="ctr"/>
+          <a:lstStyle/>
+          <a:p>
+            <a:pPr indent="0" marL="0">
+              <a:buNone/>
+            </a:pPr>
+            <a:endParaRPr lang="en-US" dirty="0"/>
+          </a:p>
+        </p:txBody>
+      </p:sp>
+      <p:sp>
+        <p:nvSpPr>
+          <p:cNvPr id="8" name="Text 6"/>
+          <p:cNvSpPr/>
+          <p:nvPr/>
+        </p:nvSpPr>
+        <p:spPr>
+          <a:xfrm>
+            <a:off x="4864001" y="945952"/>
+            <a:ext cx="3711625" cy="209550"/>
+          </a:xfrm>
+          <a:prstGeom prst="rect">
+            <a:avLst/>
+          </a:prstGeom>
+          <a:noFill/>
+          <a:ln/>
+        </p:spPr>
+        <p:txBody>
+          <a:bodyPr wrap="square" lIns="0" tIns="0" rIns="0" bIns="0" rtlCol="0" anchor="t"/>
+          <a:lstStyle/>
+          <a:p>
+            <a:pPr algn="l" indent="0" marL="0">
+              <a:spcAft>
+                <a:spcPts val="600"/>
+              </a:spcAft>
+              <a:buNone/>
+            </a:pPr>
+            <a:r>
+              <a:rPr lang="en-US" sz="1300" b="1" dirty="0">
+                <a:solidFill>
+                  <a:srgbClr val="27AE60"/>
+                </a:solidFill>
+                <a:latin typeface="Arial" pitchFamily="34" charset="0"/>
+                <a:ea typeface="Arial" pitchFamily="34" charset="-122"/>
+                <a:cs typeface="Arial" pitchFamily="34" charset="-120"/>
+              </a:rPr>
+              <a:t>✓ Mitigation</a:t>
+            </a:r>
+            <a:endParaRPr lang="en-US" sz="1300" dirty="0"/>
+          </a:p>
+        </p:txBody>
       </p:sp>
       <p:sp>
         <p:nvSpPr>
@@ -6454,8 +7886,8 @@
         </p:nvSpPr>
         <p:spPr>
           <a:xfrm>
-            <a:off x="720477" y="1547515"/>
-            <a:ext cx="7905685" cy="148530"/>
+            <a:off x="4864001" y="1231702"/>
+            <a:ext cx="3711625" cy="391120"/>
           </a:xfrm>
           <a:prstGeom prst="rect">
             <a:avLst/>
@@ -6469,22 +7901,22 @@
           <a:p>
             <a:pPr algn="l" indent="0" marL="0">
               <a:lnSpc>
-                <a:spcPts val="1170"/>
+                <a:spcPts val="1540"/>
               </a:lnSpc>
               <a:buNone/>
             </a:pPr>
             <a:r>
-              <a:rPr lang="en-US" sz="900" b="1" dirty="0">
-                <a:solidFill>
-                  <a:srgbClr val="27AE60"/>
-                </a:solidFill>
-                <a:latin typeface="Arial" pitchFamily="34" charset="0"/>
-                <a:ea typeface="Arial" pitchFamily="34" charset="-122"/>
-                <a:cs typeface="Arial" pitchFamily="34" charset="-120"/>
-              </a:rPr>
-              <a:t>✓ Checkpoint: 2-agent demo working</a:t>
-            </a:r>
-            <a:endParaRPr lang="en-US" sz="900" dirty="0"/>
+              <a:rPr lang="en-US" sz="1100" dirty="0">
+                <a:solidFill>
+                  <a:srgbClr val="2C3E50"/>
+                </a:solidFill>
+                <a:latin typeface="Arial" pitchFamily="34" charset="0"/>
+                <a:ea typeface="Arial" pitchFamily="34" charset="-122"/>
+                <a:cs typeface="Arial" pitchFamily="34" charset="-120"/>
+              </a:rPr>
+              <a:t>Focus on 4×4 to 22×22 range, vary density, document limits</a:t>
+            </a:r>
+            <a:endParaRPr lang="en-US" sz="1100" dirty="0"/>
           </a:p>
         </p:txBody>
       </p:sp>
@@ -6496,18 +7928,22 @@
         </p:nvSpPr>
         <p:spPr>
           <a:xfrm>
-            <a:off x="444401" y="1848296"/>
-            <a:ext cx="8255198" cy="298252"/>
+            <a:off x="444401" y="2022872"/>
+            <a:ext cx="4032349" cy="1019770"/>
           </a:xfrm>
           <a:prstGeom prst="roundRect">
             <a:avLst>
-              <a:gd name="adj" fmla="val 17033"/>
+              <a:gd name="adj" fmla="val 7472"/>
             </a:avLst>
           </a:prstGeom>
           <a:solidFill>
-            <a:srgbClr val="3498DB"/>
+            <a:srgbClr val="FADBD8"/>
           </a:solidFill>
-          <a:ln/>
+          <a:ln w="19050">
+            <a:solidFill>
+              <a:srgbClr val="E74C3C"/>
+            </a:solidFill>
+          </a:ln>
         </p:spPr>
         <p:txBody>
           <a:bodyPr wrap="square" rtlCol="0" anchor="ctr"/>
@@ -6528,8 +7964,8 @@
         </p:nvSpPr>
         <p:spPr>
           <a:xfrm>
-            <a:off x="571351" y="1911697"/>
-            <a:ext cx="8161324" cy="171450"/>
+            <a:off x="641152" y="2194322"/>
+            <a:ext cx="3711625" cy="257175"/>
           </a:xfrm>
           <a:prstGeom prst="rect">
             <a:avLst/>
@@ -6542,20 +7978,23 @@
           <a:lstStyle/>
           <a:p>
             <a:pPr algn="l" indent="0" marL="0">
-              <a:buNone/>
-            </a:pPr>
-            <a:r>
-              <a:rPr lang="en-US" sz="1200" b="1" dirty="0">
-                <a:solidFill>
-                  <a:srgbClr val="FFFFFF"/>
-                </a:solidFill>
-                <a:latin typeface="Arial" pitchFamily="34" charset="0"/>
-                <a:ea typeface="Arial" pitchFamily="34" charset="-122"/>
-                <a:cs typeface="Arial" pitchFamily="34" charset="-120"/>
-              </a:rPr>
-              <a:t>Week 3-4 (Nov 9 - Nov 22): Baselines &amp; Dataset</a:t>
-            </a:r>
-            <a:endParaRPr lang="en-US" sz="1200" dirty="0"/>
+              <a:spcAft>
+                <a:spcPts val="600"/>
+              </a:spcAft>
+              <a:buNone/>
+            </a:pPr>
+            <a:r>
+              <a:rPr lang="en-US" sz="1300" b="1" dirty="0">
+                <a:solidFill>
+                  <a:srgbClr val="C0392B"/>
+                </a:solidFill>
+                <a:latin typeface="Arial" pitchFamily="34" charset="0"/>
+                <a:ea typeface="Arial" pitchFamily="34" charset="-122"/>
+                <a:cs typeface="Arial" pitchFamily="34" charset="-120"/>
+              </a:rPr>
+              <a:t>⚠️ Timeline Pressure</a:t>
+            </a:r>
+            <a:endParaRPr lang="en-US" sz="1300" dirty="0"/>
           </a:p>
         </p:txBody>
       </p:sp>
@@ -6567,31 +8006,27 @@
         </p:nvSpPr>
         <p:spPr>
           <a:xfrm>
-            <a:off x="571351" y="2197298"/>
-            <a:ext cx="8001298" cy="309711"/>
-          </a:xfrm>
-          <a:prstGeom prst="rect">
-            <a:avLst/>
-          </a:prstGeom>
-          <a:noFill/>
-          <a:ln/>
-        </p:spPr>
-        <p:txBody>
-          <a:bodyPr wrap="square" lIns="101600" tIns="0" rIns="0" bIns="0" rtlCol="0" anchor="t"/>
-          <a:lstStyle/>
-          <a:p>
-            <a:pPr algn="l" marL="101600" indent="-101600">
+            <a:off x="641152" y="2527697"/>
+            <a:ext cx="3711625" cy="195560"/>
+          </a:xfrm>
+          <a:prstGeom prst="rect">
+            <a:avLst/>
+          </a:prstGeom>
+          <a:noFill/>
+          <a:ln/>
+        </p:spPr>
+        <p:txBody>
+          <a:bodyPr wrap="square" lIns="0" tIns="0" rIns="0" bIns="0" rtlCol="0" anchor="t"/>
+          <a:lstStyle/>
+          <a:p>
+            <a:pPr algn="l" indent="0" marL="0">
               <a:lnSpc>
-                <a:spcPts val="1170"/>
+                <a:spcPts val="1540"/>
               </a:lnSpc>
-              <a:spcAft>
-                <a:spcPts val="100"/>
-              </a:spcAft>
-              <a:buSzPct val="100000"/>
-              <a:buChar char="•"/>
-            </a:pPr>
-            <a:r>
-              <a:rPr lang="en-US" sz="900" dirty="0">
+              <a:buNone/>
+            </a:pPr>
+            <a:r>
+              <a:rPr lang="en-US" sz="1100" dirty="0">
                 <a:solidFill>
                   <a:srgbClr val="2C3E50"/>
                 </a:solidFill>
@@ -6599,33 +8034,9 @@
                 <a:ea typeface="Arial" pitchFamily="34" charset="-122"/>
                 <a:cs typeface="Arial" pitchFamily="34" charset="-120"/>
               </a:rPr>
-              <a:t>Baseline systems + 1,000 grid instances generated</a:t>
-            </a:r>
-            <a:endParaRPr lang="en-US" sz="900" dirty="0"/>
-          </a:p>
-          <a:p>
-            <a:pPr algn="l" marL="101600" indent="-101600">
-              <a:lnSpc>
-                <a:spcPts val="1170"/>
-              </a:lnSpc>
-              <a:spcAft>
-                <a:spcPts val="100"/>
-              </a:spcAft>
-              <a:buSzPct val="100000"/>
-              <a:buChar char="•"/>
-            </a:pPr>
-            <a:r>
-              <a:rPr lang="en-US" sz="900" dirty="0">
-                <a:solidFill>
-                  <a:srgbClr val="2C3E50"/>
-                </a:solidFill>
-                <a:latin typeface="Arial" pitchFamily="34" charset="0"/>
-                <a:ea typeface="Arial" pitchFamily="34" charset="-122"/>
-                <a:cs typeface="Arial" pitchFamily="34" charset="-120"/>
-              </a:rPr>
-              <a:t>Test harness for running all systems</a:t>
-            </a:r>
-            <a:endParaRPr lang="en-US" sz="900" dirty="0"/>
+              <a:t>Dec 6 deadline: experiments + analysis + paper</a:t>
+            </a:r>
+            <a:endParaRPr lang="en-US" sz="1100" dirty="0"/>
           </a:p>
         </p:txBody>
       </p:sp>
@@ -6637,52 +8048,75 @@
         </p:nvSpPr>
         <p:spPr>
           <a:xfrm>
-            <a:off x="571351" y="2545110"/>
-            <a:ext cx="8001298" cy="250031"/>
+            <a:off x="4667250" y="2022872"/>
+            <a:ext cx="4032349" cy="1019770"/>
           </a:xfrm>
           <a:prstGeom prst="roundRect">
             <a:avLst>
-              <a:gd name="adj" fmla="val 15238"/>
+              <a:gd name="adj" fmla="val 7472"/>
             </a:avLst>
           </a:prstGeom>
           <a:solidFill>
-            <a:srgbClr val="E8F8F5"/>
+            <a:srgbClr val="D5F4E6"/>
           </a:solidFill>
-          <a:ln/>
-        </p:spPr>
-        <p:txBody>
-          <a:bodyPr wrap="square" rtlCol="0" anchor="ctr"/>
-          <a:lstStyle/>
-          <a:p>
-            <a:pPr indent="0" marL="0">
-              <a:buNone/>
-            </a:pPr>
-            <a:endParaRPr lang="en-US" dirty="0"/>
-          </a:p>
-        </p:txBody>
-      </p:sp>
-      <p:sp>
-        <p:nvSpPr>
-          <p:cNvPr id="14" name="Shape 12"/>
-          <p:cNvSpPr/>
-          <p:nvPr/>
-        </p:nvSpPr>
-        <p:spPr>
-          <a:xfrm>
-            <a:off x="595164" y="2545110"/>
-            <a:ext cx="0" cy="250031"/>
-          </a:xfrm>
-          <a:prstGeom prst="line">
-            <a:avLst/>
-          </a:prstGeom>
-          <a:noFill/>
-          <a:ln w="47625">
+          <a:ln w="19050">
             <a:solidFill>
               <a:srgbClr val="27AE60"/>
             </a:solidFill>
-            <a:prstDash val="solid"/>
           </a:ln>
         </p:spPr>
+        <p:txBody>
+          <a:bodyPr wrap="square" rtlCol="0" anchor="ctr"/>
+          <a:lstStyle/>
+          <a:p>
+            <a:pPr indent="0" marL="0">
+              <a:buNone/>
+            </a:pPr>
+            <a:endParaRPr lang="en-US" dirty="0"/>
+          </a:p>
+        </p:txBody>
+      </p:sp>
+      <p:sp>
+        <p:nvSpPr>
+          <p:cNvPr id="14" name="Text 12"/>
+          <p:cNvSpPr/>
+          <p:nvPr/>
+        </p:nvSpPr>
+        <p:spPr>
+          <a:xfrm>
+            <a:off x="4864001" y="2194322"/>
+            <a:ext cx="3711625" cy="209550"/>
+          </a:xfrm>
+          <a:prstGeom prst="rect">
+            <a:avLst/>
+          </a:prstGeom>
+          <a:noFill/>
+          <a:ln/>
+        </p:spPr>
+        <p:txBody>
+          <a:bodyPr wrap="square" lIns="0" tIns="0" rIns="0" bIns="0" rtlCol="0" anchor="t"/>
+          <a:lstStyle/>
+          <a:p>
+            <a:pPr algn="l" indent="0" marL="0">
+              <a:spcAft>
+                <a:spcPts val="600"/>
+              </a:spcAft>
+              <a:buNone/>
+            </a:pPr>
+            <a:r>
+              <a:rPr lang="en-US" sz="1300" b="1" dirty="0">
+                <a:solidFill>
+                  <a:srgbClr val="27AE60"/>
+                </a:solidFill>
+                <a:latin typeface="Arial" pitchFamily="34" charset="0"/>
+                <a:ea typeface="Arial" pitchFamily="34" charset="-122"/>
+                <a:cs typeface="Arial" pitchFamily="34" charset="-120"/>
+              </a:rPr>
+              <a:t>✓ Mitigation</a:t>
+            </a:r>
+            <a:endParaRPr lang="en-US" sz="1300" dirty="0"/>
+          </a:p>
+        </p:txBody>
       </p:sp>
       <p:sp>
         <p:nvSpPr>
@@ -6692,8 +8126,8 @@
         </p:nvSpPr>
         <p:spPr>
           <a:xfrm>
-            <a:off x="720477" y="2595860"/>
-            <a:ext cx="7905685" cy="148530"/>
+            <a:off x="4864001" y="2480072"/>
+            <a:ext cx="3711625" cy="391120"/>
           </a:xfrm>
           <a:prstGeom prst="rect">
             <a:avLst/>
@@ -6707,129 +8141,12 @@
           <a:p>
             <a:pPr algn="l" indent="0" marL="0">
               <a:lnSpc>
-                <a:spcPts val="1170"/>
+                <a:spcPts val="1540"/>
               </a:lnSpc>
               <a:buNone/>
             </a:pPr>
             <a:r>
-              <a:rPr lang="en-US" sz="900" b="1" dirty="0">
-                <a:solidFill>
-                  <a:srgbClr val="27AE60"/>
-                </a:solidFill>
-                <a:latin typeface="Arial" pitchFamily="34" charset="0"/>
-                <a:ea typeface="Arial" pitchFamily="34" charset="-122"/>
-                <a:cs typeface="Arial" pitchFamily="34" charset="-120"/>
-              </a:rPr>
-              <a:t>✓ Checkpoint: All systems run on samples</a:t>
-            </a:r>
-            <a:endParaRPr lang="en-US" sz="900" dirty="0"/>
-          </a:p>
-        </p:txBody>
-      </p:sp>
-      <p:sp>
-        <p:nvSpPr>
-          <p:cNvPr id="16" name="Text 14"/>
-          <p:cNvSpPr/>
-          <p:nvPr/>
-        </p:nvSpPr>
-        <p:spPr>
-          <a:xfrm>
-            <a:off x="444401" y="2896642"/>
-            <a:ext cx="8255198" cy="298252"/>
-          </a:xfrm>
-          <a:prstGeom prst="roundRect">
-            <a:avLst>
-              <a:gd name="adj" fmla="val 17033"/>
-            </a:avLst>
-          </a:prstGeom>
-          <a:solidFill>
-            <a:srgbClr val="3498DB"/>
-          </a:solidFill>
-          <a:ln/>
-        </p:spPr>
-        <p:txBody>
-          <a:bodyPr wrap="square" rtlCol="0" anchor="ctr"/>
-          <a:lstStyle/>
-          <a:p>
-            <a:pPr indent="0" marL="0">
-              <a:buNone/>
-            </a:pPr>
-            <a:endParaRPr lang="en-US" dirty="0"/>
-          </a:p>
-        </p:txBody>
-      </p:sp>
-      <p:sp>
-        <p:nvSpPr>
-          <p:cNvPr id="17" name="Text 15"/>
-          <p:cNvSpPr/>
-          <p:nvPr/>
-        </p:nvSpPr>
-        <p:spPr>
-          <a:xfrm>
-            <a:off x="571351" y="2960043"/>
-            <a:ext cx="8161324" cy="171450"/>
-          </a:xfrm>
-          <a:prstGeom prst="rect">
-            <a:avLst/>
-          </a:prstGeom>
-          <a:noFill/>
-          <a:ln/>
-        </p:spPr>
-        <p:txBody>
-          <a:bodyPr wrap="square" lIns="0" tIns="0" rIns="0" bIns="0" rtlCol="0" anchor="t"/>
-          <a:lstStyle/>
-          <a:p>
-            <a:pPr algn="l" indent="0" marL="0">
-              <a:buNone/>
-            </a:pPr>
-            <a:r>
-              <a:rPr lang="en-US" sz="1200" b="1" dirty="0">
-                <a:solidFill>
-                  <a:srgbClr val="FFFFFF"/>
-                </a:solidFill>
-                <a:latin typeface="Arial" pitchFamily="34" charset="0"/>
-                <a:ea typeface="Arial" pitchFamily="34" charset="-122"/>
-                <a:cs typeface="Arial" pitchFamily="34" charset="-120"/>
-              </a:rPr>
-              <a:t>Week 5-6 (Nov 23 - Dec 6): Experiments &amp; Analysis</a:t>
-            </a:r>
-            <a:endParaRPr lang="en-US" sz="1200" dirty="0"/>
-          </a:p>
-        </p:txBody>
-      </p:sp>
-      <p:sp>
-        <p:nvSpPr>
-          <p:cNvPr id="18" name="Text 16"/>
-          <p:cNvSpPr/>
-          <p:nvPr/>
-        </p:nvSpPr>
-        <p:spPr>
-          <a:xfrm>
-            <a:off x="571351" y="3245644"/>
-            <a:ext cx="8001298" cy="309711"/>
-          </a:xfrm>
-          <a:prstGeom prst="rect">
-            <a:avLst/>
-          </a:prstGeom>
-          <a:noFill/>
-          <a:ln/>
-        </p:spPr>
-        <p:txBody>
-          <a:bodyPr wrap="square" lIns="101600" tIns="0" rIns="0" bIns="0" rtlCol="0" anchor="t"/>
-          <a:lstStyle/>
-          <a:p>
-            <a:pPr algn="l" marL="101600" indent="-101600">
-              <a:lnSpc>
-                <a:spcPts val="1170"/>
-              </a:lnSpc>
-              <a:spcAft>
-                <a:spcPts val="100"/>
-              </a:spcAft>
-              <a:buSzPct val="100000"/>
-              <a:buChar char="•"/>
-            </a:pPr>
-            <a:r>
-              <a:rPr lang="en-US" sz="900" dirty="0">
+              <a:rPr lang="en-US" sz="1100" dirty="0">
                 <a:solidFill>
                   <a:srgbClr val="2C3E50"/>
                 </a:solidFill>
@@ -6837,508 +8154,9 @@
                 <a:ea typeface="Arial" pitchFamily="34" charset="-122"/>
                 <a:cs typeface="Arial" pitchFamily="34" charset="-120"/>
               </a:rPr>
-              <a:t>Full experimental runs + Human study</a:t>
-            </a:r>
-            <a:endParaRPr lang="en-US" sz="900" dirty="0"/>
-          </a:p>
-          <a:p>
-            <a:pPr algn="l" marL="101600" indent="-101600">
-              <a:lnSpc>
-                <a:spcPts val="1170"/>
-              </a:lnSpc>
-              <a:spcAft>
-                <a:spcPts val="100"/>
-              </a:spcAft>
-              <a:buSzPct val="100000"/>
-              <a:buChar char="•"/>
-            </a:pPr>
-            <a:r>
-              <a:rPr lang="en-US" sz="900" dirty="0">
-                <a:solidFill>
-                  <a:srgbClr val="2C3E50"/>
-                </a:solidFill>
-                <a:latin typeface="Arial" pitchFamily="34" charset="0"/>
-                <a:ea typeface="Arial" pitchFamily="34" charset="-122"/>
-                <a:cs typeface="Arial" pitchFamily="34" charset="-120"/>
-              </a:rPr>
-              <a:t>Statistical analysis &amp; paper draft</a:t>
-            </a:r>
-            <a:endParaRPr lang="en-US" sz="900" dirty="0"/>
-          </a:p>
-        </p:txBody>
-      </p:sp>
-      <p:sp>
-        <p:nvSpPr>
-          <p:cNvPr id="19" name="Text 17"/>
-          <p:cNvSpPr/>
-          <p:nvPr/>
-        </p:nvSpPr>
-        <p:spPr>
-          <a:xfrm>
-            <a:off x="571351" y="3593455"/>
-            <a:ext cx="8001298" cy="250031"/>
-          </a:xfrm>
-          <a:prstGeom prst="roundRect">
-            <a:avLst>
-              <a:gd name="adj" fmla="val 15238"/>
-            </a:avLst>
-          </a:prstGeom>
-          <a:solidFill>
-            <a:srgbClr val="E8F8F5"/>
-          </a:solidFill>
-          <a:ln/>
-        </p:spPr>
-        <p:txBody>
-          <a:bodyPr wrap="square" rtlCol="0" anchor="ctr"/>
-          <a:lstStyle/>
-          <a:p>
-            <a:pPr indent="0" marL="0">
-              <a:buNone/>
-            </a:pPr>
-            <a:endParaRPr lang="en-US" dirty="0"/>
-          </a:p>
-        </p:txBody>
-      </p:sp>
-      <p:sp>
-        <p:nvSpPr>
-          <p:cNvPr id="20" name="Shape 18"/>
-          <p:cNvSpPr/>
-          <p:nvPr/>
-        </p:nvSpPr>
-        <p:spPr>
-          <a:xfrm>
-            <a:off x="595164" y="3593455"/>
-            <a:ext cx="0" cy="250031"/>
-          </a:xfrm>
-          <a:prstGeom prst="line">
-            <a:avLst/>
-          </a:prstGeom>
-          <a:noFill/>
-          <a:ln w="47625">
-            <a:solidFill>
-              <a:srgbClr val="27AE60"/>
-            </a:solidFill>
-            <a:prstDash val="solid"/>
-          </a:ln>
-        </p:spPr>
-      </p:sp>
-      <p:sp>
-        <p:nvSpPr>
-          <p:cNvPr id="21" name="Text 19"/>
-          <p:cNvSpPr/>
-          <p:nvPr/>
-        </p:nvSpPr>
-        <p:spPr>
-          <a:xfrm>
-            <a:off x="720477" y="3644205"/>
-            <a:ext cx="7905685" cy="148530"/>
-          </a:xfrm>
-          <a:prstGeom prst="rect">
-            <a:avLst/>
-          </a:prstGeom>
-          <a:noFill/>
-          <a:ln/>
-        </p:spPr>
-        <p:txBody>
-          <a:bodyPr wrap="square" lIns="0" tIns="0" rIns="0" bIns="0" rtlCol="0" anchor="t"/>
-          <a:lstStyle/>
-          <a:p>
-            <a:pPr algn="l" indent="0" marL="0">
-              <a:lnSpc>
-                <a:spcPts val="1170"/>
-              </a:lnSpc>
-              <a:buNone/>
-            </a:pPr>
-            <a:r>
-              <a:rPr lang="en-US" sz="900" b="1" dirty="0">
-                <a:solidFill>
-                  <a:srgbClr val="27AE60"/>
-                </a:solidFill>
-                <a:latin typeface="Arial" pitchFamily="34" charset="0"/>
-                <a:ea typeface="Arial" pitchFamily="34" charset="-122"/>
-                <a:cs typeface="Arial" pitchFamily="34" charset="-120"/>
-              </a:rPr>
-              <a:t>✓ Checkpoint: Results complete</a:t>
-            </a:r>
-            <a:endParaRPr lang="en-US" sz="900" dirty="0"/>
-          </a:p>
-        </p:txBody>
-      </p:sp>
-      <p:sp>
-        <p:nvSpPr>
-          <p:cNvPr id="22" name="Text 20"/>
-          <p:cNvSpPr/>
-          <p:nvPr/>
-        </p:nvSpPr>
-        <p:spPr>
-          <a:xfrm>
-            <a:off x="444401" y="4071938"/>
-            <a:ext cx="8255198" cy="837902"/>
-          </a:xfrm>
-          <a:prstGeom prst="roundRect">
-            <a:avLst>
-              <a:gd name="adj" fmla="val 9094"/>
-            </a:avLst>
-          </a:prstGeom>
-          <a:solidFill>
-            <a:srgbClr val="FFF9E6"/>
-          </a:solidFill>
-          <a:ln w="19050">
-            <a:solidFill>
-              <a:srgbClr val="F39C12"/>
-            </a:solidFill>
-          </a:ln>
-        </p:spPr>
-        <p:txBody>
-          <a:bodyPr wrap="square" rtlCol="0" anchor="ctr"/>
-          <a:lstStyle/>
-          <a:p>
-            <a:pPr indent="0" marL="0">
-              <a:buNone/>
-            </a:pPr>
-            <a:endParaRPr lang="en-US" dirty="0"/>
-          </a:p>
-        </p:txBody>
-      </p:sp>
-      <p:sp>
-        <p:nvSpPr>
-          <p:cNvPr id="23" name="Text 21"/>
-          <p:cNvSpPr/>
-          <p:nvPr/>
-        </p:nvSpPr>
-        <p:spPr>
-          <a:xfrm>
-            <a:off x="615851" y="4192488"/>
-            <a:ext cx="8070544" cy="200025"/>
-          </a:xfrm>
-          <a:prstGeom prst="rect">
-            <a:avLst/>
-          </a:prstGeom>
-          <a:noFill/>
-          <a:ln/>
-        </p:spPr>
-        <p:txBody>
-          <a:bodyPr wrap="square" lIns="0" tIns="0" rIns="0" bIns="0" rtlCol="0" anchor="t"/>
-          <a:lstStyle/>
-          <a:p>
-            <a:pPr algn="l" indent="0" marL="0">
-              <a:spcAft>
-                <a:spcPts val="500"/>
-              </a:spcAft>
-              <a:buNone/>
-            </a:pPr>
-            <a:r>
-              <a:rPr lang="en-US" sz="1300" b="1" dirty="0">
-                <a:solidFill>
-                  <a:srgbClr val="E67E22"/>
-                </a:solidFill>
-                <a:latin typeface="Arial" pitchFamily="34" charset="0"/>
-                <a:ea typeface="Arial" pitchFamily="34" charset="-122"/>
-                <a:cs typeface="Arial" pitchFamily="34" charset="-120"/>
-              </a:rPr>
-              <a:t>Final Deliverables:</a:t>
-            </a:r>
-            <a:endParaRPr lang="en-US" sz="1300" dirty="0"/>
-          </a:p>
-        </p:txBody>
-      </p:sp>
-      <p:sp>
-        <p:nvSpPr>
-          <p:cNvPr id="24" name="Text 22"/>
-          <p:cNvSpPr/>
-          <p:nvPr/>
-        </p:nvSpPr>
-        <p:spPr>
-          <a:xfrm>
-            <a:off x="615851" y="4455914"/>
-            <a:ext cx="1920925" cy="333375"/>
-          </a:xfrm>
-          <a:prstGeom prst="roundRect">
-            <a:avLst>
-              <a:gd name="adj" fmla="val 15238"/>
-            </a:avLst>
-          </a:prstGeom>
-          <a:solidFill>
-            <a:srgbClr val="FFFFFF"/>
-          </a:solidFill>
-          <a:ln w="19050">
-            <a:solidFill>
-              <a:srgbClr val="F39C12"/>
-            </a:solidFill>
-          </a:ln>
-        </p:spPr>
-        <p:txBody>
-          <a:bodyPr wrap="square" rtlCol="0" anchor="ctr"/>
-          <a:lstStyle/>
-          <a:p>
-            <a:pPr indent="0" marL="0">
-              <a:buNone/>
-            </a:pPr>
-            <a:endParaRPr lang="en-US" dirty="0"/>
-          </a:p>
-        </p:txBody>
-      </p:sp>
-      <p:sp>
-        <p:nvSpPr>
-          <p:cNvPr id="25" name="Text 23"/>
-          <p:cNvSpPr/>
-          <p:nvPr/>
-        </p:nvSpPr>
-        <p:spPr>
-          <a:xfrm>
-            <a:off x="693797" y="4551164"/>
-            <a:ext cx="1765033" cy="142875"/>
-          </a:xfrm>
-          <a:prstGeom prst="rect">
-            <a:avLst/>
-          </a:prstGeom>
-          <a:noFill/>
-          <a:ln/>
-        </p:spPr>
-        <p:txBody>
-          <a:bodyPr wrap="square" lIns="0" tIns="0" rIns="0" bIns="0" rtlCol="0" anchor="t"/>
-          <a:lstStyle/>
-          <a:p>
-            <a:pPr algn="ctr" indent="0" marL="0">
-              <a:buNone/>
-            </a:pPr>
-            <a:r>
-              <a:rPr lang="en-US" sz="1000" b="1" dirty="0">
-                <a:solidFill>
-                  <a:srgbClr val="2C3E50"/>
-                </a:solidFill>
-                <a:latin typeface="Arial" pitchFamily="34" charset="0"/>
-                <a:ea typeface="Arial" pitchFamily="34" charset="-122"/>
-                <a:cs typeface="Arial" pitchFamily="34" charset="-120"/>
-              </a:rPr>
-              <a:t>Code (GitHub)</a:t>
-            </a:r>
-            <a:endParaRPr lang="en-US" sz="1000" dirty="0"/>
-          </a:p>
-        </p:txBody>
-      </p:sp>
-      <p:sp>
-        <p:nvSpPr>
-          <p:cNvPr id="26" name="Text 24"/>
-          <p:cNvSpPr/>
-          <p:nvPr/>
-        </p:nvSpPr>
-        <p:spPr>
-          <a:xfrm>
-            <a:off x="2612975" y="4455914"/>
-            <a:ext cx="1920925" cy="333375"/>
-          </a:xfrm>
-          <a:prstGeom prst="roundRect">
-            <a:avLst>
-              <a:gd name="adj" fmla="val 15238"/>
-            </a:avLst>
-          </a:prstGeom>
-          <a:solidFill>
-            <a:srgbClr val="FFFFFF"/>
-          </a:solidFill>
-          <a:ln w="19050">
-            <a:solidFill>
-              <a:srgbClr val="F39C12"/>
-            </a:solidFill>
-          </a:ln>
-        </p:spPr>
-        <p:txBody>
-          <a:bodyPr wrap="square" rtlCol="0" anchor="ctr"/>
-          <a:lstStyle/>
-          <a:p>
-            <a:pPr indent="0" marL="0">
-              <a:buNone/>
-            </a:pPr>
-            <a:endParaRPr lang="en-US" dirty="0"/>
-          </a:p>
-        </p:txBody>
-      </p:sp>
-      <p:sp>
-        <p:nvSpPr>
-          <p:cNvPr id="27" name="Text 25"/>
-          <p:cNvSpPr/>
-          <p:nvPr/>
-        </p:nvSpPr>
-        <p:spPr>
-          <a:xfrm>
-            <a:off x="2690921" y="4551164"/>
-            <a:ext cx="1765033" cy="142875"/>
-          </a:xfrm>
-          <a:prstGeom prst="rect">
-            <a:avLst/>
-          </a:prstGeom>
-          <a:noFill/>
-          <a:ln/>
-        </p:spPr>
-        <p:txBody>
-          <a:bodyPr wrap="square" lIns="0" tIns="0" rIns="0" bIns="0" rtlCol="0" anchor="t"/>
-          <a:lstStyle/>
-          <a:p>
-            <a:pPr algn="ctr" indent="0" marL="0">
-              <a:buNone/>
-            </a:pPr>
-            <a:r>
-              <a:rPr lang="en-US" sz="1000" b="1" dirty="0">
-                <a:solidFill>
-                  <a:srgbClr val="2C3E50"/>
-                </a:solidFill>
-                <a:latin typeface="Arial" pitchFamily="34" charset="0"/>
-                <a:ea typeface="Arial" pitchFamily="34" charset="-122"/>
-                <a:cs typeface="Arial" pitchFamily="34" charset="-120"/>
-              </a:rPr>
-              <a:t>Dataset (1K grids)</a:t>
-            </a:r>
-            <a:endParaRPr lang="en-US" sz="1000" dirty="0"/>
-          </a:p>
-        </p:txBody>
-      </p:sp>
-      <p:sp>
-        <p:nvSpPr>
-          <p:cNvPr id="28" name="Text 26"/>
-          <p:cNvSpPr/>
-          <p:nvPr/>
-        </p:nvSpPr>
-        <p:spPr>
-          <a:xfrm>
-            <a:off x="4610100" y="4455914"/>
-            <a:ext cx="1920925" cy="333375"/>
-          </a:xfrm>
-          <a:prstGeom prst="roundRect">
-            <a:avLst>
-              <a:gd name="adj" fmla="val 15238"/>
-            </a:avLst>
-          </a:prstGeom>
-          <a:solidFill>
-            <a:srgbClr val="FFFFFF"/>
-          </a:solidFill>
-          <a:ln w="19050">
-            <a:solidFill>
-              <a:srgbClr val="F39C12"/>
-            </a:solidFill>
-          </a:ln>
-        </p:spPr>
-        <p:txBody>
-          <a:bodyPr wrap="square" rtlCol="0" anchor="ctr"/>
-          <a:lstStyle/>
-          <a:p>
-            <a:pPr indent="0" marL="0">
-              <a:buNone/>
-            </a:pPr>
-            <a:endParaRPr lang="en-US" dirty="0"/>
-          </a:p>
-        </p:txBody>
-      </p:sp>
-      <p:sp>
-        <p:nvSpPr>
-          <p:cNvPr id="29" name="Text 27"/>
-          <p:cNvSpPr/>
-          <p:nvPr/>
-        </p:nvSpPr>
-        <p:spPr>
-          <a:xfrm>
-            <a:off x="4688046" y="4551164"/>
-            <a:ext cx="1765033" cy="142875"/>
-          </a:xfrm>
-          <a:prstGeom prst="rect">
-            <a:avLst/>
-          </a:prstGeom>
-          <a:noFill/>
-          <a:ln/>
-        </p:spPr>
-        <p:txBody>
-          <a:bodyPr wrap="square" lIns="0" tIns="0" rIns="0" bIns="0" rtlCol="0" anchor="t"/>
-          <a:lstStyle/>
-          <a:p>
-            <a:pPr algn="ctr" indent="0" marL="0">
-              <a:buNone/>
-            </a:pPr>
-            <a:r>
-              <a:rPr lang="en-US" sz="1000" b="1" dirty="0">
-                <a:solidFill>
-                  <a:srgbClr val="2C3E50"/>
-                </a:solidFill>
-                <a:latin typeface="Arial" pitchFamily="34" charset="0"/>
-                <a:ea typeface="Arial" pitchFamily="34" charset="-122"/>
-                <a:cs typeface="Arial" pitchFamily="34" charset="-120"/>
-              </a:rPr>
-              <a:t>Paper (Arxiv)</a:t>
-            </a:r>
-            <a:endParaRPr lang="en-US" sz="1000" dirty="0"/>
-          </a:p>
-        </p:txBody>
-      </p:sp>
-      <p:sp>
-        <p:nvSpPr>
-          <p:cNvPr id="30" name="Text 28"/>
-          <p:cNvSpPr/>
-          <p:nvPr/>
-        </p:nvSpPr>
-        <p:spPr>
-          <a:xfrm>
-            <a:off x="6607225" y="4455914"/>
-            <a:ext cx="1920925" cy="333375"/>
-          </a:xfrm>
-          <a:prstGeom prst="roundRect">
-            <a:avLst>
-              <a:gd name="adj" fmla="val 15238"/>
-            </a:avLst>
-          </a:prstGeom>
-          <a:solidFill>
-            <a:srgbClr val="FFFFFF"/>
-          </a:solidFill>
-          <a:ln w="19050">
-            <a:solidFill>
-              <a:srgbClr val="F39C12"/>
-            </a:solidFill>
-          </a:ln>
-        </p:spPr>
-        <p:txBody>
-          <a:bodyPr wrap="square" rtlCol="0" anchor="ctr"/>
-          <a:lstStyle/>
-          <a:p>
-            <a:pPr indent="0" marL="0">
-              <a:buNone/>
-            </a:pPr>
-            <a:endParaRPr lang="en-US" dirty="0"/>
-          </a:p>
-        </p:txBody>
-      </p:sp>
-      <p:sp>
-        <p:nvSpPr>
-          <p:cNvPr id="31" name="Text 29"/>
-          <p:cNvSpPr/>
-          <p:nvPr/>
-        </p:nvSpPr>
-        <p:spPr>
-          <a:xfrm>
-            <a:off x="6685170" y="4551164"/>
-            <a:ext cx="1765033" cy="142875"/>
-          </a:xfrm>
-          <a:prstGeom prst="rect">
-            <a:avLst/>
-          </a:prstGeom>
-          <a:noFill/>
-          <a:ln/>
-        </p:spPr>
-        <p:txBody>
-          <a:bodyPr wrap="square" lIns="0" tIns="0" rIns="0" bIns="0" rtlCol="0" anchor="t"/>
-          <a:lstStyle/>
-          <a:p>
-            <a:pPr algn="ctr" indent="0" marL="0">
-              <a:buNone/>
-            </a:pPr>
-            <a:r>
-              <a:rPr lang="en-US" sz="1000" b="1" dirty="0">
-                <a:solidFill>
-                  <a:srgbClr val="2C3E50"/>
-                </a:solidFill>
-                <a:latin typeface="Arial" pitchFamily="34" charset="0"/>
-                <a:ea typeface="Arial" pitchFamily="34" charset="-122"/>
-                <a:cs typeface="Arial" pitchFamily="34" charset="-120"/>
-              </a:rPr>
-              <a:t>Presentation</a:t>
-            </a:r>
-            <a:endParaRPr lang="en-US" sz="1000" dirty="0"/>
+              <a:t>Test other baselines only once Send-All vs CertTalk work rigorously</a:t>
+            </a:r>
+            <a:endParaRPr lang="en-US" sz="1100" dirty="0"/>
           </a:p>
         </p:txBody>
       </p:sp>
